--- a/docs/pptx/carbo/jx-carbo-linsubhr-sens-grade3.pptx
+++ b/docs/pptx/carbo/jx-carbo-linsubhr-sens-grade3.pptx
@@ -5303,7 +5303,7 @@
           <p:spPr>
             <a:xfrm>
               <a:off x="817517" y="1896563"/>
-              <a:ext cx="6236116" cy="82021"/>
+              <a:ext cx="6899879" cy="82021"/>
             </a:xfrm>
             <a:prstGeom prst="rect">
               <a:avLst/>
@@ -5335,7 +5335,7 @@
                   <a:latin typeface="Helvetica"/>
                   <a:cs typeface="Helvetica"/>
                 </a:rPr>
-                <a:t>subHR per 0.1 ratio decline: 1.40 (1.23-1.60), p = &lt;0.001  |  per IQR decline (Δ = 0.28): 2.58 (1.79-3.70)  |  IQR: [0.70, 0.98]</a:t>
+                <a:t>subHR per 0.1 ratio decline: 1.40 (1.23-1.60), p_Bonf = &lt;0.001 (n = 6)  |  per IQR decline (Δ = 0.28): 2.58 (1.79-3.70)  |  IQR: [0.70, 0.98]</a:t>
               </a:r>
             </a:p>
           </p:txBody>

--- a/docs/pptx/carbo/jx-carbo-linsubhr-sens-grade3.pptx
+++ b/docs/pptx/carbo/jx-carbo-linsubhr-sens-grade3.pptx
@@ -5026,8 +5026,8 @@
           </p:nvSpPr>
           <p:spPr>
             <a:xfrm>
-              <a:off x="2155289" y="5785772"/>
-              <a:ext cx="155356" cy="80101"/>
+              <a:off x="2152181" y="5785772"/>
+              <a:ext cx="161574" cy="80101"/>
             </a:xfrm>
             <a:prstGeom prst="rect">
               <a:avLst/>
@@ -5059,7 +5059,7 @@
                   <a:latin typeface="Helvetica"/>
                   <a:cs typeface="Helvetica"/>
                 </a:rPr>
-                <a:t>0.6</a:t>
+                <a:t>-40</a:t>
               </a:r>
             </a:p>
           </p:txBody>
@@ -5072,8 +5072,8 @@
           </p:nvSpPr>
           <p:spPr>
             <a:xfrm>
-              <a:off x="3887213" y="5785772"/>
-              <a:ext cx="155356" cy="80101"/>
+              <a:off x="3884104" y="5785772"/>
+              <a:ext cx="161574" cy="80101"/>
             </a:xfrm>
             <a:prstGeom prst="rect">
               <a:avLst/>
@@ -5105,7 +5105,7 @@
                   <a:latin typeface="Helvetica"/>
                   <a:cs typeface="Helvetica"/>
                 </a:rPr>
-                <a:t>0.8</a:t>
+                <a:t>-20</a:t>
               </a:r>
             </a:p>
           </p:txBody>
@@ -5118,8 +5118,8 @@
           </p:nvSpPr>
           <p:spPr>
             <a:xfrm>
-              <a:off x="5619136" y="5785772"/>
-              <a:ext cx="155356" cy="80101"/>
+              <a:off x="5665725" y="5785772"/>
+              <a:ext cx="62179" cy="80101"/>
             </a:xfrm>
             <a:prstGeom prst="rect">
               <a:avLst/>
@@ -5151,7 +5151,7 @@
                   <a:latin typeface="Helvetica"/>
                   <a:cs typeface="Helvetica"/>
                 </a:rPr>
-                <a:t>1.0</a:t>
+                <a:t>0</a:t>
               </a:r>
             </a:p>
           </p:txBody>
@@ -5164,8 +5164,8 @@
           </p:nvSpPr>
           <p:spPr>
             <a:xfrm>
-              <a:off x="7351060" y="5785772"/>
-              <a:ext cx="155356" cy="80101"/>
+              <a:off x="7366559" y="5785772"/>
+              <a:ext cx="124358" cy="80101"/>
             </a:xfrm>
             <a:prstGeom prst="rect">
               <a:avLst/>
@@ -5197,7 +5197,7 @@
                   <a:latin typeface="Helvetica"/>
                   <a:cs typeface="Helvetica"/>
                 </a:rPr>
-                <a:t>1.2</a:t>
+                <a:t>20</a:t>
               </a:r>
             </a:p>
           </p:txBody>
@@ -5210,8 +5210,8 @@
           </p:nvSpPr>
           <p:spPr>
             <a:xfrm>
-              <a:off x="2691419" y="5925448"/>
-              <a:ext cx="4051889" cy="100218"/>
+              <a:off x="1561815" y="5925448"/>
+              <a:ext cx="6311097" cy="100218"/>
             </a:xfrm>
             <a:prstGeom prst="rect">
               <a:avLst/>
@@ -5243,7 +5243,7 @@
                   <a:latin typeface="Helvetica"/>
                   <a:cs typeface="Helvetica"/>
                 </a:rPr>
-                <a:t>Sensitivity eGFR Ratio (CKD-EPI 2012 CysC / CKD-EPI 2021 Cr)</a:t>
+                <a:t>Sensitivity eGFR Difference (%): 100 × (CKD-EPI 2012 CysC − CKD-EPI 2021 Cr) / CKD-EPI 2021 Cr</a:t>
               </a:r>
             </a:p>
           </p:txBody>
@@ -5303,7 +5303,7 @@
           <p:spPr>
             <a:xfrm>
               <a:off x="817517" y="1896563"/>
-              <a:ext cx="6899879" cy="82021"/>
+              <a:ext cx="7026615" cy="82021"/>
             </a:xfrm>
             <a:prstGeom prst="rect">
               <a:avLst/>
@@ -5335,7 +5335,7 @@
                   <a:latin typeface="Helvetica"/>
                   <a:cs typeface="Helvetica"/>
                 </a:rPr>
-                <a:t>subHR per 0.1 ratio decline: 1.40 (1.23-1.60), p_Bonf = &lt;0.001 (n = 6)  |  per IQR decline (Δ = 0.28): 2.58 (1.79-3.70)  |  IQR: [0.70, 0.98]</a:t>
+                <a:t>subHR per 10 % decline: 1.40 (1.23-1.60), p_Bonf = &lt;0.001 (n = 6)  |  per IQR decline (Δ = 28.0 %): 2.58 (1.79-3.70)  |  IQR: [-30.0, -2.0] %</a:t>
               </a:r>
             </a:p>
           </p:txBody>

--- a/docs/pptx/carbo/jx-carbo-linsubhr-sens-grade3.pptx
+++ b/docs/pptx/carbo/jx-carbo-linsubhr-sens-grade3.pptx
@@ -2265,34 +2265,26 @@
         </p:sp>
         <p:sp>
           <p:nvSpPr>
-            <p:cNvPr id="4" name="pl4"/>
+            <p:cNvPr id="4" name="rc4"/>
             <p:cNvSpPr/>
             <p:nvPr/>
           </p:nvSpPr>
           <p:spPr>
             <a:xfrm>
-              <a:off x="817517" y="5142518"/>
-              <a:ext cx="7799693" cy="0"/>
+              <a:off x="457200" y="1600200"/>
+              <a:ext cx="8229600" cy="4525962"/>
             </a:xfrm>
-            <a:custGeom>
+            <a:prstGeom prst="rect">
               <a:avLst/>
-              <a:pathLst>
-                <a:path w="7799693" h="0">
-                  <a:moveTo>
-                    <a:pt x="0" y="0"/>
-                  </a:moveTo>
-                  <a:lnTo>
-                    <a:pt x="7799693" y="0"/>
-                  </a:lnTo>
-                  <a:lnTo>
-                    <a:pt x="7799693" y="0"/>
-                  </a:lnTo>
-                </a:path>
-              </a:pathLst>
-            </a:custGeom>
-            <a:ln w="6775" cap="flat">
+            </a:prstGeom>
+            <a:solidFill>
+              <a:srgbClr val="FFFFFF">
+                <a:alpha val="100000"/>
+              </a:srgbClr>
+            </a:solidFill>
+            <a:ln w="13550" cap="rnd">
               <a:solidFill>
-                <a:srgbClr val="EBEBEB">
+                <a:srgbClr val="FFFFFF">
                   <a:alpha val="100000"/>
                 </a:srgbClr>
               </a:solidFill>
@@ -2314,21 +2306,21 @@
           </p:nvSpPr>
           <p:spPr>
             <a:xfrm>
-              <a:off x="817517" y="4313054"/>
-              <a:ext cx="7799693" cy="0"/>
+              <a:off x="887106" y="3250627"/>
+              <a:ext cx="7660515" cy="0"/>
             </a:xfrm>
             <a:custGeom>
               <a:avLst/>
               <a:pathLst>
-                <a:path w="7799693" h="0">
+                <a:path w="7660515" h="0">
                   <a:moveTo>
                     <a:pt x="0" y="0"/>
                   </a:moveTo>
                   <a:lnTo>
-                    <a:pt x="7799693" y="0"/>
-                  </a:lnTo>
-                  <a:lnTo>
-                    <a:pt x="7799693" y="0"/>
+                    <a:pt x="7660515" y="0"/>
+                  </a:lnTo>
+                  <a:lnTo>
+                    <a:pt x="7660515" y="0"/>
                   </a:lnTo>
                 </a:path>
               </a:pathLst>
@@ -2357,21 +2349,21 @@
           </p:nvSpPr>
           <p:spPr>
             <a:xfrm>
-              <a:off x="817517" y="3483591"/>
-              <a:ext cx="7799693" cy="0"/>
+              <a:off x="887106" y="2951293"/>
+              <a:ext cx="7660515" cy="0"/>
             </a:xfrm>
             <a:custGeom>
               <a:avLst/>
               <a:pathLst>
-                <a:path w="7799693" h="0">
+                <a:path w="7660515" h="0">
                   <a:moveTo>
                     <a:pt x="0" y="0"/>
                   </a:moveTo>
                   <a:lnTo>
-                    <a:pt x="7799693" y="0"/>
-                  </a:lnTo>
-                  <a:lnTo>
-                    <a:pt x="7799693" y="0"/>
+                    <a:pt x="7660515" y="0"/>
+                  </a:lnTo>
+                  <a:lnTo>
+                    <a:pt x="7660515" y="0"/>
                   </a:lnTo>
                 </a:path>
               </a:pathLst>
@@ -2400,21 +2392,21 @@
           </p:nvSpPr>
           <p:spPr>
             <a:xfrm>
-              <a:off x="817517" y="2654127"/>
-              <a:ext cx="7799693" cy="0"/>
+              <a:off x="887106" y="2651959"/>
+              <a:ext cx="7660515" cy="0"/>
             </a:xfrm>
             <a:custGeom>
               <a:avLst/>
               <a:pathLst>
-                <a:path w="7799693" h="0">
+                <a:path w="7660515" h="0">
                   <a:moveTo>
                     <a:pt x="0" y="0"/>
                   </a:moveTo>
                   <a:lnTo>
-                    <a:pt x="7799693" y="0"/>
-                  </a:lnTo>
-                  <a:lnTo>
-                    <a:pt x="7799693" y="0"/>
+                    <a:pt x="7660515" y="0"/>
+                  </a:lnTo>
+                  <a:lnTo>
+                    <a:pt x="7660515" y="0"/>
                   </a:lnTo>
                 </a:path>
               </a:pathLst>
@@ -2443,21 +2435,21 @@
           </p:nvSpPr>
           <p:spPr>
             <a:xfrm>
-              <a:off x="1367006" y="2073503"/>
-              <a:ext cx="0" cy="3649639"/>
+              <a:off x="887106" y="2352625"/>
+              <a:ext cx="7660515" cy="0"/>
             </a:xfrm>
             <a:custGeom>
               <a:avLst/>
               <a:pathLst>
-                <a:path w="0" h="3649639">
+                <a:path w="7660515" h="0">
                   <a:moveTo>
-                    <a:pt x="0" y="3649639"/>
+                    <a:pt x="0" y="0"/>
                   </a:moveTo>
                   <a:lnTo>
-                    <a:pt x="0" y="0"/>
-                  </a:lnTo>
-                  <a:lnTo>
-                    <a:pt x="0" y="0"/>
+                    <a:pt x="7660515" y="0"/>
+                  </a:lnTo>
+                  <a:lnTo>
+                    <a:pt x="7660515" y="0"/>
                   </a:lnTo>
                 </a:path>
               </a:pathLst>
@@ -2486,15 +2478,15 @@
           </p:nvSpPr>
           <p:spPr>
             <a:xfrm>
-              <a:off x="3098929" y="2073503"/>
-              <a:ext cx="0" cy="3649639"/>
+              <a:off x="1426790" y="2143092"/>
+              <a:ext cx="0" cy="1317069"/>
             </a:xfrm>
             <a:custGeom>
               <a:avLst/>
               <a:pathLst>
-                <a:path w="0" h="3649639">
+                <a:path w="0" h="1317069">
                   <a:moveTo>
-                    <a:pt x="0" y="3649639"/>
+                    <a:pt x="0" y="1317069"/>
                   </a:moveTo>
                   <a:lnTo>
                     <a:pt x="0" y="0"/>
@@ -2529,15 +2521,15 @@
           </p:nvSpPr>
           <p:spPr>
             <a:xfrm>
-              <a:off x="4830853" y="2073503"/>
-              <a:ext cx="0" cy="3649639"/>
+              <a:off x="3127809" y="2143092"/>
+              <a:ext cx="0" cy="1317069"/>
             </a:xfrm>
             <a:custGeom>
               <a:avLst/>
               <a:pathLst>
-                <a:path w="0" h="3649639">
+                <a:path w="0" h="1317069">
                   <a:moveTo>
-                    <a:pt x="0" y="3649639"/>
+                    <a:pt x="0" y="1317069"/>
                   </a:moveTo>
                   <a:lnTo>
                     <a:pt x="0" y="0"/>
@@ -2572,15 +2564,15 @@
           </p:nvSpPr>
           <p:spPr>
             <a:xfrm>
-              <a:off x="6562776" y="2073503"/>
-              <a:ext cx="0" cy="3649639"/>
+              <a:off x="4828828" y="2143092"/>
+              <a:ext cx="0" cy="1317069"/>
             </a:xfrm>
             <a:custGeom>
               <a:avLst/>
               <a:pathLst>
-                <a:path w="0" h="3649639">
+                <a:path w="0" h="1317069">
                   <a:moveTo>
-                    <a:pt x="0" y="3649639"/>
+                    <a:pt x="0" y="1317069"/>
                   </a:moveTo>
                   <a:lnTo>
                     <a:pt x="0" y="0"/>
@@ -2615,15 +2607,15 @@
           </p:nvSpPr>
           <p:spPr>
             <a:xfrm>
-              <a:off x="8294700" y="2073503"/>
-              <a:ext cx="0" cy="3649639"/>
+              <a:off x="6529847" y="2143092"/>
+              <a:ext cx="0" cy="1317069"/>
             </a:xfrm>
             <a:custGeom>
               <a:avLst/>
               <a:pathLst>
-                <a:path w="0" h="3649639">
+                <a:path w="0" h="1317069">
                   <a:moveTo>
-                    <a:pt x="0" y="3649639"/>
+                    <a:pt x="0" y="1317069"/>
                   </a:moveTo>
                   <a:lnTo>
                     <a:pt x="0" y="0"/>
@@ -2658,26 +2650,26 @@
           </p:nvSpPr>
           <p:spPr>
             <a:xfrm>
-              <a:off x="817517" y="5557249"/>
-              <a:ext cx="7799693" cy="0"/>
+              <a:off x="8230866" y="2143092"/>
+              <a:ext cx="0" cy="1317069"/>
             </a:xfrm>
             <a:custGeom>
               <a:avLst/>
               <a:pathLst>
-                <a:path w="7799693" h="0">
+                <a:path w="0" h="1317069">
                   <a:moveTo>
+                    <a:pt x="0" y="1317069"/>
+                  </a:moveTo>
+                  <a:lnTo>
                     <a:pt x="0" y="0"/>
-                  </a:moveTo>
-                  <a:lnTo>
-                    <a:pt x="7799693" y="0"/>
-                  </a:lnTo>
-                  <a:lnTo>
-                    <a:pt x="7799693" y="0"/>
+                  </a:lnTo>
+                  <a:lnTo>
+                    <a:pt x="0" y="0"/>
                   </a:lnTo>
                 </a:path>
               </a:pathLst>
             </a:custGeom>
-            <a:ln w="13550" cap="flat">
+            <a:ln w="6775" cap="flat">
               <a:solidFill>
                 <a:srgbClr val="EBEBEB">
                   <a:alpha val="100000"/>
@@ -2701,21 +2693,21 @@
           </p:nvSpPr>
           <p:spPr>
             <a:xfrm>
-              <a:off x="817517" y="4727786"/>
-              <a:ext cx="7799693" cy="0"/>
+              <a:off x="887106" y="3400294"/>
+              <a:ext cx="7660515" cy="0"/>
             </a:xfrm>
             <a:custGeom>
               <a:avLst/>
               <a:pathLst>
-                <a:path w="7799693" h="0">
+                <a:path w="7660515" h="0">
                   <a:moveTo>
                     <a:pt x="0" y="0"/>
                   </a:moveTo>
                   <a:lnTo>
-                    <a:pt x="7799693" y="0"/>
-                  </a:lnTo>
-                  <a:lnTo>
-                    <a:pt x="7799693" y="0"/>
+                    <a:pt x="7660515" y="0"/>
+                  </a:lnTo>
+                  <a:lnTo>
+                    <a:pt x="7660515" y="0"/>
                   </a:lnTo>
                 </a:path>
               </a:pathLst>
@@ -2744,21 +2736,21 @@
           </p:nvSpPr>
           <p:spPr>
             <a:xfrm>
-              <a:off x="817517" y="3898322"/>
-              <a:ext cx="7799693" cy="0"/>
+              <a:off x="887106" y="3100960"/>
+              <a:ext cx="7660515" cy="0"/>
             </a:xfrm>
             <a:custGeom>
               <a:avLst/>
               <a:pathLst>
-                <a:path w="7799693" h="0">
+                <a:path w="7660515" h="0">
                   <a:moveTo>
                     <a:pt x="0" y="0"/>
                   </a:moveTo>
                   <a:lnTo>
-                    <a:pt x="7799693" y="0"/>
-                  </a:lnTo>
-                  <a:lnTo>
-                    <a:pt x="7799693" y="0"/>
+                    <a:pt x="7660515" y="0"/>
+                  </a:lnTo>
+                  <a:lnTo>
+                    <a:pt x="7660515" y="0"/>
                   </a:lnTo>
                 </a:path>
               </a:pathLst>
@@ -2787,21 +2779,21 @@
           </p:nvSpPr>
           <p:spPr>
             <a:xfrm>
-              <a:off x="817517" y="3068859"/>
-              <a:ext cx="7799693" cy="0"/>
+              <a:off x="887106" y="2801626"/>
+              <a:ext cx="7660515" cy="0"/>
             </a:xfrm>
             <a:custGeom>
               <a:avLst/>
               <a:pathLst>
-                <a:path w="7799693" h="0">
+                <a:path w="7660515" h="0">
                   <a:moveTo>
                     <a:pt x="0" y="0"/>
                   </a:moveTo>
                   <a:lnTo>
-                    <a:pt x="7799693" y="0"/>
-                  </a:lnTo>
-                  <a:lnTo>
-                    <a:pt x="7799693" y="0"/>
+                    <a:pt x="7660515" y="0"/>
+                  </a:lnTo>
+                  <a:lnTo>
+                    <a:pt x="7660515" y="0"/>
                   </a:lnTo>
                 </a:path>
               </a:pathLst>
@@ -2830,21 +2822,21 @@
           </p:nvSpPr>
           <p:spPr>
             <a:xfrm>
-              <a:off x="817517" y="2239395"/>
-              <a:ext cx="7799693" cy="0"/>
+              <a:off x="887106" y="2502292"/>
+              <a:ext cx="7660515" cy="0"/>
             </a:xfrm>
             <a:custGeom>
               <a:avLst/>
               <a:pathLst>
-                <a:path w="7799693" h="0">
+                <a:path w="7660515" h="0">
                   <a:moveTo>
                     <a:pt x="0" y="0"/>
                   </a:moveTo>
                   <a:lnTo>
-                    <a:pt x="7799693" y="0"/>
-                  </a:lnTo>
-                  <a:lnTo>
-                    <a:pt x="7799693" y="0"/>
+                    <a:pt x="7660515" y="0"/>
+                  </a:lnTo>
+                  <a:lnTo>
+                    <a:pt x="7660515" y="0"/>
                   </a:lnTo>
                 </a:path>
               </a:pathLst>
@@ -2873,21 +2865,21 @@
           </p:nvSpPr>
           <p:spPr>
             <a:xfrm>
-              <a:off x="2232968" y="2073503"/>
-              <a:ext cx="0" cy="3649639"/>
+              <a:off x="887106" y="2202958"/>
+              <a:ext cx="7660515" cy="0"/>
             </a:xfrm>
             <a:custGeom>
               <a:avLst/>
               <a:pathLst>
-                <a:path w="0" h="3649639">
+                <a:path w="7660515" h="0">
                   <a:moveTo>
-                    <a:pt x="0" y="3649639"/>
+                    <a:pt x="0" y="0"/>
                   </a:moveTo>
                   <a:lnTo>
-                    <a:pt x="0" y="0"/>
-                  </a:lnTo>
-                  <a:lnTo>
-                    <a:pt x="0" y="0"/>
+                    <a:pt x="7660515" y="0"/>
+                  </a:lnTo>
+                  <a:lnTo>
+                    <a:pt x="7660515" y="0"/>
                   </a:lnTo>
                 </a:path>
               </a:pathLst>
@@ -2916,15 +2908,15 @@
           </p:nvSpPr>
           <p:spPr>
             <a:xfrm>
-              <a:off x="3964891" y="2073503"/>
-              <a:ext cx="0" cy="3649639"/>
+              <a:off x="2277299" y="2143092"/>
+              <a:ext cx="0" cy="1317069"/>
             </a:xfrm>
             <a:custGeom>
               <a:avLst/>
               <a:pathLst>
-                <a:path w="0" h="3649639">
+                <a:path w="0" h="1317069">
                   <a:moveTo>
-                    <a:pt x="0" y="3649639"/>
+                    <a:pt x="0" y="1317069"/>
                   </a:moveTo>
                   <a:lnTo>
                     <a:pt x="0" y="0"/>
@@ -2959,15 +2951,15 @@
           </p:nvSpPr>
           <p:spPr>
             <a:xfrm>
-              <a:off x="5696815" y="2073503"/>
-              <a:ext cx="0" cy="3649639"/>
+              <a:off x="3978318" y="2143092"/>
+              <a:ext cx="0" cy="1317069"/>
             </a:xfrm>
             <a:custGeom>
               <a:avLst/>
               <a:pathLst>
-                <a:path w="0" h="3649639">
+                <a:path w="0" h="1317069">
                   <a:moveTo>
-                    <a:pt x="0" y="3649639"/>
+                    <a:pt x="0" y="1317069"/>
                   </a:moveTo>
                   <a:lnTo>
                     <a:pt x="0" y="0"/>
@@ -3002,15 +2994,15 @@
           </p:nvSpPr>
           <p:spPr>
             <a:xfrm>
-              <a:off x="7428738" y="2073503"/>
-              <a:ext cx="0" cy="3649639"/>
+              <a:off x="5679337" y="2143092"/>
+              <a:ext cx="0" cy="1317069"/>
             </a:xfrm>
             <a:custGeom>
               <a:avLst/>
               <a:pathLst>
-                <a:path w="0" h="3649639">
+                <a:path w="0" h="1317069">
                   <a:moveTo>
-                    <a:pt x="0" y="3649639"/>
+                    <a:pt x="0" y="1317069"/>
                   </a:moveTo>
                   <a:lnTo>
                     <a:pt x="0" y="0"/>
@@ -3039,600 +3031,643 @@
         </p:sp>
         <p:sp>
           <p:nvSpPr>
-            <p:cNvPr id="22" name="pg22"/>
+            <p:cNvPr id="22" name="pl22"/>
             <p:cNvSpPr/>
             <p:nvPr/>
           </p:nvSpPr>
           <p:spPr>
             <a:xfrm>
-              <a:off x="1172049" y="2073503"/>
-              <a:ext cx="7090630" cy="3386721"/>
+              <a:off x="7380356" y="2143092"/>
+              <a:ext cx="0" cy="1317069"/>
             </a:xfrm>
             <a:custGeom>
               <a:avLst/>
               <a:pathLst>
-                <a:path w="7090630" h="3386721">
+                <a:path w="0" h="1317069">
                   <a:moveTo>
-                    <a:pt x="452676" y="0"/>
+                    <a:pt x="0" y="1317069"/>
                   </a:moveTo>
                   <a:lnTo>
-                    <a:pt x="501357" y="90841"/>
-                  </a:lnTo>
-                  <a:lnTo>
-                    <a:pt x="572980" y="219428"/>
-                  </a:lnTo>
-                  <a:lnTo>
-                    <a:pt x="644602" y="343142"/>
-                  </a:lnTo>
-                  <a:lnTo>
-                    <a:pt x="716225" y="462167"/>
-                  </a:lnTo>
-                  <a:lnTo>
-                    <a:pt x="787847" y="576681"/>
-                  </a:lnTo>
-                  <a:lnTo>
-                    <a:pt x="859470" y="686855"/>
-                  </a:lnTo>
-                  <a:lnTo>
-                    <a:pt x="931092" y="792854"/>
-                  </a:lnTo>
-                  <a:lnTo>
-                    <a:pt x="1002715" y="894835"/>
-                  </a:lnTo>
-                  <a:lnTo>
-                    <a:pt x="1074337" y="992952"/>
-                  </a:lnTo>
-                  <a:lnTo>
-                    <a:pt x="1145960" y="1087350"/>
-                  </a:lnTo>
-                  <a:lnTo>
-                    <a:pt x="1217582" y="1178170"/>
-                  </a:lnTo>
-                  <a:lnTo>
-                    <a:pt x="1289205" y="1265548"/>
-                  </a:lnTo>
-                  <a:lnTo>
-                    <a:pt x="1360827" y="1349615"/>
-                  </a:lnTo>
-                  <a:lnTo>
-                    <a:pt x="1432450" y="1430496"/>
-                  </a:lnTo>
-                  <a:lnTo>
-                    <a:pt x="1504073" y="1508312"/>
-                  </a:lnTo>
-                  <a:lnTo>
-                    <a:pt x="1575695" y="1583178"/>
-                  </a:lnTo>
-                  <a:lnTo>
-                    <a:pt x="1647318" y="1655207"/>
-                  </a:lnTo>
-                  <a:lnTo>
-                    <a:pt x="1718940" y="1724507"/>
-                  </a:lnTo>
-                  <a:lnTo>
-                    <a:pt x="1790563" y="1791180"/>
-                  </a:lnTo>
-                  <a:lnTo>
-                    <a:pt x="1862185" y="1855326"/>
-                  </a:lnTo>
-                  <a:lnTo>
-                    <a:pt x="1933808" y="1917041"/>
-                  </a:lnTo>
-                  <a:lnTo>
-                    <a:pt x="2005430" y="1976417"/>
-                  </a:lnTo>
-                  <a:lnTo>
-                    <a:pt x="2077053" y="2033543"/>
-                  </a:lnTo>
-                  <a:lnTo>
-                    <a:pt x="2148675" y="2088504"/>
-                  </a:lnTo>
-                  <a:lnTo>
-                    <a:pt x="2220298" y="2141382"/>
-                  </a:lnTo>
-                  <a:lnTo>
-                    <a:pt x="2291920" y="2192256"/>
-                  </a:lnTo>
-                  <a:lnTo>
-                    <a:pt x="2363543" y="2241202"/>
-                  </a:lnTo>
-                  <a:lnTo>
-                    <a:pt x="2435165" y="2288293"/>
-                  </a:lnTo>
-                  <a:lnTo>
-                    <a:pt x="2506788" y="2333599"/>
-                  </a:lnTo>
-                  <a:lnTo>
-                    <a:pt x="2578410" y="2377188"/>
-                  </a:lnTo>
-                  <a:lnTo>
-                    <a:pt x="2650033" y="2419125"/>
-                  </a:lnTo>
-                  <a:lnTo>
-                    <a:pt x="2721655" y="2459473"/>
-                  </a:lnTo>
-                  <a:lnTo>
-                    <a:pt x="2793278" y="2498292"/>
-                  </a:lnTo>
-                  <a:lnTo>
-                    <a:pt x="2864901" y="2535639"/>
-                  </a:lnTo>
-                  <a:lnTo>
-                    <a:pt x="2936523" y="2571571"/>
-                  </a:lnTo>
-                  <a:lnTo>
-                    <a:pt x="3008146" y="2606141"/>
-                  </a:lnTo>
-                  <a:lnTo>
-                    <a:pt x="3079768" y="2639402"/>
-                  </a:lnTo>
-                  <a:lnTo>
-                    <a:pt x="3151391" y="2661947"/>
-                  </a:lnTo>
-                  <a:lnTo>
-                    <a:pt x="3223013" y="2675959"/>
-                  </a:lnTo>
-                  <a:lnTo>
-                    <a:pt x="3294636" y="2689732"/>
-                  </a:lnTo>
-                  <a:lnTo>
-                    <a:pt x="3366258" y="2703270"/>
-                  </a:lnTo>
-                  <a:lnTo>
-                    <a:pt x="3437881" y="2716577"/>
-                  </a:lnTo>
-                  <a:lnTo>
-                    <a:pt x="3509503" y="2729658"/>
-                  </a:lnTo>
-                  <a:lnTo>
-                    <a:pt x="3581126" y="2742515"/>
-                  </a:lnTo>
-                  <a:lnTo>
-                    <a:pt x="3652748" y="2755153"/>
-                  </a:lnTo>
-                  <a:lnTo>
-                    <a:pt x="3724371" y="2767576"/>
-                  </a:lnTo>
-                  <a:lnTo>
-                    <a:pt x="3795993" y="2779787"/>
-                  </a:lnTo>
-                  <a:lnTo>
-                    <a:pt x="3867616" y="2791790"/>
-                  </a:lnTo>
-                  <a:lnTo>
-                    <a:pt x="3939238" y="2803588"/>
-                  </a:lnTo>
-                  <a:lnTo>
-                    <a:pt x="4010861" y="2815185"/>
-                  </a:lnTo>
-                  <a:lnTo>
-                    <a:pt x="4082483" y="2826584"/>
-                  </a:lnTo>
-                  <a:lnTo>
-                    <a:pt x="4154106" y="2837789"/>
-                  </a:lnTo>
-                  <a:lnTo>
-                    <a:pt x="4225729" y="2848803"/>
-                  </a:lnTo>
-                  <a:lnTo>
-                    <a:pt x="4297351" y="2859629"/>
-                  </a:lnTo>
-                  <a:lnTo>
-                    <a:pt x="4368974" y="2870270"/>
-                  </a:lnTo>
-                  <a:lnTo>
-                    <a:pt x="4440596" y="2880730"/>
-                  </a:lnTo>
-                  <a:lnTo>
-                    <a:pt x="4512219" y="2891012"/>
-                  </a:lnTo>
-                  <a:lnTo>
-                    <a:pt x="4583841" y="2901118"/>
-                  </a:lnTo>
-                  <a:lnTo>
-                    <a:pt x="4655464" y="2911052"/>
-                  </a:lnTo>
-                  <a:lnTo>
-                    <a:pt x="4727086" y="2920817"/>
-                  </a:lnTo>
-                  <a:lnTo>
-                    <a:pt x="4798709" y="2930415"/>
-                  </a:lnTo>
-                  <a:lnTo>
-                    <a:pt x="4870331" y="2939849"/>
-                  </a:lnTo>
-                  <a:lnTo>
-                    <a:pt x="4941954" y="2949123"/>
-                  </a:lnTo>
-                  <a:lnTo>
-                    <a:pt x="5013576" y="2958238"/>
-                  </a:lnTo>
-                  <a:lnTo>
-                    <a:pt x="5085199" y="2967198"/>
-                  </a:lnTo>
-                  <a:lnTo>
-                    <a:pt x="5156821" y="2976006"/>
-                  </a:lnTo>
-                  <a:lnTo>
-                    <a:pt x="5228444" y="2984663"/>
-                  </a:lnTo>
-                  <a:lnTo>
-                    <a:pt x="5300066" y="2993172"/>
-                  </a:lnTo>
-                  <a:lnTo>
-                    <a:pt x="5371689" y="3001537"/>
-                  </a:lnTo>
-                  <a:lnTo>
-                    <a:pt x="5443311" y="3009759"/>
-                  </a:lnTo>
-                  <a:lnTo>
-                    <a:pt x="5514934" y="3017840"/>
-                  </a:lnTo>
-                  <a:lnTo>
-                    <a:pt x="5586557" y="3025784"/>
-                  </a:lnTo>
-                  <a:lnTo>
-                    <a:pt x="5658179" y="3033593"/>
-                  </a:lnTo>
-                  <a:lnTo>
-                    <a:pt x="5729802" y="3041268"/>
-                  </a:lnTo>
-                  <a:lnTo>
-                    <a:pt x="5801424" y="3048812"/>
-                  </a:lnTo>
-                  <a:lnTo>
-                    <a:pt x="5873047" y="3056228"/>
-                  </a:lnTo>
-                  <a:lnTo>
-                    <a:pt x="5944669" y="3063517"/>
-                  </a:lnTo>
-                  <a:lnTo>
-                    <a:pt x="6016292" y="3070682"/>
-                  </a:lnTo>
-                  <a:lnTo>
-                    <a:pt x="6087914" y="3077725"/>
-                  </a:lnTo>
-                  <a:lnTo>
-                    <a:pt x="6159537" y="3084648"/>
-                  </a:lnTo>
-                  <a:lnTo>
-                    <a:pt x="6231159" y="3091453"/>
-                  </a:lnTo>
-                  <a:lnTo>
-                    <a:pt x="6302782" y="3098142"/>
-                  </a:lnTo>
-                  <a:lnTo>
-                    <a:pt x="6374404" y="3104716"/>
-                  </a:lnTo>
-                  <a:lnTo>
-                    <a:pt x="6446027" y="3111179"/>
-                  </a:lnTo>
-                  <a:lnTo>
-                    <a:pt x="6517649" y="3117531"/>
-                  </a:lnTo>
-                  <a:lnTo>
-                    <a:pt x="6589272" y="3123775"/>
-                  </a:lnTo>
-                  <a:lnTo>
-                    <a:pt x="6660894" y="3129913"/>
-                  </a:lnTo>
-                  <a:lnTo>
-                    <a:pt x="6732517" y="3135946"/>
-                  </a:lnTo>
-                  <a:lnTo>
-                    <a:pt x="6804139" y="3141876"/>
-                  </a:lnTo>
-                  <a:lnTo>
-                    <a:pt x="6875762" y="3147705"/>
-                  </a:lnTo>
-                  <a:lnTo>
-                    <a:pt x="6947385" y="3153435"/>
-                  </a:lnTo>
-                  <a:lnTo>
-                    <a:pt x="7019007" y="3159067"/>
-                  </a:lnTo>
-                  <a:lnTo>
-                    <a:pt x="7090630" y="3164603"/>
-                  </a:lnTo>
-                  <a:lnTo>
-                    <a:pt x="7090630" y="3386721"/>
-                  </a:lnTo>
-                  <a:lnTo>
-                    <a:pt x="7019007" y="3382899"/>
-                  </a:lnTo>
-                  <a:lnTo>
-                    <a:pt x="6947385" y="3378927"/>
-                  </a:lnTo>
-                  <a:lnTo>
-                    <a:pt x="6875762" y="3374798"/>
-                  </a:lnTo>
-                  <a:lnTo>
-                    <a:pt x="6804139" y="3370506"/>
-                  </a:lnTo>
-                  <a:lnTo>
-                    <a:pt x="6732517" y="3366046"/>
-                  </a:lnTo>
-                  <a:lnTo>
-                    <a:pt x="6660894" y="3361409"/>
-                  </a:lnTo>
-                  <a:lnTo>
-                    <a:pt x="6589272" y="3356590"/>
-                  </a:lnTo>
-                  <a:lnTo>
-                    <a:pt x="6517649" y="3351581"/>
-                  </a:lnTo>
-                  <a:lnTo>
-                    <a:pt x="6446027" y="3346375"/>
-                  </a:lnTo>
-                  <a:lnTo>
-                    <a:pt x="6374404" y="3340964"/>
-                  </a:lnTo>
-                  <a:lnTo>
-                    <a:pt x="6302782" y="3335339"/>
-                  </a:lnTo>
-                  <a:lnTo>
-                    <a:pt x="6231159" y="3329493"/>
-                  </a:lnTo>
-                  <a:lnTo>
-                    <a:pt x="6159537" y="3323417"/>
-                  </a:lnTo>
-                  <a:lnTo>
-                    <a:pt x="6087914" y="3317101"/>
-                  </a:lnTo>
-                  <a:lnTo>
-                    <a:pt x="6016292" y="3310537"/>
-                  </a:lnTo>
-                  <a:lnTo>
-                    <a:pt x="5944669" y="3303714"/>
-                  </a:lnTo>
-                  <a:lnTo>
-                    <a:pt x="5873047" y="3296622"/>
-                  </a:lnTo>
-                  <a:lnTo>
-                    <a:pt x="5801424" y="3289251"/>
-                  </a:lnTo>
-                  <a:lnTo>
-                    <a:pt x="5729802" y="3281589"/>
-                  </a:lnTo>
-                  <a:lnTo>
-                    <a:pt x="5658179" y="3273626"/>
-                  </a:lnTo>
-                  <a:lnTo>
-                    <a:pt x="5586557" y="3265349"/>
-                  </a:lnTo>
-                  <a:lnTo>
-                    <a:pt x="5514934" y="3256746"/>
-                  </a:lnTo>
-                  <a:lnTo>
-                    <a:pt x="5443311" y="3247804"/>
-                  </a:lnTo>
-                  <a:lnTo>
-                    <a:pt x="5371689" y="3238510"/>
-                  </a:lnTo>
-                  <a:lnTo>
-                    <a:pt x="5300066" y="3228850"/>
-                  </a:lnTo>
-                  <a:lnTo>
-                    <a:pt x="5228444" y="3218809"/>
-                  </a:lnTo>
-                  <a:lnTo>
-                    <a:pt x="5156821" y="3208373"/>
-                  </a:lnTo>
-                  <a:lnTo>
-                    <a:pt x="5085199" y="3197525"/>
-                  </a:lnTo>
-                  <a:lnTo>
-                    <a:pt x="5013576" y="3186251"/>
-                  </a:lnTo>
-                  <a:lnTo>
-                    <a:pt x="4941954" y="3174532"/>
-                  </a:lnTo>
-                  <a:lnTo>
-                    <a:pt x="4870331" y="3162351"/>
-                  </a:lnTo>
-                  <a:lnTo>
-                    <a:pt x="4798709" y="3149691"/>
-                  </a:lnTo>
-                  <a:lnTo>
-                    <a:pt x="4727086" y="3136532"/>
-                  </a:lnTo>
-                  <a:lnTo>
-                    <a:pt x="4655464" y="3122855"/>
-                  </a:lnTo>
-                  <a:lnTo>
-                    <a:pt x="4583841" y="3108638"/>
-                  </a:lnTo>
-                  <a:lnTo>
-                    <a:pt x="4512219" y="3093862"/>
-                  </a:lnTo>
-                  <a:lnTo>
-                    <a:pt x="4440596" y="3078504"/>
-                  </a:lnTo>
-                  <a:lnTo>
-                    <a:pt x="4368974" y="3062541"/>
-                  </a:lnTo>
-                  <a:lnTo>
-                    <a:pt x="4297351" y="3045949"/>
-                  </a:lnTo>
-                  <a:lnTo>
-                    <a:pt x="4225729" y="3028704"/>
-                  </a:lnTo>
-                  <a:lnTo>
-                    <a:pt x="4154106" y="3010779"/>
-                  </a:lnTo>
-                  <a:lnTo>
-                    <a:pt x="4082483" y="2992148"/>
-                  </a:lnTo>
-                  <a:lnTo>
-                    <a:pt x="4010861" y="2972783"/>
-                  </a:lnTo>
-                  <a:lnTo>
-                    <a:pt x="3939238" y="2952655"/>
-                  </a:lnTo>
-                  <a:lnTo>
-                    <a:pt x="3867616" y="2931735"/>
-                  </a:lnTo>
-                  <a:lnTo>
-                    <a:pt x="3795993" y="2909990"/>
-                  </a:lnTo>
-                  <a:lnTo>
-                    <a:pt x="3724371" y="2887389"/>
-                  </a:lnTo>
-                  <a:lnTo>
-                    <a:pt x="3652748" y="2863897"/>
-                  </a:lnTo>
-                  <a:lnTo>
-                    <a:pt x="3581126" y="2839480"/>
-                  </a:lnTo>
-                  <a:lnTo>
-                    <a:pt x="3509503" y="2814102"/>
-                  </a:lnTo>
-                  <a:lnTo>
-                    <a:pt x="3437881" y="2787723"/>
-                  </a:lnTo>
-                  <a:lnTo>
-                    <a:pt x="3366258" y="2760306"/>
-                  </a:lnTo>
-                  <a:lnTo>
-                    <a:pt x="3294636" y="2731808"/>
-                  </a:lnTo>
-                  <a:lnTo>
-                    <a:pt x="3223013" y="2702188"/>
-                  </a:lnTo>
-                  <a:lnTo>
-                    <a:pt x="3151391" y="2671401"/>
-                  </a:lnTo>
-                  <a:lnTo>
-                    <a:pt x="3079768" y="2647692"/>
-                  </a:lnTo>
-                  <a:lnTo>
-                    <a:pt x="3008146" y="2633189"/>
-                  </a:lnTo>
-                  <a:lnTo>
-                    <a:pt x="2936523" y="2618436"/>
-                  </a:lnTo>
-                  <a:lnTo>
-                    <a:pt x="2864901" y="2603426"/>
-                  </a:lnTo>
-                  <a:lnTo>
-                    <a:pt x="2793278" y="2588156"/>
-                  </a:lnTo>
-                  <a:lnTo>
-                    <a:pt x="2721655" y="2572621"/>
-                  </a:lnTo>
-                  <a:lnTo>
-                    <a:pt x="2650033" y="2556816"/>
-                  </a:lnTo>
-                  <a:lnTo>
-                    <a:pt x="2578410" y="2540738"/>
-                  </a:lnTo>
-                  <a:lnTo>
-                    <a:pt x="2506788" y="2524380"/>
-                  </a:lnTo>
-                  <a:lnTo>
-                    <a:pt x="2435165" y="2507739"/>
-                  </a:lnTo>
-                  <a:lnTo>
-                    <a:pt x="2363543" y="2490809"/>
-                  </a:lnTo>
-                  <a:lnTo>
-                    <a:pt x="2291920" y="2473585"/>
-                  </a:lnTo>
-                  <a:lnTo>
-                    <a:pt x="2220298" y="2456063"/>
-                  </a:lnTo>
-                  <a:lnTo>
-                    <a:pt x="2148675" y="2438237"/>
-                  </a:lnTo>
-                  <a:lnTo>
-                    <a:pt x="2077053" y="2420101"/>
-                  </a:lnTo>
-                  <a:lnTo>
-                    <a:pt x="2005430" y="2401651"/>
-                  </a:lnTo>
-                  <a:lnTo>
-                    <a:pt x="1933808" y="2382881"/>
-                  </a:lnTo>
-                  <a:lnTo>
-                    <a:pt x="1862185" y="2363785"/>
-                  </a:lnTo>
-                  <a:lnTo>
-                    <a:pt x="1790563" y="2344358"/>
-                  </a:lnTo>
-                  <a:lnTo>
-                    <a:pt x="1718940" y="2324594"/>
-                  </a:lnTo>
-                  <a:lnTo>
-                    <a:pt x="1647318" y="2304488"/>
-                  </a:lnTo>
-                  <a:lnTo>
-                    <a:pt x="1575695" y="2284032"/>
-                  </a:lnTo>
-                  <a:lnTo>
-                    <a:pt x="1504073" y="2263222"/>
-                  </a:lnTo>
-                  <a:lnTo>
-                    <a:pt x="1432450" y="2242050"/>
-                  </a:lnTo>
-                  <a:lnTo>
-                    <a:pt x="1360827" y="2220512"/>
-                  </a:lnTo>
-                  <a:lnTo>
-                    <a:pt x="1289205" y="2198600"/>
-                  </a:lnTo>
-                  <a:lnTo>
-                    <a:pt x="1217582" y="2176307"/>
-                  </a:lnTo>
-                  <a:lnTo>
-                    <a:pt x="1145960" y="2153629"/>
-                  </a:lnTo>
-                  <a:lnTo>
-                    <a:pt x="1074337" y="2130556"/>
-                  </a:lnTo>
-                  <a:lnTo>
-                    <a:pt x="1002715" y="2107084"/>
-                  </a:lnTo>
-                  <a:lnTo>
-                    <a:pt x="931092" y="2083204"/>
-                  </a:lnTo>
-                  <a:lnTo>
-                    <a:pt x="859470" y="2058910"/>
-                  </a:lnTo>
-                  <a:lnTo>
-                    <a:pt x="787847" y="2034195"/>
-                  </a:lnTo>
-                  <a:lnTo>
-                    <a:pt x="716225" y="2009051"/>
-                  </a:lnTo>
-                  <a:lnTo>
-                    <a:pt x="644602" y="1983470"/>
-                  </a:lnTo>
-                  <a:lnTo>
-                    <a:pt x="572980" y="1957446"/>
-                  </a:lnTo>
-                  <a:lnTo>
-                    <a:pt x="501357" y="1930971"/>
-                  </a:lnTo>
-                  <a:lnTo>
-                    <a:pt x="429735" y="1904037"/>
-                  </a:lnTo>
-                  <a:lnTo>
-                    <a:pt x="358112" y="1876635"/>
-                  </a:lnTo>
-                  <a:lnTo>
-                    <a:pt x="286490" y="1848758"/>
-                  </a:lnTo>
-                  <a:lnTo>
-                    <a:pt x="214867" y="1820397"/>
-                  </a:lnTo>
-                  <a:lnTo>
-                    <a:pt x="143245" y="1791544"/>
-                  </a:lnTo>
-                  <a:lnTo>
-                    <a:pt x="71622" y="1762191"/>
-                  </a:lnTo>
-                  <a:lnTo>
-                    <a:pt x="0" y="1732329"/>
+                    <a:pt x="0" y="0"/>
+                  </a:lnTo>
+                  <a:lnTo>
+                    <a:pt x="0" y="0"/>
+                  </a:lnTo>
+                </a:path>
+              </a:pathLst>
+            </a:custGeom>
+            <a:ln w="13550" cap="flat">
+              <a:solidFill>
+                <a:srgbClr val="EBEBEB">
+                  <a:alpha val="100000"/>
+                </a:srgbClr>
+              </a:solidFill>
+              <a:prstDash val="solid"/>
+              <a:round/>
+            </a:ln>
+          </p:spPr>
+          <p:txBody>
+            <a:bodyPr/>
+            <a:lstStyle/>
+            <a:p/>
+          </p:txBody>
+        </p:sp>
+        <p:sp>
+          <p:nvSpPr>
+            <p:cNvPr id="23" name="pg23"/>
+            <p:cNvSpPr/>
+            <p:nvPr/>
+          </p:nvSpPr>
+          <p:spPr>
+            <a:xfrm>
+              <a:off x="1235312" y="2143092"/>
+              <a:ext cx="6964104" cy="1222188"/>
+            </a:xfrm>
+            <a:custGeom>
+              <a:avLst/>
+              <a:pathLst>
+                <a:path w="6964104" h="1222188">
+                  <a:moveTo>
+                    <a:pt x="444599" y="0"/>
+                  </a:moveTo>
+                  <a:lnTo>
+                    <a:pt x="492411" y="32782"/>
+                  </a:lnTo>
+                  <a:lnTo>
+                    <a:pt x="562755" y="79186"/>
+                  </a:lnTo>
+                  <a:lnTo>
+                    <a:pt x="633100" y="123831"/>
+                  </a:lnTo>
+                  <a:lnTo>
+                    <a:pt x="703444" y="166785"/>
+                  </a:lnTo>
+                  <a:lnTo>
+                    <a:pt x="773789" y="208110"/>
+                  </a:lnTo>
+                  <a:lnTo>
+                    <a:pt x="844133" y="247869"/>
+                  </a:lnTo>
+                  <a:lnTo>
+                    <a:pt x="914478" y="286122"/>
+                  </a:lnTo>
+                  <a:lnTo>
+                    <a:pt x="984822" y="322925"/>
+                  </a:lnTo>
+                  <a:lnTo>
+                    <a:pt x="1055167" y="358333"/>
+                  </a:lnTo>
+                  <a:lnTo>
+                    <a:pt x="1125511" y="392399"/>
+                  </a:lnTo>
+                  <a:lnTo>
+                    <a:pt x="1195856" y="425174"/>
+                  </a:lnTo>
+                  <a:lnTo>
+                    <a:pt x="1266200" y="456706"/>
+                  </a:lnTo>
+                  <a:lnTo>
+                    <a:pt x="1336545" y="487044"/>
+                  </a:lnTo>
+                  <a:lnTo>
+                    <a:pt x="1406889" y="516232"/>
+                  </a:lnTo>
+                  <a:lnTo>
+                    <a:pt x="1477234" y="544314"/>
+                  </a:lnTo>
+                  <a:lnTo>
+                    <a:pt x="1547578" y="571331"/>
+                  </a:lnTo>
+                  <a:lnTo>
+                    <a:pt x="1617923" y="597325"/>
+                  </a:lnTo>
+                  <a:lnTo>
+                    <a:pt x="1688267" y="622334"/>
+                  </a:lnTo>
+                  <a:lnTo>
+                    <a:pt x="1758612" y="646394"/>
+                  </a:lnTo>
+                  <a:lnTo>
+                    <a:pt x="1828956" y="669543"/>
+                  </a:lnTo>
+                  <a:lnTo>
+                    <a:pt x="1899301" y="691815"/>
+                  </a:lnTo>
+                  <a:lnTo>
+                    <a:pt x="1969645" y="713242"/>
+                  </a:lnTo>
+                  <a:lnTo>
+                    <a:pt x="2039990" y="733858"/>
+                  </a:lnTo>
+                  <a:lnTo>
+                    <a:pt x="2110334" y="753692"/>
+                  </a:lnTo>
+                  <a:lnTo>
+                    <a:pt x="2180679" y="772774"/>
+                  </a:lnTo>
+                  <a:lnTo>
+                    <a:pt x="2251023" y="791133"/>
+                  </a:lnTo>
+                  <a:lnTo>
+                    <a:pt x="2321368" y="808797"/>
+                  </a:lnTo>
+                  <a:lnTo>
+                    <a:pt x="2391712" y="825791"/>
+                  </a:lnTo>
+                  <a:lnTo>
+                    <a:pt x="2462057" y="842141"/>
+                  </a:lnTo>
+                  <a:lnTo>
+                    <a:pt x="2532401" y="857871"/>
+                  </a:lnTo>
+                  <a:lnTo>
+                    <a:pt x="2602746" y="873005"/>
+                  </a:lnTo>
+                  <a:lnTo>
+                    <a:pt x="2673090" y="887566"/>
+                  </a:lnTo>
+                  <a:lnTo>
+                    <a:pt x="2743435" y="901574"/>
+                  </a:lnTo>
+                  <a:lnTo>
+                    <a:pt x="2813779" y="915052"/>
+                  </a:lnTo>
+                  <a:lnTo>
+                    <a:pt x="2884124" y="928019"/>
+                  </a:lnTo>
+                  <a:lnTo>
+                    <a:pt x="2954468" y="940495"/>
+                  </a:lnTo>
+                  <a:lnTo>
+                    <a:pt x="3024813" y="952498"/>
+                  </a:lnTo>
+                  <a:lnTo>
+                    <a:pt x="3095157" y="960634"/>
+                  </a:lnTo>
+                  <a:lnTo>
+                    <a:pt x="3165502" y="965690"/>
+                  </a:lnTo>
+                  <a:lnTo>
+                    <a:pt x="3235846" y="970661"/>
+                  </a:lnTo>
+                  <a:lnTo>
+                    <a:pt x="3306191" y="975546"/>
+                  </a:lnTo>
+                  <a:lnTo>
+                    <a:pt x="3376535" y="980348"/>
+                  </a:lnTo>
+                  <a:lnTo>
+                    <a:pt x="3446880" y="985069"/>
+                  </a:lnTo>
+                  <a:lnTo>
+                    <a:pt x="3517224" y="989709"/>
+                  </a:lnTo>
+                  <a:lnTo>
+                    <a:pt x="3587569" y="994270"/>
+                  </a:lnTo>
+                  <a:lnTo>
+                    <a:pt x="3657913" y="998753"/>
+                  </a:lnTo>
+                  <a:lnTo>
+                    <a:pt x="3728257" y="1003159"/>
+                  </a:lnTo>
+                  <a:lnTo>
+                    <a:pt x="3798602" y="1007491"/>
+                  </a:lnTo>
+                  <a:lnTo>
+                    <a:pt x="3868946" y="1011749"/>
+                  </a:lnTo>
+                  <a:lnTo>
+                    <a:pt x="3939291" y="1015934"/>
+                  </a:lnTo>
+                  <a:lnTo>
+                    <a:pt x="4009635" y="1020047"/>
+                  </a:lnTo>
+                  <a:lnTo>
+                    <a:pt x="4079980" y="1024091"/>
+                  </a:lnTo>
+                  <a:lnTo>
+                    <a:pt x="4150324" y="1028066"/>
+                  </a:lnTo>
+                  <a:lnTo>
+                    <a:pt x="4220669" y="1031972"/>
+                  </a:lnTo>
+                  <a:lnTo>
+                    <a:pt x="4291013" y="1035813"/>
+                  </a:lnTo>
+                  <a:lnTo>
+                    <a:pt x="4361358" y="1039587"/>
+                  </a:lnTo>
+                  <a:lnTo>
+                    <a:pt x="4431702" y="1043298"/>
+                  </a:lnTo>
+                  <a:lnTo>
+                    <a:pt x="4502047" y="1046945"/>
+                  </a:lnTo>
+                  <a:lnTo>
+                    <a:pt x="4572391" y="1050530"/>
+                  </a:lnTo>
+                  <a:lnTo>
+                    <a:pt x="4642736" y="1054054"/>
+                  </a:lnTo>
+                  <a:lnTo>
+                    <a:pt x="4713080" y="1057517"/>
+                  </a:lnTo>
+                  <a:lnTo>
+                    <a:pt x="4783425" y="1060922"/>
+                  </a:lnTo>
+                  <a:lnTo>
+                    <a:pt x="4853769" y="1064269"/>
+                  </a:lnTo>
+                  <a:lnTo>
+                    <a:pt x="4924114" y="1067558"/>
+                  </a:lnTo>
+                  <a:lnTo>
+                    <a:pt x="4994458" y="1070792"/>
+                  </a:lnTo>
+                  <a:lnTo>
+                    <a:pt x="5064803" y="1073970"/>
+                  </a:lnTo>
+                  <a:lnTo>
+                    <a:pt x="5135147" y="1077094"/>
+                  </a:lnTo>
+                  <a:lnTo>
+                    <a:pt x="5205492" y="1080165"/>
+                  </a:lnTo>
+                  <a:lnTo>
+                    <a:pt x="5275836" y="1083184"/>
+                  </a:lnTo>
+                  <a:lnTo>
+                    <a:pt x="5346181" y="1086151"/>
+                  </a:lnTo>
+                  <a:lnTo>
+                    <a:pt x="5416525" y="1089067"/>
+                  </a:lnTo>
+                  <a:lnTo>
+                    <a:pt x="5486870" y="1091934"/>
+                  </a:lnTo>
+                  <a:lnTo>
+                    <a:pt x="5557214" y="1094752"/>
+                  </a:lnTo>
+                  <a:lnTo>
+                    <a:pt x="5627559" y="1097522"/>
+                  </a:lnTo>
+                  <a:lnTo>
+                    <a:pt x="5697903" y="1100244"/>
+                  </a:lnTo>
+                  <a:lnTo>
+                    <a:pt x="5768248" y="1102921"/>
+                  </a:lnTo>
+                  <a:lnTo>
+                    <a:pt x="5838592" y="1105551"/>
+                  </a:lnTo>
+                  <a:lnTo>
+                    <a:pt x="5908937" y="1108137"/>
+                  </a:lnTo>
+                  <a:lnTo>
+                    <a:pt x="5979281" y="1110678"/>
+                  </a:lnTo>
+                  <a:lnTo>
+                    <a:pt x="6049626" y="1113177"/>
+                  </a:lnTo>
+                  <a:lnTo>
+                    <a:pt x="6119970" y="1115632"/>
+                  </a:lnTo>
+                  <a:lnTo>
+                    <a:pt x="6190315" y="1118046"/>
+                  </a:lnTo>
+                  <a:lnTo>
+                    <a:pt x="6260659" y="1120419"/>
+                  </a:lnTo>
+                  <a:lnTo>
+                    <a:pt x="6331004" y="1122751"/>
+                  </a:lnTo>
+                  <a:lnTo>
+                    <a:pt x="6401348" y="1125043"/>
+                  </a:lnTo>
+                  <a:lnTo>
+                    <a:pt x="6471693" y="1127297"/>
+                  </a:lnTo>
+                  <a:lnTo>
+                    <a:pt x="6542037" y="1129512"/>
+                  </a:lnTo>
+                  <a:lnTo>
+                    <a:pt x="6612382" y="1131689"/>
+                  </a:lnTo>
+                  <a:lnTo>
+                    <a:pt x="6682726" y="1133829"/>
+                  </a:lnTo>
+                  <a:lnTo>
+                    <a:pt x="6753071" y="1135932"/>
+                  </a:lnTo>
+                  <a:lnTo>
+                    <a:pt x="6823415" y="1138000"/>
+                  </a:lnTo>
+                  <a:lnTo>
+                    <a:pt x="6893760" y="1140033"/>
+                  </a:lnTo>
+                  <a:lnTo>
+                    <a:pt x="6964104" y="1142030"/>
+                  </a:lnTo>
+                  <a:lnTo>
+                    <a:pt x="6964104" y="1222188"/>
+                  </a:lnTo>
+                  <a:lnTo>
+                    <a:pt x="6893760" y="1220809"/>
+                  </a:lnTo>
+                  <a:lnTo>
+                    <a:pt x="6823415" y="1219375"/>
+                  </a:lnTo>
+                  <a:lnTo>
+                    <a:pt x="6753071" y="1217885"/>
+                  </a:lnTo>
+                  <a:lnTo>
+                    <a:pt x="6682726" y="1216336"/>
+                  </a:lnTo>
+                  <a:lnTo>
+                    <a:pt x="6612382" y="1214726"/>
+                  </a:lnTo>
+                  <a:lnTo>
+                    <a:pt x="6542037" y="1213053"/>
+                  </a:lnTo>
+                  <a:lnTo>
+                    <a:pt x="6471693" y="1211314"/>
+                  </a:lnTo>
+                  <a:lnTo>
+                    <a:pt x="6401348" y="1209506"/>
+                  </a:lnTo>
+                  <a:lnTo>
+                    <a:pt x="6331004" y="1207628"/>
+                  </a:lnTo>
+                  <a:lnTo>
+                    <a:pt x="6260659" y="1205675"/>
+                  </a:lnTo>
+                  <a:lnTo>
+                    <a:pt x="6190315" y="1203645"/>
+                  </a:lnTo>
+                  <a:lnTo>
+                    <a:pt x="6119970" y="1201535"/>
+                  </a:lnTo>
+                  <a:lnTo>
+                    <a:pt x="6049626" y="1199343"/>
+                  </a:lnTo>
+                  <a:lnTo>
+                    <a:pt x="5979281" y="1197063"/>
+                  </a:lnTo>
+                  <a:lnTo>
+                    <a:pt x="5908937" y="1194695"/>
+                  </a:lnTo>
+                  <a:lnTo>
+                    <a:pt x="5838592" y="1192232"/>
+                  </a:lnTo>
+                  <a:lnTo>
+                    <a:pt x="5768248" y="1189673"/>
+                  </a:lnTo>
+                  <a:lnTo>
+                    <a:pt x="5697903" y="1187013"/>
+                  </a:lnTo>
+                  <a:lnTo>
+                    <a:pt x="5627559" y="1184248"/>
+                  </a:lnTo>
+                  <a:lnTo>
+                    <a:pt x="5557214" y="1181374"/>
+                  </a:lnTo>
+                  <a:lnTo>
+                    <a:pt x="5486870" y="1178387"/>
+                  </a:lnTo>
+                  <a:lnTo>
+                    <a:pt x="5416525" y="1175283"/>
+                  </a:lnTo>
+                  <a:lnTo>
+                    <a:pt x="5346181" y="1172056"/>
+                  </a:lnTo>
+                  <a:lnTo>
+                    <a:pt x="5275836" y="1168702"/>
+                  </a:lnTo>
+                  <a:lnTo>
+                    <a:pt x="5205492" y="1165216"/>
+                  </a:lnTo>
+                  <a:lnTo>
+                    <a:pt x="5135147" y="1161592"/>
+                  </a:lnTo>
+                  <a:lnTo>
+                    <a:pt x="5064803" y="1157826"/>
+                  </a:lnTo>
+                  <a:lnTo>
+                    <a:pt x="4994458" y="1153911"/>
+                  </a:lnTo>
+                  <a:lnTo>
+                    <a:pt x="4924114" y="1149843"/>
+                  </a:lnTo>
+                  <a:lnTo>
+                    <a:pt x="4853769" y="1145613"/>
+                  </a:lnTo>
+                  <a:lnTo>
+                    <a:pt x="4783425" y="1141218"/>
+                  </a:lnTo>
+                  <a:lnTo>
+                    <a:pt x="4713080" y="1136649"/>
+                  </a:lnTo>
+                  <a:lnTo>
+                    <a:pt x="4642736" y="1131900"/>
+                  </a:lnTo>
+                  <a:lnTo>
+                    <a:pt x="4572391" y="1126964"/>
+                  </a:lnTo>
+                  <a:lnTo>
+                    <a:pt x="4502047" y="1121834"/>
+                  </a:lnTo>
+                  <a:lnTo>
+                    <a:pt x="4431702" y="1116502"/>
+                  </a:lnTo>
+                  <a:lnTo>
+                    <a:pt x="4361358" y="1110959"/>
+                  </a:lnTo>
+                  <a:lnTo>
+                    <a:pt x="4291013" y="1105199"/>
+                  </a:lnTo>
+                  <a:lnTo>
+                    <a:pt x="4220669" y="1099211"/>
+                  </a:lnTo>
+                  <a:lnTo>
+                    <a:pt x="4150324" y="1092988"/>
+                  </a:lnTo>
+                  <a:lnTo>
+                    <a:pt x="4079980" y="1086519"/>
+                  </a:lnTo>
+                  <a:lnTo>
+                    <a:pt x="4009635" y="1079795"/>
+                  </a:lnTo>
+                  <a:lnTo>
+                    <a:pt x="3939291" y="1072807"/>
+                  </a:lnTo>
+                  <a:lnTo>
+                    <a:pt x="3868946" y="1065543"/>
+                  </a:lnTo>
+                  <a:lnTo>
+                    <a:pt x="3798602" y="1057994"/>
+                  </a:lnTo>
+                  <a:lnTo>
+                    <a:pt x="3728257" y="1050147"/>
+                  </a:lnTo>
+                  <a:lnTo>
+                    <a:pt x="3657913" y="1041990"/>
+                  </a:lnTo>
+                  <a:lnTo>
+                    <a:pt x="3587569" y="1033513"/>
+                  </a:lnTo>
+                  <a:lnTo>
+                    <a:pt x="3517224" y="1024701"/>
+                  </a:lnTo>
+                  <a:lnTo>
+                    <a:pt x="3446880" y="1015543"/>
+                  </a:lnTo>
+                  <a:lnTo>
+                    <a:pt x="3376535" y="1006023"/>
+                  </a:lnTo>
+                  <a:lnTo>
+                    <a:pt x="3306191" y="996129"/>
+                  </a:lnTo>
+                  <a:lnTo>
+                    <a:pt x="3235846" y="985845"/>
+                  </a:lnTo>
+                  <a:lnTo>
+                    <a:pt x="3165502" y="975156"/>
+                  </a:lnTo>
+                  <a:lnTo>
+                    <a:pt x="3095157" y="964046"/>
+                  </a:lnTo>
+                  <a:lnTo>
+                    <a:pt x="3024813" y="955489"/>
+                  </a:lnTo>
+                  <a:lnTo>
+                    <a:pt x="2954468" y="950256"/>
+                  </a:lnTo>
+                  <a:lnTo>
+                    <a:pt x="2884124" y="944931"/>
+                  </a:lnTo>
+                  <a:lnTo>
+                    <a:pt x="2813779" y="939515"/>
+                  </a:lnTo>
+                  <a:lnTo>
+                    <a:pt x="2743435" y="934004"/>
+                  </a:lnTo>
+                  <a:lnTo>
+                    <a:pt x="2673090" y="928398"/>
+                  </a:lnTo>
+                  <a:lnTo>
+                    <a:pt x="2602746" y="922694"/>
+                  </a:lnTo>
+                  <a:lnTo>
+                    <a:pt x="2532401" y="916892"/>
+                  </a:lnTo>
+                  <a:lnTo>
+                    <a:pt x="2462057" y="910989"/>
+                  </a:lnTo>
+                  <a:lnTo>
+                    <a:pt x="2391712" y="904984"/>
+                  </a:lnTo>
+                  <a:lnTo>
+                    <a:pt x="2321368" y="898874"/>
+                  </a:lnTo>
+                  <a:lnTo>
+                    <a:pt x="2251023" y="892658"/>
+                  </a:lnTo>
+                  <a:lnTo>
+                    <a:pt x="2180679" y="886335"/>
+                  </a:lnTo>
+                  <a:lnTo>
+                    <a:pt x="2110334" y="879902"/>
+                  </a:lnTo>
+                  <a:lnTo>
+                    <a:pt x="2039990" y="873357"/>
+                  </a:lnTo>
+                  <a:lnTo>
+                    <a:pt x="1969645" y="866699"/>
+                  </a:lnTo>
+                  <a:lnTo>
+                    <a:pt x="1899301" y="859925"/>
+                  </a:lnTo>
+                  <a:lnTo>
+                    <a:pt x="1828956" y="853034"/>
+                  </a:lnTo>
+                  <a:lnTo>
+                    <a:pt x="1758612" y="846023"/>
+                  </a:lnTo>
+                  <a:lnTo>
+                    <a:pt x="1688267" y="838891"/>
+                  </a:lnTo>
+                  <a:lnTo>
+                    <a:pt x="1617923" y="831635"/>
+                  </a:lnTo>
+                  <a:lnTo>
+                    <a:pt x="1547578" y="824253"/>
+                  </a:lnTo>
+                  <a:lnTo>
+                    <a:pt x="1477234" y="816743"/>
+                  </a:lnTo>
+                  <a:lnTo>
+                    <a:pt x="1406889" y="809103"/>
+                  </a:lnTo>
+                  <a:lnTo>
+                    <a:pt x="1336545" y="801330"/>
+                  </a:lnTo>
+                  <a:lnTo>
+                    <a:pt x="1266200" y="793423"/>
+                  </a:lnTo>
+                  <a:lnTo>
+                    <a:pt x="1195856" y="785378"/>
+                  </a:lnTo>
+                  <a:lnTo>
+                    <a:pt x="1125511" y="777194"/>
+                  </a:lnTo>
+                  <a:lnTo>
+                    <a:pt x="1055167" y="768867"/>
+                  </a:lnTo>
+                  <a:lnTo>
+                    <a:pt x="984822" y="760397"/>
+                  </a:lnTo>
+                  <a:lnTo>
+                    <a:pt x="914478" y="751779"/>
+                  </a:lnTo>
+                  <a:lnTo>
+                    <a:pt x="844133" y="743012"/>
+                  </a:lnTo>
+                  <a:lnTo>
+                    <a:pt x="773789" y="734093"/>
+                  </a:lnTo>
+                  <a:lnTo>
+                    <a:pt x="703444" y="725019"/>
+                  </a:lnTo>
+                  <a:lnTo>
+                    <a:pt x="633100" y="715787"/>
+                  </a:lnTo>
+                  <a:lnTo>
+                    <a:pt x="562755" y="706396"/>
+                  </a:lnTo>
+                  <a:lnTo>
+                    <a:pt x="492411" y="696842"/>
+                  </a:lnTo>
+                  <a:lnTo>
+                    <a:pt x="422066" y="687122"/>
+                  </a:lnTo>
+                  <a:lnTo>
+                    <a:pt x="351722" y="677233"/>
+                  </a:lnTo>
+                  <a:lnTo>
+                    <a:pt x="281377" y="667173"/>
+                  </a:lnTo>
+                  <a:lnTo>
+                    <a:pt x="211033" y="656938"/>
+                  </a:lnTo>
+                  <a:lnTo>
+                    <a:pt x="140688" y="646526"/>
+                  </a:lnTo>
+                  <a:lnTo>
+                    <a:pt x="70344" y="635933"/>
+                  </a:lnTo>
+                  <a:lnTo>
+                    <a:pt x="0" y="625157"/>
                   </a:lnTo>
                   <a:close/>
                 </a:path>
@@ -3652,625 +3687,300 @@
         </p:sp>
         <p:sp>
           <p:nvSpPr>
-            <p:cNvPr id="23" name="pl23"/>
-            <p:cNvSpPr/>
-            <p:nvPr/>
-          </p:nvSpPr>
-          <p:spPr>
-            <a:xfrm>
-              <a:off x="1624726" y="2073503"/>
-              <a:ext cx="6637953" cy="3164603"/>
-            </a:xfrm>
-            <a:custGeom>
-              <a:avLst/>
-              <a:pathLst>
-                <a:path w="6637953" h="3164603">
-                  <a:moveTo>
-                    <a:pt x="0" y="0"/>
-                  </a:moveTo>
-                  <a:lnTo>
-                    <a:pt x="48681" y="90841"/>
-                  </a:lnTo>
-                  <a:lnTo>
-                    <a:pt x="120303" y="219428"/>
-                  </a:lnTo>
-                  <a:lnTo>
-                    <a:pt x="191926" y="343142"/>
-                  </a:lnTo>
-                  <a:lnTo>
-                    <a:pt x="263548" y="462167"/>
-                  </a:lnTo>
-                  <a:lnTo>
-                    <a:pt x="335171" y="576681"/>
-                  </a:lnTo>
-                  <a:lnTo>
-                    <a:pt x="406793" y="686855"/>
-                  </a:lnTo>
-                  <a:lnTo>
-                    <a:pt x="478416" y="792854"/>
-                  </a:lnTo>
-                  <a:lnTo>
-                    <a:pt x="550038" y="894835"/>
-                  </a:lnTo>
-                  <a:lnTo>
-                    <a:pt x="621661" y="992952"/>
-                  </a:lnTo>
-                  <a:lnTo>
-                    <a:pt x="693283" y="1087350"/>
-                  </a:lnTo>
-                  <a:lnTo>
-                    <a:pt x="764906" y="1178170"/>
-                  </a:lnTo>
-                  <a:lnTo>
-                    <a:pt x="836528" y="1265548"/>
-                  </a:lnTo>
-                  <a:lnTo>
-                    <a:pt x="908151" y="1349615"/>
-                  </a:lnTo>
-                  <a:lnTo>
-                    <a:pt x="979773" y="1430496"/>
-                  </a:lnTo>
-                  <a:lnTo>
-                    <a:pt x="1051396" y="1508312"/>
-                  </a:lnTo>
-                  <a:lnTo>
-                    <a:pt x="1123018" y="1583178"/>
-                  </a:lnTo>
-                  <a:lnTo>
-                    <a:pt x="1194641" y="1655207"/>
-                  </a:lnTo>
-                  <a:lnTo>
-                    <a:pt x="1266263" y="1724507"/>
-                  </a:lnTo>
-                  <a:lnTo>
-                    <a:pt x="1337886" y="1791180"/>
-                  </a:lnTo>
-                  <a:lnTo>
-                    <a:pt x="1409509" y="1855326"/>
-                  </a:lnTo>
-                  <a:lnTo>
-                    <a:pt x="1481131" y="1917041"/>
-                  </a:lnTo>
-                  <a:lnTo>
-                    <a:pt x="1552754" y="1976417"/>
-                  </a:lnTo>
-                  <a:lnTo>
-                    <a:pt x="1624376" y="2033543"/>
-                  </a:lnTo>
-                  <a:lnTo>
-                    <a:pt x="1695999" y="2088504"/>
-                  </a:lnTo>
-                  <a:lnTo>
-                    <a:pt x="1767621" y="2141382"/>
-                  </a:lnTo>
-                  <a:lnTo>
-                    <a:pt x="1839244" y="2192256"/>
-                  </a:lnTo>
-                  <a:lnTo>
-                    <a:pt x="1910866" y="2241202"/>
-                  </a:lnTo>
-                  <a:lnTo>
-                    <a:pt x="1982489" y="2288293"/>
-                  </a:lnTo>
-                  <a:lnTo>
-                    <a:pt x="2054111" y="2333599"/>
-                  </a:lnTo>
-                  <a:lnTo>
-                    <a:pt x="2125734" y="2377188"/>
-                  </a:lnTo>
-                  <a:lnTo>
-                    <a:pt x="2197356" y="2419125"/>
-                  </a:lnTo>
-                  <a:lnTo>
-                    <a:pt x="2268979" y="2459473"/>
-                  </a:lnTo>
-                  <a:lnTo>
-                    <a:pt x="2340601" y="2498292"/>
-                  </a:lnTo>
-                  <a:lnTo>
-                    <a:pt x="2412224" y="2535639"/>
-                  </a:lnTo>
-                  <a:lnTo>
-                    <a:pt x="2483846" y="2571571"/>
-                  </a:lnTo>
-                  <a:lnTo>
-                    <a:pt x="2555469" y="2606141"/>
-                  </a:lnTo>
-                  <a:lnTo>
-                    <a:pt x="2627091" y="2639402"/>
-                  </a:lnTo>
-                  <a:lnTo>
-                    <a:pt x="2698714" y="2661947"/>
-                  </a:lnTo>
-                  <a:lnTo>
-                    <a:pt x="2770337" y="2675959"/>
-                  </a:lnTo>
-                  <a:lnTo>
-                    <a:pt x="2841959" y="2689732"/>
-                  </a:lnTo>
-                  <a:lnTo>
-                    <a:pt x="2913582" y="2703270"/>
-                  </a:lnTo>
-                  <a:lnTo>
-                    <a:pt x="2985204" y="2716577"/>
-                  </a:lnTo>
-                  <a:lnTo>
-                    <a:pt x="3056827" y="2729658"/>
-                  </a:lnTo>
-                  <a:lnTo>
-                    <a:pt x="3128449" y="2742515"/>
-                  </a:lnTo>
-                  <a:lnTo>
-                    <a:pt x="3200072" y="2755153"/>
-                  </a:lnTo>
-                  <a:lnTo>
-                    <a:pt x="3271694" y="2767576"/>
-                  </a:lnTo>
-                  <a:lnTo>
-                    <a:pt x="3343317" y="2779787"/>
-                  </a:lnTo>
-                  <a:lnTo>
-                    <a:pt x="3414939" y="2791790"/>
-                  </a:lnTo>
-                  <a:lnTo>
-                    <a:pt x="3486562" y="2803588"/>
-                  </a:lnTo>
-                  <a:lnTo>
-                    <a:pt x="3558184" y="2815185"/>
-                  </a:lnTo>
-                  <a:lnTo>
-                    <a:pt x="3629807" y="2826584"/>
-                  </a:lnTo>
-                  <a:lnTo>
-                    <a:pt x="3701429" y="2837789"/>
-                  </a:lnTo>
-                  <a:lnTo>
-                    <a:pt x="3773052" y="2848803"/>
-                  </a:lnTo>
-                  <a:lnTo>
-                    <a:pt x="3844674" y="2859629"/>
-                  </a:lnTo>
-                  <a:lnTo>
-                    <a:pt x="3916297" y="2870270"/>
-                  </a:lnTo>
-                  <a:lnTo>
-                    <a:pt x="3987919" y="2880730"/>
-                  </a:lnTo>
-                  <a:lnTo>
-                    <a:pt x="4059542" y="2891012"/>
-                  </a:lnTo>
-                  <a:lnTo>
-                    <a:pt x="4131165" y="2901118"/>
-                  </a:lnTo>
-                  <a:lnTo>
-                    <a:pt x="4202787" y="2911052"/>
-                  </a:lnTo>
-                  <a:lnTo>
-                    <a:pt x="4274410" y="2920817"/>
-                  </a:lnTo>
-                  <a:lnTo>
-                    <a:pt x="4346032" y="2930415"/>
-                  </a:lnTo>
-                  <a:lnTo>
-                    <a:pt x="4417655" y="2939849"/>
-                  </a:lnTo>
-                  <a:lnTo>
-                    <a:pt x="4489277" y="2949123"/>
-                  </a:lnTo>
-                  <a:lnTo>
-                    <a:pt x="4560900" y="2958238"/>
-                  </a:lnTo>
-                  <a:lnTo>
-                    <a:pt x="4632522" y="2967198"/>
-                  </a:lnTo>
-                  <a:lnTo>
-                    <a:pt x="4704145" y="2976006"/>
-                  </a:lnTo>
-                  <a:lnTo>
-                    <a:pt x="4775767" y="2984663"/>
-                  </a:lnTo>
-                  <a:lnTo>
-                    <a:pt x="4847390" y="2993172"/>
-                  </a:lnTo>
-                  <a:lnTo>
-                    <a:pt x="4919012" y="3001537"/>
-                  </a:lnTo>
-                  <a:lnTo>
-                    <a:pt x="4990635" y="3009759"/>
-                  </a:lnTo>
-                  <a:lnTo>
-                    <a:pt x="5062257" y="3017840"/>
-                  </a:lnTo>
-                  <a:lnTo>
-                    <a:pt x="5133880" y="3025784"/>
-                  </a:lnTo>
-                  <a:lnTo>
-                    <a:pt x="5205502" y="3033593"/>
-                  </a:lnTo>
-                  <a:lnTo>
-                    <a:pt x="5277125" y="3041268"/>
-                  </a:lnTo>
-                  <a:lnTo>
-                    <a:pt x="5348747" y="3048812"/>
-                  </a:lnTo>
-                  <a:lnTo>
-                    <a:pt x="5420370" y="3056228"/>
-                  </a:lnTo>
-                  <a:lnTo>
-                    <a:pt x="5491993" y="3063517"/>
-                  </a:lnTo>
-                  <a:lnTo>
-                    <a:pt x="5563615" y="3070682"/>
-                  </a:lnTo>
-                  <a:lnTo>
-                    <a:pt x="5635238" y="3077725"/>
-                  </a:lnTo>
-                  <a:lnTo>
-                    <a:pt x="5706860" y="3084648"/>
-                  </a:lnTo>
-                  <a:lnTo>
-                    <a:pt x="5778483" y="3091453"/>
-                  </a:lnTo>
-                  <a:lnTo>
-                    <a:pt x="5850105" y="3098142"/>
-                  </a:lnTo>
-                  <a:lnTo>
-                    <a:pt x="5921728" y="3104716"/>
-                  </a:lnTo>
-                  <a:lnTo>
-                    <a:pt x="5993350" y="3111179"/>
-                  </a:lnTo>
-                  <a:lnTo>
-                    <a:pt x="6064973" y="3117531"/>
-                  </a:lnTo>
-                  <a:lnTo>
-                    <a:pt x="6136595" y="3123775"/>
-                  </a:lnTo>
-                  <a:lnTo>
-                    <a:pt x="6208218" y="3129913"/>
-                  </a:lnTo>
-                  <a:lnTo>
-                    <a:pt x="6279840" y="3135946"/>
-                  </a:lnTo>
-                  <a:lnTo>
-                    <a:pt x="6351463" y="3141876"/>
-                  </a:lnTo>
-                  <a:lnTo>
-                    <a:pt x="6423085" y="3147705"/>
-                  </a:lnTo>
-                  <a:lnTo>
-                    <a:pt x="6494708" y="3153435"/>
-                  </a:lnTo>
-                  <a:lnTo>
-                    <a:pt x="6566330" y="3159067"/>
-                  </a:lnTo>
-                  <a:lnTo>
-                    <a:pt x="6637953" y="3164603"/>
-                  </a:lnTo>
-                </a:path>
-              </a:pathLst>
-            </a:custGeom>
-          </p:spPr>
-          <p:txBody>
-            <a:bodyPr/>
-            <a:lstStyle/>
-            <a:p/>
-          </p:txBody>
-        </p:sp>
-        <p:sp>
-          <p:nvSpPr>
             <p:cNvPr id="24" name="pl24"/>
             <p:cNvSpPr/>
             <p:nvPr/>
           </p:nvSpPr>
           <p:spPr>
             <a:xfrm>
-              <a:off x="1172049" y="3805832"/>
-              <a:ext cx="7090630" cy="1654392"/>
+              <a:off x="1679911" y="2143092"/>
+              <a:ext cx="6519505" cy="1142030"/>
             </a:xfrm>
             <a:custGeom>
               <a:avLst/>
               <a:pathLst>
-                <a:path w="7090630" h="1654392">
+                <a:path w="6519505" h="1142030">
                   <a:moveTo>
-                    <a:pt x="7090630" y="1654392"/>
+                    <a:pt x="0" y="0"/>
                   </a:moveTo>
                   <a:lnTo>
-                    <a:pt x="7019007" y="1650570"/>
-                  </a:lnTo>
-                  <a:lnTo>
-                    <a:pt x="6947385" y="1646597"/>
-                  </a:lnTo>
-                  <a:lnTo>
-                    <a:pt x="6875762" y="1642468"/>
-                  </a:lnTo>
-                  <a:lnTo>
-                    <a:pt x="6804139" y="1638177"/>
-                  </a:lnTo>
-                  <a:lnTo>
-                    <a:pt x="6732517" y="1633716"/>
-                  </a:lnTo>
-                  <a:lnTo>
-                    <a:pt x="6660894" y="1629079"/>
-                  </a:lnTo>
-                  <a:lnTo>
-                    <a:pt x="6589272" y="1624260"/>
-                  </a:lnTo>
-                  <a:lnTo>
-                    <a:pt x="6517649" y="1619251"/>
-                  </a:lnTo>
-                  <a:lnTo>
-                    <a:pt x="6446027" y="1614045"/>
-                  </a:lnTo>
-                  <a:lnTo>
-                    <a:pt x="6374404" y="1608634"/>
-                  </a:lnTo>
-                  <a:lnTo>
-                    <a:pt x="6302782" y="1603010"/>
-                  </a:lnTo>
-                  <a:lnTo>
-                    <a:pt x="6231159" y="1597164"/>
-                  </a:lnTo>
-                  <a:lnTo>
-                    <a:pt x="6159537" y="1591087"/>
-                  </a:lnTo>
-                  <a:lnTo>
-                    <a:pt x="6087914" y="1584772"/>
-                  </a:lnTo>
-                  <a:lnTo>
-                    <a:pt x="6016292" y="1578207"/>
-                  </a:lnTo>
-                  <a:lnTo>
-                    <a:pt x="5944669" y="1571384"/>
-                  </a:lnTo>
-                  <a:lnTo>
-                    <a:pt x="5873047" y="1564292"/>
-                  </a:lnTo>
-                  <a:lnTo>
-                    <a:pt x="5801424" y="1556921"/>
-                  </a:lnTo>
-                  <a:lnTo>
-                    <a:pt x="5729802" y="1549260"/>
-                  </a:lnTo>
-                  <a:lnTo>
-                    <a:pt x="5658179" y="1541296"/>
-                  </a:lnTo>
-                  <a:lnTo>
-                    <a:pt x="5586557" y="1533020"/>
-                  </a:lnTo>
-                  <a:lnTo>
-                    <a:pt x="5514934" y="1524416"/>
-                  </a:lnTo>
-                  <a:lnTo>
-                    <a:pt x="5443311" y="1515475"/>
-                  </a:lnTo>
-                  <a:lnTo>
-                    <a:pt x="5371689" y="1506180"/>
-                  </a:lnTo>
-                  <a:lnTo>
-                    <a:pt x="5300066" y="1496520"/>
-                  </a:lnTo>
-                  <a:lnTo>
-                    <a:pt x="5228444" y="1486479"/>
-                  </a:lnTo>
-                  <a:lnTo>
-                    <a:pt x="5156821" y="1476043"/>
-                  </a:lnTo>
-                  <a:lnTo>
-                    <a:pt x="5085199" y="1465196"/>
-                  </a:lnTo>
-                  <a:lnTo>
-                    <a:pt x="5013576" y="1453921"/>
-                  </a:lnTo>
-                  <a:lnTo>
-                    <a:pt x="4941954" y="1442202"/>
-                  </a:lnTo>
-                  <a:lnTo>
-                    <a:pt x="4870331" y="1430022"/>
-                  </a:lnTo>
-                  <a:lnTo>
-                    <a:pt x="4798709" y="1417361"/>
-                  </a:lnTo>
-                  <a:lnTo>
-                    <a:pt x="4727086" y="1404202"/>
-                  </a:lnTo>
-                  <a:lnTo>
-                    <a:pt x="4655464" y="1390525"/>
-                  </a:lnTo>
-                  <a:lnTo>
-                    <a:pt x="4583841" y="1376309"/>
-                  </a:lnTo>
-                  <a:lnTo>
-                    <a:pt x="4512219" y="1361533"/>
-                  </a:lnTo>
-                  <a:lnTo>
-                    <a:pt x="4440596" y="1346175"/>
-                  </a:lnTo>
-                  <a:lnTo>
-                    <a:pt x="4368974" y="1330211"/>
-                  </a:lnTo>
-                  <a:lnTo>
-                    <a:pt x="4297351" y="1313619"/>
-                  </a:lnTo>
-                  <a:lnTo>
-                    <a:pt x="4225729" y="1296374"/>
-                  </a:lnTo>
-                  <a:lnTo>
-                    <a:pt x="4154106" y="1278449"/>
-                  </a:lnTo>
-                  <a:lnTo>
-                    <a:pt x="4082483" y="1259818"/>
-                  </a:lnTo>
-                  <a:lnTo>
-                    <a:pt x="4010861" y="1240453"/>
-                  </a:lnTo>
-                  <a:lnTo>
-                    <a:pt x="3939238" y="1220325"/>
-                  </a:lnTo>
-                  <a:lnTo>
-                    <a:pt x="3867616" y="1199405"/>
-                  </a:lnTo>
-                  <a:lnTo>
-                    <a:pt x="3795993" y="1177660"/>
-                  </a:lnTo>
-                  <a:lnTo>
-                    <a:pt x="3724371" y="1155059"/>
-                  </a:lnTo>
-                  <a:lnTo>
-                    <a:pt x="3652748" y="1131568"/>
-                  </a:lnTo>
-                  <a:lnTo>
-                    <a:pt x="3581126" y="1107151"/>
-                  </a:lnTo>
-                  <a:lnTo>
-                    <a:pt x="3509503" y="1081772"/>
-                  </a:lnTo>
-                  <a:lnTo>
-                    <a:pt x="3437881" y="1055394"/>
-                  </a:lnTo>
-                  <a:lnTo>
-                    <a:pt x="3366258" y="1027976"/>
-                  </a:lnTo>
-                  <a:lnTo>
-                    <a:pt x="3294636" y="999479"/>
-                  </a:lnTo>
-                  <a:lnTo>
-                    <a:pt x="3223013" y="969858"/>
-                  </a:lnTo>
-                  <a:lnTo>
-                    <a:pt x="3151391" y="939072"/>
-                  </a:lnTo>
-                  <a:lnTo>
-                    <a:pt x="3079768" y="915362"/>
-                  </a:lnTo>
-                  <a:lnTo>
-                    <a:pt x="3008146" y="900860"/>
-                  </a:lnTo>
-                  <a:lnTo>
-                    <a:pt x="2936523" y="886106"/>
-                  </a:lnTo>
-                  <a:lnTo>
-                    <a:pt x="2864901" y="871096"/>
-                  </a:lnTo>
-                  <a:lnTo>
-                    <a:pt x="2793278" y="855826"/>
-                  </a:lnTo>
-                  <a:lnTo>
-                    <a:pt x="2721655" y="840291"/>
-                  </a:lnTo>
-                  <a:lnTo>
-                    <a:pt x="2650033" y="824487"/>
-                  </a:lnTo>
-                  <a:lnTo>
-                    <a:pt x="2578410" y="808408"/>
-                  </a:lnTo>
-                  <a:lnTo>
-                    <a:pt x="2506788" y="792050"/>
-                  </a:lnTo>
-                  <a:lnTo>
-                    <a:pt x="2435165" y="775409"/>
-                  </a:lnTo>
-                  <a:lnTo>
-                    <a:pt x="2363543" y="758479"/>
-                  </a:lnTo>
-                  <a:lnTo>
-                    <a:pt x="2291920" y="741256"/>
-                  </a:lnTo>
-                  <a:lnTo>
-                    <a:pt x="2220298" y="723733"/>
-                  </a:lnTo>
-                  <a:lnTo>
-                    <a:pt x="2148675" y="705907"/>
-                  </a:lnTo>
-                  <a:lnTo>
-                    <a:pt x="2077053" y="687772"/>
-                  </a:lnTo>
-                  <a:lnTo>
-                    <a:pt x="2005430" y="669321"/>
-                  </a:lnTo>
-                  <a:lnTo>
-                    <a:pt x="1933808" y="650551"/>
-                  </a:lnTo>
-                  <a:lnTo>
-                    <a:pt x="1862185" y="631456"/>
-                  </a:lnTo>
-                  <a:lnTo>
-                    <a:pt x="1790563" y="612029"/>
-                  </a:lnTo>
-                  <a:lnTo>
-                    <a:pt x="1718940" y="592265"/>
-                  </a:lnTo>
-                  <a:lnTo>
-                    <a:pt x="1647318" y="572158"/>
-                  </a:lnTo>
-                  <a:lnTo>
-                    <a:pt x="1575695" y="551702"/>
-                  </a:lnTo>
-                  <a:lnTo>
-                    <a:pt x="1504073" y="530892"/>
-                  </a:lnTo>
-                  <a:lnTo>
-                    <a:pt x="1432450" y="509721"/>
-                  </a:lnTo>
-                  <a:lnTo>
-                    <a:pt x="1360827" y="488182"/>
-                  </a:lnTo>
-                  <a:lnTo>
-                    <a:pt x="1289205" y="466270"/>
-                  </a:lnTo>
-                  <a:lnTo>
-                    <a:pt x="1217582" y="443978"/>
-                  </a:lnTo>
-                  <a:lnTo>
-                    <a:pt x="1145960" y="421299"/>
-                  </a:lnTo>
-                  <a:lnTo>
-                    <a:pt x="1074337" y="398227"/>
-                  </a:lnTo>
-                  <a:lnTo>
-                    <a:pt x="1002715" y="374754"/>
-                  </a:lnTo>
-                  <a:lnTo>
-                    <a:pt x="931092" y="350874"/>
-                  </a:lnTo>
-                  <a:lnTo>
-                    <a:pt x="859470" y="326580"/>
-                  </a:lnTo>
-                  <a:lnTo>
-                    <a:pt x="787847" y="301865"/>
-                  </a:lnTo>
-                  <a:lnTo>
-                    <a:pt x="716225" y="276721"/>
-                  </a:lnTo>
-                  <a:lnTo>
-                    <a:pt x="644602" y="251141"/>
-                  </a:lnTo>
-                  <a:lnTo>
-                    <a:pt x="572980" y="225117"/>
-                  </a:lnTo>
-                  <a:lnTo>
-                    <a:pt x="501357" y="198642"/>
-                  </a:lnTo>
-                  <a:lnTo>
-                    <a:pt x="429735" y="171707"/>
-                  </a:lnTo>
-                  <a:lnTo>
-                    <a:pt x="358112" y="144305"/>
-                  </a:lnTo>
-                  <a:lnTo>
-                    <a:pt x="286490" y="116428"/>
-                  </a:lnTo>
-                  <a:lnTo>
-                    <a:pt x="214867" y="88067"/>
-                  </a:lnTo>
-                  <a:lnTo>
-                    <a:pt x="143245" y="59215"/>
-                  </a:lnTo>
-                  <a:lnTo>
-                    <a:pt x="71622" y="29862"/>
-                  </a:lnTo>
-                  <a:lnTo>
-                    <a:pt x="0" y="0"/>
+                    <a:pt x="47812" y="32782"/>
+                  </a:lnTo>
+                  <a:lnTo>
+                    <a:pt x="118156" y="79186"/>
+                  </a:lnTo>
+                  <a:lnTo>
+                    <a:pt x="188501" y="123831"/>
+                  </a:lnTo>
+                  <a:lnTo>
+                    <a:pt x="258845" y="166785"/>
+                  </a:lnTo>
+                  <a:lnTo>
+                    <a:pt x="329190" y="208110"/>
+                  </a:lnTo>
+                  <a:lnTo>
+                    <a:pt x="399534" y="247869"/>
+                  </a:lnTo>
+                  <a:lnTo>
+                    <a:pt x="469879" y="286122"/>
+                  </a:lnTo>
+                  <a:lnTo>
+                    <a:pt x="540223" y="322925"/>
+                  </a:lnTo>
+                  <a:lnTo>
+                    <a:pt x="610568" y="358333"/>
+                  </a:lnTo>
+                  <a:lnTo>
+                    <a:pt x="680912" y="392399"/>
+                  </a:lnTo>
+                  <a:lnTo>
+                    <a:pt x="751257" y="425174"/>
+                  </a:lnTo>
+                  <a:lnTo>
+                    <a:pt x="821601" y="456706"/>
+                  </a:lnTo>
+                  <a:lnTo>
+                    <a:pt x="891946" y="487044"/>
+                  </a:lnTo>
+                  <a:lnTo>
+                    <a:pt x="962290" y="516232"/>
+                  </a:lnTo>
+                  <a:lnTo>
+                    <a:pt x="1032635" y="544314"/>
+                  </a:lnTo>
+                  <a:lnTo>
+                    <a:pt x="1102979" y="571331"/>
+                  </a:lnTo>
+                  <a:lnTo>
+                    <a:pt x="1173324" y="597325"/>
+                  </a:lnTo>
+                  <a:lnTo>
+                    <a:pt x="1243668" y="622334"/>
+                  </a:lnTo>
+                  <a:lnTo>
+                    <a:pt x="1314013" y="646394"/>
+                  </a:lnTo>
+                  <a:lnTo>
+                    <a:pt x="1384357" y="669543"/>
+                  </a:lnTo>
+                  <a:lnTo>
+                    <a:pt x="1454702" y="691815"/>
+                  </a:lnTo>
+                  <a:lnTo>
+                    <a:pt x="1525046" y="713242"/>
+                  </a:lnTo>
+                  <a:lnTo>
+                    <a:pt x="1595391" y="733858"/>
+                  </a:lnTo>
+                  <a:lnTo>
+                    <a:pt x="1665735" y="753692"/>
+                  </a:lnTo>
+                  <a:lnTo>
+                    <a:pt x="1736080" y="772774"/>
+                  </a:lnTo>
+                  <a:lnTo>
+                    <a:pt x="1806424" y="791133"/>
+                  </a:lnTo>
+                  <a:lnTo>
+                    <a:pt x="1876769" y="808797"/>
+                  </a:lnTo>
+                  <a:lnTo>
+                    <a:pt x="1947113" y="825791"/>
+                  </a:lnTo>
+                  <a:lnTo>
+                    <a:pt x="2017458" y="842141"/>
+                  </a:lnTo>
+                  <a:lnTo>
+                    <a:pt x="2087802" y="857871"/>
+                  </a:lnTo>
+                  <a:lnTo>
+                    <a:pt x="2158147" y="873005"/>
+                  </a:lnTo>
+                  <a:lnTo>
+                    <a:pt x="2228491" y="887566"/>
+                  </a:lnTo>
+                  <a:lnTo>
+                    <a:pt x="2298836" y="901574"/>
+                  </a:lnTo>
+                  <a:lnTo>
+                    <a:pt x="2369180" y="915052"/>
+                  </a:lnTo>
+                  <a:lnTo>
+                    <a:pt x="2439525" y="928019"/>
+                  </a:lnTo>
+                  <a:lnTo>
+                    <a:pt x="2509869" y="940495"/>
+                  </a:lnTo>
+                  <a:lnTo>
+                    <a:pt x="2580214" y="952498"/>
+                  </a:lnTo>
+                  <a:lnTo>
+                    <a:pt x="2650558" y="960634"/>
+                  </a:lnTo>
+                  <a:lnTo>
+                    <a:pt x="2720903" y="965690"/>
+                  </a:lnTo>
+                  <a:lnTo>
+                    <a:pt x="2791247" y="970661"/>
+                  </a:lnTo>
+                  <a:lnTo>
+                    <a:pt x="2861591" y="975546"/>
+                  </a:lnTo>
+                  <a:lnTo>
+                    <a:pt x="2931936" y="980348"/>
+                  </a:lnTo>
+                  <a:lnTo>
+                    <a:pt x="3002280" y="985069"/>
+                  </a:lnTo>
+                  <a:lnTo>
+                    <a:pt x="3072625" y="989709"/>
+                  </a:lnTo>
+                  <a:lnTo>
+                    <a:pt x="3142969" y="994270"/>
+                  </a:lnTo>
+                  <a:lnTo>
+                    <a:pt x="3213314" y="998753"/>
+                  </a:lnTo>
+                  <a:lnTo>
+                    <a:pt x="3283658" y="1003159"/>
+                  </a:lnTo>
+                  <a:lnTo>
+                    <a:pt x="3354003" y="1007491"/>
+                  </a:lnTo>
+                  <a:lnTo>
+                    <a:pt x="3424347" y="1011749"/>
+                  </a:lnTo>
+                  <a:lnTo>
+                    <a:pt x="3494692" y="1015934"/>
+                  </a:lnTo>
+                  <a:lnTo>
+                    <a:pt x="3565036" y="1020047"/>
+                  </a:lnTo>
+                  <a:lnTo>
+                    <a:pt x="3635381" y="1024091"/>
+                  </a:lnTo>
+                  <a:lnTo>
+                    <a:pt x="3705725" y="1028066"/>
+                  </a:lnTo>
+                  <a:lnTo>
+                    <a:pt x="3776070" y="1031972"/>
+                  </a:lnTo>
+                  <a:lnTo>
+                    <a:pt x="3846414" y="1035813"/>
+                  </a:lnTo>
+                  <a:lnTo>
+                    <a:pt x="3916759" y="1039587"/>
+                  </a:lnTo>
+                  <a:lnTo>
+                    <a:pt x="3987103" y="1043298"/>
+                  </a:lnTo>
+                  <a:lnTo>
+                    <a:pt x="4057448" y="1046945"/>
+                  </a:lnTo>
+                  <a:lnTo>
+                    <a:pt x="4127792" y="1050530"/>
+                  </a:lnTo>
+                  <a:lnTo>
+                    <a:pt x="4198137" y="1054054"/>
+                  </a:lnTo>
+                  <a:lnTo>
+                    <a:pt x="4268481" y="1057517"/>
+                  </a:lnTo>
+                  <a:lnTo>
+                    <a:pt x="4338826" y="1060922"/>
+                  </a:lnTo>
+                  <a:lnTo>
+                    <a:pt x="4409170" y="1064269"/>
+                  </a:lnTo>
+                  <a:lnTo>
+                    <a:pt x="4479515" y="1067558"/>
+                  </a:lnTo>
+                  <a:lnTo>
+                    <a:pt x="4549859" y="1070792"/>
+                  </a:lnTo>
+                  <a:lnTo>
+                    <a:pt x="4620204" y="1073970"/>
+                  </a:lnTo>
+                  <a:lnTo>
+                    <a:pt x="4690548" y="1077094"/>
+                  </a:lnTo>
+                  <a:lnTo>
+                    <a:pt x="4760893" y="1080165"/>
+                  </a:lnTo>
+                  <a:lnTo>
+                    <a:pt x="4831237" y="1083184"/>
+                  </a:lnTo>
+                  <a:lnTo>
+                    <a:pt x="4901582" y="1086151"/>
+                  </a:lnTo>
+                  <a:lnTo>
+                    <a:pt x="4971926" y="1089067"/>
+                  </a:lnTo>
+                  <a:lnTo>
+                    <a:pt x="5042271" y="1091934"/>
+                  </a:lnTo>
+                  <a:lnTo>
+                    <a:pt x="5112615" y="1094752"/>
+                  </a:lnTo>
+                  <a:lnTo>
+                    <a:pt x="5182960" y="1097522"/>
+                  </a:lnTo>
+                  <a:lnTo>
+                    <a:pt x="5253304" y="1100244"/>
+                  </a:lnTo>
+                  <a:lnTo>
+                    <a:pt x="5323649" y="1102921"/>
+                  </a:lnTo>
+                  <a:lnTo>
+                    <a:pt x="5393993" y="1105551"/>
+                  </a:lnTo>
+                  <a:lnTo>
+                    <a:pt x="5464338" y="1108137"/>
+                  </a:lnTo>
+                  <a:lnTo>
+                    <a:pt x="5534682" y="1110678"/>
+                  </a:lnTo>
+                  <a:lnTo>
+                    <a:pt x="5605027" y="1113177"/>
+                  </a:lnTo>
+                  <a:lnTo>
+                    <a:pt x="5675371" y="1115632"/>
+                  </a:lnTo>
+                  <a:lnTo>
+                    <a:pt x="5745716" y="1118046"/>
+                  </a:lnTo>
+                  <a:lnTo>
+                    <a:pt x="5816060" y="1120419"/>
+                  </a:lnTo>
+                  <a:lnTo>
+                    <a:pt x="5886405" y="1122751"/>
+                  </a:lnTo>
+                  <a:lnTo>
+                    <a:pt x="5956749" y="1125043"/>
+                  </a:lnTo>
+                  <a:lnTo>
+                    <a:pt x="6027094" y="1127297"/>
+                  </a:lnTo>
+                  <a:lnTo>
+                    <a:pt x="6097438" y="1129512"/>
+                  </a:lnTo>
+                  <a:lnTo>
+                    <a:pt x="6167783" y="1131689"/>
+                  </a:lnTo>
+                  <a:lnTo>
+                    <a:pt x="6238127" y="1133829"/>
+                  </a:lnTo>
+                  <a:lnTo>
+                    <a:pt x="6308472" y="1135932"/>
+                  </a:lnTo>
+                  <a:lnTo>
+                    <a:pt x="6378816" y="1138000"/>
+                  </a:lnTo>
+                  <a:lnTo>
+                    <a:pt x="6449161" y="1140033"/>
+                  </a:lnTo>
+                  <a:lnTo>
+                    <a:pt x="6519505" y="1142030"/>
                   </a:lnTo>
                 </a:path>
               </a:pathLst>
@@ -4290,312 +4000,637 @@
           </p:nvSpPr>
           <p:spPr>
             <a:xfrm>
-              <a:off x="1172049" y="2766583"/>
-              <a:ext cx="7090630" cy="2614697"/>
+              <a:off x="1235312" y="2768249"/>
+              <a:ext cx="6964104" cy="597031"/>
             </a:xfrm>
             <a:custGeom>
               <a:avLst/>
               <a:pathLst>
-                <a:path w="7090630" h="2614697">
+                <a:path w="6964104" h="597031">
+                  <a:moveTo>
+                    <a:pt x="6964104" y="597031"/>
+                  </a:moveTo>
+                  <a:lnTo>
+                    <a:pt x="6893760" y="595651"/>
+                  </a:lnTo>
+                  <a:lnTo>
+                    <a:pt x="6823415" y="594218"/>
+                  </a:lnTo>
+                  <a:lnTo>
+                    <a:pt x="6753071" y="592728"/>
+                  </a:lnTo>
+                  <a:lnTo>
+                    <a:pt x="6682726" y="591179"/>
+                  </a:lnTo>
+                  <a:lnTo>
+                    <a:pt x="6612382" y="589569"/>
+                  </a:lnTo>
+                  <a:lnTo>
+                    <a:pt x="6542037" y="587896"/>
+                  </a:lnTo>
+                  <a:lnTo>
+                    <a:pt x="6471693" y="586157"/>
+                  </a:lnTo>
+                  <a:lnTo>
+                    <a:pt x="6401348" y="584349"/>
+                  </a:lnTo>
+                  <a:lnTo>
+                    <a:pt x="6331004" y="582471"/>
+                  </a:lnTo>
+                  <a:lnTo>
+                    <a:pt x="6260659" y="580518"/>
+                  </a:lnTo>
+                  <a:lnTo>
+                    <a:pt x="6190315" y="578488"/>
+                  </a:lnTo>
+                  <a:lnTo>
+                    <a:pt x="6119970" y="576378"/>
+                  </a:lnTo>
+                  <a:lnTo>
+                    <a:pt x="6049626" y="574186"/>
+                  </a:lnTo>
+                  <a:lnTo>
+                    <a:pt x="5979281" y="571906"/>
+                  </a:lnTo>
+                  <a:lnTo>
+                    <a:pt x="5908937" y="569538"/>
+                  </a:lnTo>
+                  <a:lnTo>
+                    <a:pt x="5838592" y="567075"/>
+                  </a:lnTo>
+                  <a:lnTo>
+                    <a:pt x="5768248" y="564516"/>
+                  </a:lnTo>
+                  <a:lnTo>
+                    <a:pt x="5697903" y="561856"/>
+                  </a:lnTo>
+                  <a:lnTo>
+                    <a:pt x="5627559" y="559091"/>
+                  </a:lnTo>
+                  <a:lnTo>
+                    <a:pt x="5557214" y="556217"/>
+                  </a:lnTo>
+                  <a:lnTo>
+                    <a:pt x="5486870" y="553230"/>
+                  </a:lnTo>
+                  <a:lnTo>
+                    <a:pt x="5416525" y="550126"/>
+                  </a:lnTo>
+                  <a:lnTo>
+                    <a:pt x="5346181" y="546899"/>
+                  </a:lnTo>
+                  <a:lnTo>
+                    <a:pt x="5275836" y="543545"/>
+                  </a:lnTo>
+                  <a:lnTo>
+                    <a:pt x="5205492" y="540059"/>
+                  </a:lnTo>
+                  <a:lnTo>
+                    <a:pt x="5135147" y="536435"/>
+                  </a:lnTo>
+                  <a:lnTo>
+                    <a:pt x="5064803" y="532669"/>
+                  </a:lnTo>
+                  <a:lnTo>
+                    <a:pt x="4994458" y="528754"/>
+                  </a:lnTo>
+                  <a:lnTo>
+                    <a:pt x="4924114" y="524686"/>
+                  </a:lnTo>
+                  <a:lnTo>
+                    <a:pt x="4853769" y="520456"/>
+                  </a:lnTo>
+                  <a:lnTo>
+                    <a:pt x="4783425" y="516061"/>
+                  </a:lnTo>
+                  <a:lnTo>
+                    <a:pt x="4713080" y="511492"/>
+                  </a:lnTo>
+                  <a:lnTo>
+                    <a:pt x="4642736" y="506743"/>
+                  </a:lnTo>
+                  <a:lnTo>
+                    <a:pt x="4572391" y="501807"/>
+                  </a:lnTo>
+                  <a:lnTo>
+                    <a:pt x="4502047" y="496677"/>
+                  </a:lnTo>
+                  <a:lnTo>
+                    <a:pt x="4431702" y="491345"/>
+                  </a:lnTo>
+                  <a:lnTo>
+                    <a:pt x="4361358" y="485802"/>
+                  </a:lnTo>
+                  <a:lnTo>
+                    <a:pt x="4291013" y="480042"/>
+                  </a:lnTo>
+                  <a:lnTo>
+                    <a:pt x="4220669" y="474054"/>
+                  </a:lnTo>
+                  <a:lnTo>
+                    <a:pt x="4150324" y="467831"/>
+                  </a:lnTo>
+                  <a:lnTo>
+                    <a:pt x="4079980" y="461362"/>
+                  </a:lnTo>
+                  <a:lnTo>
+                    <a:pt x="4009635" y="454638"/>
+                  </a:lnTo>
+                  <a:lnTo>
+                    <a:pt x="3939291" y="447650"/>
+                  </a:lnTo>
+                  <a:lnTo>
+                    <a:pt x="3868946" y="440386"/>
+                  </a:lnTo>
+                  <a:lnTo>
+                    <a:pt x="3798602" y="432837"/>
+                  </a:lnTo>
+                  <a:lnTo>
+                    <a:pt x="3728257" y="424990"/>
+                  </a:lnTo>
+                  <a:lnTo>
+                    <a:pt x="3657913" y="416833"/>
+                  </a:lnTo>
+                  <a:lnTo>
+                    <a:pt x="3587569" y="408356"/>
+                  </a:lnTo>
+                  <a:lnTo>
+                    <a:pt x="3517224" y="399544"/>
+                  </a:lnTo>
+                  <a:lnTo>
+                    <a:pt x="3446880" y="390386"/>
+                  </a:lnTo>
+                  <a:lnTo>
+                    <a:pt x="3376535" y="380866"/>
+                  </a:lnTo>
+                  <a:lnTo>
+                    <a:pt x="3306191" y="370972"/>
+                  </a:lnTo>
+                  <a:lnTo>
+                    <a:pt x="3235846" y="360688"/>
+                  </a:lnTo>
+                  <a:lnTo>
+                    <a:pt x="3165502" y="349999"/>
+                  </a:lnTo>
+                  <a:lnTo>
+                    <a:pt x="3095157" y="338889"/>
+                  </a:lnTo>
+                  <a:lnTo>
+                    <a:pt x="3024813" y="330332"/>
+                  </a:lnTo>
+                  <a:lnTo>
+                    <a:pt x="2954468" y="325099"/>
+                  </a:lnTo>
+                  <a:lnTo>
+                    <a:pt x="2884124" y="319774"/>
+                  </a:lnTo>
+                  <a:lnTo>
+                    <a:pt x="2813779" y="314358"/>
+                  </a:lnTo>
+                  <a:lnTo>
+                    <a:pt x="2743435" y="308847"/>
+                  </a:lnTo>
+                  <a:lnTo>
+                    <a:pt x="2673090" y="303241"/>
+                  </a:lnTo>
+                  <a:lnTo>
+                    <a:pt x="2602746" y="297537"/>
+                  </a:lnTo>
+                  <a:lnTo>
+                    <a:pt x="2532401" y="291735"/>
+                  </a:lnTo>
+                  <a:lnTo>
+                    <a:pt x="2462057" y="285832"/>
+                  </a:lnTo>
+                  <a:lnTo>
+                    <a:pt x="2391712" y="279827"/>
+                  </a:lnTo>
+                  <a:lnTo>
+                    <a:pt x="2321368" y="273717"/>
+                  </a:lnTo>
+                  <a:lnTo>
+                    <a:pt x="2251023" y="267501"/>
+                  </a:lnTo>
+                  <a:lnTo>
+                    <a:pt x="2180679" y="261178"/>
+                  </a:lnTo>
+                  <a:lnTo>
+                    <a:pt x="2110334" y="254745"/>
+                  </a:lnTo>
+                  <a:lnTo>
+                    <a:pt x="2039990" y="248200"/>
+                  </a:lnTo>
+                  <a:lnTo>
+                    <a:pt x="1969645" y="241542"/>
+                  </a:lnTo>
+                  <a:lnTo>
+                    <a:pt x="1899301" y="234768"/>
+                  </a:lnTo>
+                  <a:lnTo>
+                    <a:pt x="1828956" y="227877"/>
+                  </a:lnTo>
+                  <a:lnTo>
+                    <a:pt x="1758612" y="220866"/>
+                  </a:lnTo>
+                  <a:lnTo>
+                    <a:pt x="1688267" y="213734"/>
+                  </a:lnTo>
+                  <a:lnTo>
+                    <a:pt x="1617923" y="206478"/>
+                  </a:lnTo>
+                  <a:lnTo>
+                    <a:pt x="1547578" y="199096"/>
+                  </a:lnTo>
+                  <a:lnTo>
+                    <a:pt x="1477234" y="191586"/>
+                  </a:lnTo>
+                  <a:lnTo>
+                    <a:pt x="1406889" y="183946"/>
+                  </a:lnTo>
+                  <a:lnTo>
+                    <a:pt x="1336545" y="176173"/>
+                  </a:lnTo>
+                  <a:lnTo>
+                    <a:pt x="1266200" y="168266"/>
+                  </a:lnTo>
+                  <a:lnTo>
+                    <a:pt x="1195856" y="160221"/>
+                  </a:lnTo>
+                  <a:lnTo>
+                    <a:pt x="1125511" y="152037"/>
+                  </a:lnTo>
+                  <a:lnTo>
+                    <a:pt x="1055167" y="143710"/>
+                  </a:lnTo>
+                  <a:lnTo>
+                    <a:pt x="984822" y="135240"/>
+                  </a:lnTo>
+                  <a:lnTo>
+                    <a:pt x="914478" y="126622"/>
+                  </a:lnTo>
+                  <a:lnTo>
+                    <a:pt x="844133" y="117855"/>
+                  </a:lnTo>
+                  <a:lnTo>
+                    <a:pt x="773789" y="108936"/>
+                  </a:lnTo>
+                  <a:lnTo>
+                    <a:pt x="703444" y="99862"/>
+                  </a:lnTo>
+                  <a:lnTo>
+                    <a:pt x="633100" y="90630"/>
+                  </a:lnTo>
+                  <a:lnTo>
+                    <a:pt x="562755" y="81239"/>
+                  </a:lnTo>
+                  <a:lnTo>
+                    <a:pt x="492411" y="71685"/>
+                  </a:lnTo>
+                  <a:lnTo>
+                    <a:pt x="422066" y="61965"/>
+                  </a:lnTo>
+                  <a:lnTo>
+                    <a:pt x="351722" y="52076"/>
+                  </a:lnTo>
+                  <a:lnTo>
+                    <a:pt x="281377" y="42016"/>
+                  </a:lnTo>
+                  <a:lnTo>
+                    <a:pt x="211033" y="31781"/>
+                  </a:lnTo>
+                  <a:lnTo>
+                    <a:pt x="140688" y="21369"/>
+                  </a:lnTo>
+                  <a:lnTo>
+                    <a:pt x="70344" y="10776"/>
+                  </a:lnTo>
+                  <a:lnTo>
+                    <a:pt x="0" y="0"/>
+                  </a:lnTo>
+                </a:path>
+              </a:pathLst>
+            </a:custGeom>
+          </p:spPr>
+          <p:txBody>
+            <a:bodyPr/>
+            <a:lstStyle/>
+            <a:p/>
+          </p:txBody>
+        </p:sp>
+        <p:sp>
+          <p:nvSpPr>
+            <p:cNvPr id="26" name="pl26"/>
+            <p:cNvSpPr/>
+            <p:nvPr/>
+          </p:nvSpPr>
+          <p:spPr>
+            <a:xfrm>
+              <a:off x="1235312" y="2393208"/>
+              <a:ext cx="6964104" cy="943582"/>
+            </a:xfrm>
+            <a:custGeom>
+              <a:avLst/>
+              <a:pathLst>
+                <a:path w="6964104" h="943582">
                   <a:moveTo>
                     <a:pt x="0" y="0"/>
                   </a:moveTo>
                   <a:lnTo>
-                    <a:pt x="71622" y="76828"/>
-                  </a:lnTo>
-                  <a:lnTo>
-                    <a:pt x="143245" y="151541"/>
-                  </a:lnTo>
-                  <a:lnTo>
-                    <a:pt x="214867" y="224197"/>
-                  </a:lnTo>
-                  <a:lnTo>
-                    <a:pt x="286490" y="294853"/>
-                  </a:lnTo>
-                  <a:lnTo>
-                    <a:pt x="358112" y="363564"/>
-                  </a:lnTo>
-                  <a:lnTo>
-                    <a:pt x="429735" y="430383"/>
-                  </a:lnTo>
-                  <a:lnTo>
-                    <a:pt x="501357" y="495362"/>
-                  </a:lnTo>
-                  <a:lnTo>
-                    <a:pt x="572980" y="558553"/>
-                  </a:lnTo>
-                  <a:lnTo>
-                    <a:pt x="644602" y="620004"/>
-                  </a:lnTo>
-                  <a:lnTo>
-                    <a:pt x="716225" y="679763"/>
-                  </a:lnTo>
-                  <a:lnTo>
-                    <a:pt x="787847" y="737877"/>
-                  </a:lnTo>
-                  <a:lnTo>
-                    <a:pt x="859470" y="794391"/>
-                  </a:lnTo>
-                  <a:lnTo>
-                    <a:pt x="931092" y="849349"/>
-                  </a:lnTo>
-                  <a:lnTo>
-                    <a:pt x="1002715" y="902795"/>
-                  </a:lnTo>
-                  <a:lnTo>
-                    <a:pt x="1074337" y="954769"/>
-                  </a:lnTo>
-                  <a:lnTo>
-                    <a:pt x="1145960" y="1005312"/>
-                  </a:lnTo>
-                  <a:lnTo>
-                    <a:pt x="1217582" y="1054463"/>
-                  </a:lnTo>
-                  <a:lnTo>
-                    <a:pt x="1289205" y="1102261"/>
-                  </a:lnTo>
-                  <a:lnTo>
-                    <a:pt x="1360827" y="1148744"/>
-                  </a:lnTo>
-                  <a:lnTo>
-                    <a:pt x="1432450" y="1193947"/>
-                  </a:lnTo>
-                  <a:lnTo>
-                    <a:pt x="1504073" y="1237905"/>
-                  </a:lnTo>
-                  <a:lnTo>
-                    <a:pt x="1575695" y="1280653"/>
-                  </a:lnTo>
-                  <a:lnTo>
-                    <a:pt x="1647318" y="1322224"/>
-                  </a:lnTo>
-                  <a:lnTo>
-                    <a:pt x="1718940" y="1362651"/>
-                  </a:lnTo>
-                  <a:lnTo>
-                    <a:pt x="1790563" y="1401965"/>
-                  </a:lnTo>
-                  <a:lnTo>
-                    <a:pt x="1862185" y="1440197"/>
-                  </a:lnTo>
-                  <a:lnTo>
-                    <a:pt x="1933808" y="1477376"/>
-                  </a:lnTo>
-                  <a:lnTo>
-                    <a:pt x="2005430" y="1513531"/>
-                  </a:lnTo>
-                  <a:lnTo>
-                    <a:pt x="2077053" y="1548691"/>
-                  </a:lnTo>
-                  <a:lnTo>
-                    <a:pt x="2148675" y="1582883"/>
-                  </a:lnTo>
-                  <a:lnTo>
-                    <a:pt x="2220298" y="1616134"/>
-                  </a:lnTo>
-                  <a:lnTo>
-                    <a:pt x="2291920" y="1648469"/>
-                  </a:lnTo>
-                  <a:lnTo>
-                    <a:pt x="2363543" y="1679914"/>
-                  </a:lnTo>
-                  <a:lnTo>
-                    <a:pt x="2435165" y="1710494"/>
-                  </a:lnTo>
-                  <a:lnTo>
-                    <a:pt x="2506788" y="1740231"/>
-                  </a:lnTo>
-                  <a:lnTo>
-                    <a:pt x="2578410" y="1769150"/>
-                  </a:lnTo>
-                  <a:lnTo>
-                    <a:pt x="2650033" y="1797273"/>
-                  </a:lnTo>
-                  <a:lnTo>
-                    <a:pt x="2721655" y="1824621"/>
-                  </a:lnTo>
-                  <a:lnTo>
-                    <a:pt x="2793278" y="1851217"/>
-                  </a:lnTo>
-                  <a:lnTo>
-                    <a:pt x="2864901" y="1877080"/>
-                  </a:lnTo>
-                  <a:lnTo>
-                    <a:pt x="2936523" y="1902232"/>
-                  </a:lnTo>
-                  <a:lnTo>
-                    <a:pt x="3008146" y="1926691"/>
-                  </a:lnTo>
-                  <a:lnTo>
-                    <a:pt x="3079768" y="1950476"/>
-                  </a:lnTo>
-                  <a:lnTo>
-                    <a:pt x="3151391" y="1973607"/>
-                  </a:lnTo>
-                  <a:lnTo>
-                    <a:pt x="3223013" y="1996101"/>
-                  </a:lnTo>
-                  <a:lnTo>
-                    <a:pt x="3294636" y="2017976"/>
-                  </a:lnTo>
-                  <a:lnTo>
-                    <a:pt x="3366258" y="2039248"/>
-                  </a:lnTo>
-                  <a:lnTo>
-                    <a:pt x="3437881" y="2059935"/>
-                  </a:lnTo>
-                  <a:lnTo>
-                    <a:pt x="3509503" y="2080052"/>
-                  </a:lnTo>
-                  <a:lnTo>
-                    <a:pt x="3581126" y="2099616"/>
-                  </a:lnTo>
-                  <a:lnTo>
-                    <a:pt x="3652748" y="2118641"/>
-                  </a:lnTo>
-                  <a:lnTo>
-                    <a:pt x="3724371" y="2137142"/>
-                  </a:lnTo>
-                  <a:lnTo>
-                    <a:pt x="3795993" y="2155134"/>
-                  </a:lnTo>
-                  <a:lnTo>
-                    <a:pt x="3867616" y="2172630"/>
-                  </a:lnTo>
-                  <a:lnTo>
-                    <a:pt x="3939238" y="2189645"/>
-                  </a:lnTo>
-                  <a:lnTo>
-                    <a:pt x="4010861" y="2206191"/>
-                  </a:lnTo>
-                  <a:lnTo>
-                    <a:pt x="4082483" y="2222282"/>
-                  </a:lnTo>
-                  <a:lnTo>
-                    <a:pt x="4154106" y="2237930"/>
-                  </a:lnTo>
-                  <a:lnTo>
-                    <a:pt x="4225729" y="2253147"/>
-                  </a:lnTo>
-                  <a:lnTo>
-                    <a:pt x="4297351" y="2267945"/>
-                  </a:lnTo>
-                  <a:lnTo>
-                    <a:pt x="4368974" y="2282336"/>
-                  </a:lnTo>
-                  <a:lnTo>
-                    <a:pt x="4440596" y="2296330"/>
-                  </a:lnTo>
-                  <a:lnTo>
-                    <a:pt x="4512219" y="2309940"/>
-                  </a:lnTo>
-                  <a:lnTo>
-                    <a:pt x="4583841" y="2323174"/>
-                  </a:lnTo>
-                  <a:lnTo>
-                    <a:pt x="4655464" y="2336044"/>
-                  </a:lnTo>
-                  <a:lnTo>
-                    <a:pt x="4727086" y="2348560"/>
-                  </a:lnTo>
-                  <a:lnTo>
-                    <a:pt x="4798709" y="2360732"/>
-                  </a:lnTo>
-                  <a:lnTo>
-                    <a:pt x="4870331" y="2372568"/>
-                  </a:lnTo>
-                  <a:lnTo>
-                    <a:pt x="4941954" y="2384078"/>
-                  </a:lnTo>
-                  <a:lnTo>
-                    <a:pt x="5013576" y="2395272"/>
-                  </a:lnTo>
-                  <a:lnTo>
-                    <a:pt x="5085199" y="2406157"/>
-                  </a:lnTo>
-                  <a:lnTo>
-                    <a:pt x="5156821" y="2416743"/>
-                  </a:lnTo>
-                  <a:lnTo>
-                    <a:pt x="5228444" y="2427037"/>
-                  </a:lnTo>
-                  <a:lnTo>
-                    <a:pt x="5300066" y="2437048"/>
-                  </a:lnTo>
-                  <a:lnTo>
-                    <a:pt x="5371689" y="2446783"/>
-                  </a:lnTo>
-                  <a:lnTo>
-                    <a:pt x="5443311" y="2456251"/>
-                  </a:lnTo>
-                  <a:lnTo>
-                    <a:pt x="5514934" y="2465457"/>
-                  </a:lnTo>
-                  <a:lnTo>
-                    <a:pt x="5586557" y="2474410"/>
-                  </a:lnTo>
-                  <a:lnTo>
-                    <a:pt x="5658179" y="2483117"/>
-                  </a:lnTo>
-                  <a:lnTo>
-                    <a:pt x="5729802" y="2491584"/>
-                  </a:lnTo>
-                  <a:lnTo>
-                    <a:pt x="5801424" y="2499818"/>
-                  </a:lnTo>
-                  <a:lnTo>
-                    <a:pt x="5873047" y="2507825"/>
-                  </a:lnTo>
-                  <a:lnTo>
-                    <a:pt x="5944669" y="2515612"/>
-                  </a:lnTo>
-                  <a:lnTo>
-                    <a:pt x="6016292" y="2523184"/>
-                  </a:lnTo>
-                  <a:lnTo>
-                    <a:pt x="6087914" y="2530548"/>
-                  </a:lnTo>
-                  <a:lnTo>
-                    <a:pt x="6159537" y="2537709"/>
-                  </a:lnTo>
-                  <a:lnTo>
-                    <a:pt x="6231159" y="2544673"/>
-                  </a:lnTo>
-                  <a:lnTo>
-                    <a:pt x="6302782" y="2551445"/>
-                  </a:lnTo>
-                  <a:lnTo>
-                    <a:pt x="6374404" y="2558031"/>
-                  </a:lnTo>
-                  <a:lnTo>
-                    <a:pt x="6446027" y="2564436"/>
-                  </a:lnTo>
-                  <a:lnTo>
-                    <a:pt x="6517649" y="2570664"/>
-                  </a:lnTo>
-                  <a:lnTo>
-                    <a:pt x="6589272" y="2576721"/>
-                  </a:lnTo>
-                  <a:lnTo>
-                    <a:pt x="6660894" y="2582611"/>
-                  </a:lnTo>
-                  <a:lnTo>
-                    <a:pt x="6732517" y="2588338"/>
-                  </a:lnTo>
-                  <a:lnTo>
-                    <a:pt x="6804139" y="2593909"/>
-                  </a:lnTo>
-                  <a:lnTo>
-                    <a:pt x="6875762" y="2599325"/>
-                  </a:lnTo>
-                  <a:lnTo>
-                    <a:pt x="6947385" y="2604593"/>
-                  </a:lnTo>
-                  <a:lnTo>
-                    <a:pt x="7019007" y="2609716"/>
-                  </a:lnTo>
-                  <a:lnTo>
-                    <a:pt x="7090630" y="2614697"/>
+                    <a:pt x="70344" y="27725"/>
+                  </a:lnTo>
+                  <a:lnTo>
+                    <a:pt x="140688" y="54687"/>
+                  </a:lnTo>
+                  <a:lnTo>
+                    <a:pt x="211033" y="80907"/>
+                  </a:lnTo>
+                  <a:lnTo>
+                    <a:pt x="281377" y="106405"/>
+                  </a:lnTo>
+                  <a:lnTo>
+                    <a:pt x="351722" y="131201"/>
+                  </a:lnTo>
+                  <a:lnTo>
+                    <a:pt x="422066" y="155315"/>
+                  </a:lnTo>
+                  <a:lnTo>
+                    <a:pt x="492411" y="178764"/>
+                  </a:lnTo>
+                  <a:lnTo>
+                    <a:pt x="562755" y="201568"/>
+                  </a:lnTo>
+                  <a:lnTo>
+                    <a:pt x="633100" y="223745"/>
+                  </a:lnTo>
+                  <a:lnTo>
+                    <a:pt x="703444" y="245310"/>
+                  </a:lnTo>
+                  <a:lnTo>
+                    <a:pt x="773789" y="266282"/>
+                  </a:lnTo>
+                  <a:lnTo>
+                    <a:pt x="844133" y="286677"/>
+                  </a:lnTo>
+                  <a:lnTo>
+                    <a:pt x="914478" y="306510"/>
+                  </a:lnTo>
+                  <a:lnTo>
+                    <a:pt x="984822" y="325797"/>
+                  </a:lnTo>
+                  <a:lnTo>
+                    <a:pt x="1055167" y="344553"/>
+                  </a:lnTo>
+                  <a:lnTo>
+                    <a:pt x="1125511" y="362793"/>
+                  </a:lnTo>
+                  <a:lnTo>
+                    <a:pt x="1195856" y="380531"/>
+                  </a:lnTo>
+                  <a:lnTo>
+                    <a:pt x="1266200" y="397780"/>
+                  </a:lnTo>
+                  <a:lnTo>
+                    <a:pt x="1336545" y="414554"/>
+                  </a:lnTo>
+                  <a:lnTo>
+                    <a:pt x="1406889" y="430867"/>
+                  </a:lnTo>
+                  <a:lnTo>
+                    <a:pt x="1477234" y="446730"/>
+                  </a:lnTo>
+                  <a:lnTo>
+                    <a:pt x="1547578" y="462157"/>
+                  </a:lnTo>
+                  <a:lnTo>
+                    <a:pt x="1617923" y="477159"/>
+                  </a:lnTo>
+                  <a:lnTo>
+                    <a:pt x="1688267" y="491748"/>
+                  </a:lnTo>
+                  <a:lnTo>
+                    <a:pt x="1758612" y="505936"/>
+                  </a:lnTo>
+                  <a:lnTo>
+                    <a:pt x="1828956" y="519733"/>
+                  </a:lnTo>
+                  <a:lnTo>
+                    <a:pt x="1899301" y="533150"/>
+                  </a:lnTo>
+                  <a:lnTo>
+                    <a:pt x="1969645" y="546197"/>
+                  </a:lnTo>
+                  <a:lnTo>
+                    <a:pt x="2039990" y="558886"/>
+                  </a:lnTo>
+                  <a:lnTo>
+                    <a:pt x="2110334" y="571225"/>
+                  </a:lnTo>
+                  <a:lnTo>
+                    <a:pt x="2180679" y="583224"/>
+                  </a:lnTo>
+                  <a:lnTo>
+                    <a:pt x="2251023" y="594893"/>
+                  </a:lnTo>
+                  <a:lnTo>
+                    <a:pt x="2321368" y="606241"/>
+                  </a:lnTo>
+                  <a:lnTo>
+                    <a:pt x="2391712" y="617277"/>
+                  </a:lnTo>
+                  <a:lnTo>
+                    <a:pt x="2462057" y="628008"/>
+                  </a:lnTo>
+                  <a:lnTo>
+                    <a:pt x="2532401" y="638444"/>
+                  </a:lnTo>
+                  <a:lnTo>
+                    <a:pt x="2602746" y="648593"/>
+                  </a:lnTo>
+                  <a:lnTo>
+                    <a:pt x="2673090" y="658463"/>
+                  </a:lnTo>
+                  <a:lnTo>
+                    <a:pt x="2743435" y="668060"/>
+                  </a:lnTo>
+                  <a:lnTo>
+                    <a:pt x="2813779" y="677394"/>
+                  </a:lnTo>
+                  <a:lnTo>
+                    <a:pt x="2884124" y="686470"/>
+                  </a:lnTo>
+                  <a:lnTo>
+                    <a:pt x="2954468" y="695297"/>
+                  </a:lnTo>
+                  <a:lnTo>
+                    <a:pt x="3024813" y="703881"/>
+                  </a:lnTo>
+                  <a:lnTo>
+                    <a:pt x="3095157" y="712228"/>
+                  </a:lnTo>
+                  <a:lnTo>
+                    <a:pt x="3165502" y="720346"/>
+                  </a:lnTo>
+                  <a:lnTo>
+                    <a:pt x="3235846" y="728240"/>
+                  </a:lnTo>
+                  <a:lnTo>
+                    <a:pt x="3306191" y="735916"/>
+                  </a:lnTo>
+                  <a:lnTo>
+                    <a:pt x="3376535" y="743382"/>
+                  </a:lnTo>
+                  <a:lnTo>
+                    <a:pt x="3446880" y="750642"/>
+                  </a:lnTo>
+                  <a:lnTo>
+                    <a:pt x="3517224" y="757702"/>
+                  </a:lnTo>
+                  <a:lnTo>
+                    <a:pt x="3587569" y="764567"/>
+                  </a:lnTo>
+                  <a:lnTo>
+                    <a:pt x="3657913" y="771244"/>
+                  </a:lnTo>
+                  <a:lnTo>
+                    <a:pt x="3728257" y="777737"/>
+                  </a:lnTo>
+                  <a:lnTo>
+                    <a:pt x="3798602" y="784051"/>
+                  </a:lnTo>
+                  <a:lnTo>
+                    <a:pt x="3868946" y="790191"/>
+                  </a:lnTo>
+                  <a:lnTo>
+                    <a:pt x="3939291" y="796162"/>
+                  </a:lnTo>
+                  <a:lnTo>
+                    <a:pt x="4009635" y="801969"/>
+                  </a:lnTo>
+                  <a:lnTo>
+                    <a:pt x="4079980" y="807616"/>
+                  </a:lnTo>
+                  <a:lnTo>
+                    <a:pt x="4150324" y="813107"/>
+                  </a:lnTo>
+                  <a:lnTo>
+                    <a:pt x="4220669" y="818448"/>
+                  </a:lnTo>
+                  <a:lnTo>
+                    <a:pt x="4291013" y="823641"/>
+                  </a:lnTo>
+                  <a:lnTo>
+                    <a:pt x="4361358" y="828691"/>
+                  </a:lnTo>
+                  <a:lnTo>
+                    <a:pt x="4431702" y="833603"/>
+                  </a:lnTo>
+                  <a:lnTo>
+                    <a:pt x="4502047" y="838379"/>
+                  </a:lnTo>
+                  <a:lnTo>
+                    <a:pt x="4572391" y="843023"/>
+                  </a:lnTo>
+                  <a:lnTo>
+                    <a:pt x="4642736" y="847540"/>
+                  </a:lnTo>
+                  <a:lnTo>
+                    <a:pt x="4713080" y="851932"/>
+                  </a:lnTo>
+                  <a:lnTo>
+                    <a:pt x="4783425" y="856204"/>
+                  </a:lnTo>
+                  <a:lnTo>
+                    <a:pt x="4853769" y="860357"/>
+                  </a:lnTo>
+                  <a:lnTo>
+                    <a:pt x="4924114" y="864397"/>
+                  </a:lnTo>
+                  <a:lnTo>
+                    <a:pt x="4994458" y="868325"/>
+                  </a:lnTo>
+                  <a:lnTo>
+                    <a:pt x="5064803" y="872145"/>
+                  </a:lnTo>
+                  <a:lnTo>
+                    <a:pt x="5135147" y="875860"/>
+                  </a:lnTo>
+                  <a:lnTo>
+                    <a:pt x="5205492" y="879473"/>
+                  </a:lnTo>
+                  <a:lnTo>
+                    <a:pt x="5275836" y="882986"/>
+                  </a:lnTo>
+                  <a:lnTo>
+                    <a:pt x="5346181" y="886403"/>
+                  </a:lnTo>
+                  <a:lnTo>
+                    <a:pt x="5416525" y="889725"/>
+                  </a:lnTo>
+                  <a:lnTo>
+                    <a:pt x="5486870" y="892956"/>
+                  </a:lnTo>
+                  <a:lnTo>
+                    <a:pt x="5557214" y="896098"/>
+                  </a:lnTo>
+                  <a:lnTo>
+                    <a:pt x="5627559" y="899154"/>
+                  </a:lnTo>
+                  <a:lnTo>
+                    <a:pt x="5697903" y="902125"/>
+                  </a:lnTo>
+                  <a:lnTo>
+                    <a:pt x="5768248" y="905015"/>
+                  </a:lnTo>
+                  <a:lnTo>
+                    <a:pt x="5838592" y="907825"/>
+                  </a:lnTo>
+                  <a:lnTo>
+                    <a:pt x="5908937" y="910557"/>
+                  </a:lnTo>
+                  <a:lnTo>
+                    <a:pt x="5979281" y="913215"/>
+                  </a:lnTo>
+                  <a:lnTo>
+                    <a:pt x="6049626" y="915799"/>
+                  </a:lnTo>
+                  <a:lnTo>
+                    <a:pt x="6119970" y="918312"/>
+                  </a:lnTo>
+                  <a:lnTo>
+                    <a:pt x="6190315" y="920756"/>
+                  </a:lnTo>
+                  <a:lnTo>
+                    <a:pt x="6260659" y="923133"/>
+                  </a:lnTo>
+                  <a:lnTo>
+                    <a:pt x="6331004" y="925444"/>
+                  </a:lnTo>
+                  <a:lnTo>
+                    <a:pt x="6401348" y="927692"/>
+                  </a:lnTo>
+                  <a:lnTo>
+                    <a:pt x="6471693" y="929878"/>
+                  </a:lnTo>
+                  <a:lnTo>
+                    <a:pt x="6542037" y="932003"/>
+                  </a:lnTo>
+                  <a:lnTo>
+                    <a:pt x="6612382" y="934070"/>
+                  </a:lnTo>
+                  <a:lnTo>
+                    <a:pt x="6682726" y="936080"/>
+                  </a:lnTo>
+                  <a:lnTo>
+                    <a:pt x="6753071" y="938035"/>
+                  </a:lnTo>
+                  <a:lnTo>
+                    <a:pt x="6823415" y="939936"/>
+                  </a:lnTo>
+                  <a:lnTo>
+                    <a:pt x="6893760" y="941785"/>
+                  </a:lnTo>
+                  <a:lnTo>
+                    <a:pt x="6964104" y="943582"/>
                   </a:lnTo>
                 </a:path>
               </a:pathLst>
@@ -4618,27 +4653,27 @@
         </p:sp>
         <p:sp>
           <p:nvSpPr>
-            <p:cNvPr id="26" name="pl26"/>
+            <p:cNvPr id="27" name="pl27"/>
             <p:cNvSpPr/>
             <p:nvPr/>
           </p:nvSpPr>
           <p:spPr>
             <a:xfrm>
-              <a:off x="817517" y="4727786"/>
-              <a:ext cx="7799693" cy="0"/>
+              <a:off x="887106" y="3100960"/>
+              <a:ext cx="7660515" cy="0"/>
             </a:xfrm>
             <a:custGeom>
               <a:avLst/>
               <a:pathLst>
-                <a:path w="7799693" h="0">
+                <a:path w="7660515" h="0">
                   <a:moveTo>
                     <a:pt x="0" y="0"/>
                   </a:moveTo>
                   <a:lnTo>
-                    <a:pt x="7799693" y="0"/>
-                  </a:lnTo>
-                  <a:lnTo>
-                    <a:pt x="7799693" y="0"/>
+                    <a:pt x="7660515" y="0"/>
+                  </a:lnTo>
+                  <a:lnTo>
+                    <a:pt x="7660515" y="0"/>
                   </a:lnTo>
                 </a:path>
               </a:pathLst>
@@ -4661,21 +4696,21 @@
         </p:sp>
         <p:sp>
           <p:nvSpPr>
-            <p:cNvPr id="27" name="pl27"/>
+            <p:cNvPr id="28" name="pl28"/>
             <p:cNvSpPr/>
             <p:nvPr/>
           </p:nvSpPr>
           <p:spPr>
             <a:xfrm>
-              <a:off x="4284781" y="2073503"/>
-              <a:ext cx="0" cy="3649639"/>
+              <a:off x="4292500" y="2143092"/>
+              <a:ext cx="0" cy="1317069"/>
             </a:xfrm>
             <a:custGeom>
               <a:avLst/>
               <a:pathLst>
-                <a:path w="0" h="3649639">
+                <a:path w="0" h="1317069">
                   <a:moveTo>
-                    <a:pt x="0" y="3649639"/>
+                    <a:pt x="0" y="1317069"/>
                   </a:moveTo>
                   <a:lnTo>
                     <a:pt x="0" y="0"/>
@@ -4704,21 +4739,21 @@
         </p:sp>
         <p:sp>
           <p:nvSpPr>
-            <p:cNvPr id="28" name="pl28"/>
+            <p:cNvPr id="29" name="pl29"/>
             <p:cNvSpPr/>
             <p:nvPr/>
           </p:nvSpPr>
           <p:spPr>
             <a:xfrm>
-              <a:off x="3095906" y="2073503"/>
-              <a:ext cx="0" cy="3649639"/>
+              <a:off x="3124839" y="2143092"/>
+              <a:ext cx="0" cy="1317069"/>
             </a:xfrm>
             <a:custGeom>
               <a:avLst/>
               <a:pathLst>
-                <a:path w="0" h="3649639">
+                <a:path w="0" h="1317069">
                   <a:moveTo>
-                    <a:pt x="0" y="3649639"/>
+                    <a:pt x="0" y="1317069"/>
                   </a:moveTo>
                   <a:lnTo>
                     <a:pt x="0" y="0"/>
@@ -4747,21 +4782,21 @@
         </p:sp>
         <p:sp>
           <p:nvSpPr>
-            <p:cNvPr id="29" name="pl29"/>
+            <p:cNvPr id="30" name="pl30"/>
             <p:cNvSpPr/>
             <p:nvPr/>
           </p:nvSpPr>
           <p:spPr>
             <a:xfrm>
-              <a:off x="5522967" y="2073503"/>
-              <a:ext cx="0" cy="3649639"/>
+              <a:off x="5508592" y="2143092"/>
+              <a:ext cx="0" cy="1317069"/>
             </a:xfrm>
             <a:custGeom>
               <a:avLst/>
               <a:pathLst>
-                <a:path w="0" h="3649639">
+                <a:path w="0" h="1317069">
                   <a:moveTo>
-                    <a:pt x="0" y="3649639"/>
+                    <a:pt x="0" y="1317069"/>
                   </a:moveTo>
                   <a:lnTo>
                     <a:pt x="0" y="0"/>
@@ -4790,13 +4825,13 @@
         </p:sp>
         <p:sp>
           <p:nvSpPr>
-            <p:cNvPr id="30" name="tx30"/>
+            <p:cNvPr id="31" name="tx31"/>
             <p:cNvSpPr/>
             <p:nvPr/>
           </p:nvSpPr>
           <p:spPr>
             <a:xfrm>
-              <a:off x="692708" y="5517199"/>
+              <a:off x="762297" y="3360243"/>
               <a:ext cx="62179" cy="80101"/>
             </a:xfrm>
             <a:prstGeom prst="rect">
@@ -4836,13 +4871,13 @@
         </p:sp>
         <p:sp>
           <p:nvSpPr>
-            <p:cNvPr id="31" name="tx31"/>
+            <p:cNvPr id="32" name="tx32"/>
             <p:cNvSpPr/>
             <p:nvPr/>
           </p:nvSpPr>
           <p:spPr>
             <a:xfrm>
-              <a:off x="692708" y="4687735"/>
+              <a:off x="762297" y="3060909"/>
               <a:ext cx="62179" cy="80101"/>
             </a:xfrm>
             <a:prstGeom prst="rect">
@@ -4882,13 +4917,13 @@
         </p:sp>
         <p:sp>
           <p:nvSpPr>
-            <p:cNvPr id="32" name="tx32"/>
+            <p:cNvPr id="33" name="tx33"/>
             <p:cNvSpPr/>
             <p:nvPr/>
           </p:nvSpPr>
           <p:spPr>
             <a:xfrm>
-              <a:off x="692708" y="3858272"/>
+              <a:off x="762297" y="2761575"/>
               <a:ext cx="62179" cy="80101"/>
             </a:xfrm>
             <a:prstGeom prst="rect">
@@ -4928,13 +4963,13 @@
         </p:sp>
         <p:sp>
           <p:nvSpPr>
-            <p:cNvPr id="33" name="tx33"/>
+            <p:cNvPr id="34" name="tx34"/>
             <p:cNvSpPr/>
             <p:nvPr/>
           </p:nvSpPr>
           <p:spPr>
             <a:xfrm>
-              <a:off x="692708" y="3028808"/>
+              <a:off x="762297" y="2462242"/>
               <a:ext cx="62179" cy="80101"/>
             </a:xfrm>
             <a:prstGeom prst="rect">
@@ -4974,13 +5009,13 @@
         </p:sp>
         <p:sp>
           <p:nvSpPr>
-            <p:cNvPr id="34" name="tx34"/>
+            <p:cNvPr id="35" name="tx35"/>
             <p:cNvSpPr/>
             <p:nvPr/>
           </p:nvSpPr>
           <p:spPr>
             <a:xfrm>
-              <a:off x="692708" y="2199345"/>
+              <a:off x="762297" y="2162908"/>
               <a:ext cx="62179" cy="80101"/>
             </a:xfrm>
             <a:prstGeom prst="rect">
@@ -5020,13 +5055,13 @@
         </p:sp>
         <p:sp>
           <p:nvSpPr>
-            <p:cNvPr id="35" name="tx35"/>
+            <p:cNvPr id="36" name="tx36"/>
             <p:cNvSpPr/>
             <p:nvPr/>
           </p:nvSpPr>
           <p:spPr>
             <a:xfrm>
-              <a:off x="2152181" y="5785772"/>
+              <a:off x="2196512" y="3522791"/>
               <a:ext cx="161574" cy="80101"/>
             </a:xfrm>
             <a:prstGeom prst="rect">
@@ -5066,13 +5101,13 @@
         </p:sp>
         <p:sp>
           <p:nvSpPr>
-            <p:cNvPr id="36" name="tx36"/>
+            <p:cNvPr id="37" name="tx37"/>
             <p:cNvSpPr/>
             <p:nvPr/>
           </p:nvSpPr>
           <p:spPr>
             <a:xfrm>
-              <a:off x="3884104" y="5785772"/>
+              <a:off x="3897531" y="3522791"/>
               <a:ext cx="161574" cy="80101"/>
             </a:xfrm>
             <a:prstGeom prst="rect">
@@ -5112,13 +5147,13 @@
         </p:sp>
         <p:sp>
           <p:nvSpPr>
-            <p:cNvPr id="37" name="tx37"/>
+            <p:cNvPr id="38" name="tx38"/>
             <p:cNvSpPr/>
             <p:nvPr/>
           </p:nvSpPr>
           <p:spPr>
             <a:xfrm>
-              <a:off x="5665725" y="5785772"/>
+              <a:off x="5648248" y="3522791"/>
               <a:ext cx="62179" cy="80101"/>
             </a:xfrm>
             <a:prstGeom prst="rect">
@@ -5158,13 +5193,13 @@
         </p:sp>
         <p:sp>
           <p:nvSpPr>
-            <p:cNvPr id="38" name="tx38"/>
+            <p:cNvPr id="39" name="tx39"/>
             <p:cNvSpPr/>
             <p:nvPr/>
           </p:nvSpPr>
           <p:spPr>
             <a:xfrm>
-              <a:off x="7366559" y="5785772"/>
+              <a:off x="7318177" y="3522791"/>
               <a:ext cx="124358" cy="80101"/>
             </a:xfrm>
             <a:prstGeom prst="rect">
@@ -5204,13 +5239,13 @@
         </p:sp>
         <p:sp>
           <p:nvSpPr>
-            <p:cNvPr id="39" name="tx39"/>
+            <p:cNvPr id="40" name="tx40"/>
             <p:cNvSpPr/>
             <p:nvPr/>
           </p:nvSpPr>
           <p:spPr>
             <a:xfrm>
-              <a:off x="1561815" y="5925448"/>
+              <a:off x="1561815" y="3662467"/>
               <a:ext cx="6311097" cy="100218"/>
             </a:xfrm>
             <a:prstGeom prst="rect">
@@ -5250,13 +5285,13 @@
         </p:sp>
         <p:sp>
           <p:nvSpPr>
-            <p:cNvPr id="40" name="tx40"/>
+            <p:cNvPr id="41" name="tx41"/>
             <p:cNvSpPr/>
             <p:nvPr/>
           </p:nvSpPr>
           <p:spPr>
             <a:xfrm rot="-5400000">
-              <a:off x="68446" y="3848213"/>
+              <a:off x="138035" y="2751517"/>
               <a:ext cx="1016904" cy="100218"/>
             </a:xfrm>
             <a:prstGeom prst="rect">
@@ -5296,13 +5331,13 @@
         </p:sp>
         <p:sp>
           <p:nvSpPr>
-            <p:cNvPr id="41" name="tx41"/>
+            <p:cNvPr id="42" name="tx42"/>
             <p:cNvSpPr/>
             <p:nvPr/>
           </p:nvSpPr>
           <p:spPr>
             <a:xfrm>
-              <a:off x="817517" y="1896563"/>
+              <a:off x="887106" y="1966152"/>
               <a:ext cx="7026615" cy="82021"/>
             </a:xfrm>
             <a:prstGeom prst="rect">
@@ -5342,13 +5377,3753 @@
         </p:sp>
         <p:sp>
           <p:nvSpPr>
-            <p:cNvPr id="42" name="tx42"/>
+            <p:cNvPr id="43" name="tx43"/>
             <p:cNvSpPr/>
             <p:nvPr/>
           </p:nvSpPr>
           <p:spPr>
             <a:xfrm>
-              <a:off x="817517" y="1669789"/>
+              <a:off x="887106" y="1739378"/>
+              <a:ext cx="3668481" cy="120152"/>
+            </a:xfrm>
+            <a:prstGeom prst="rect">
+              <a:avLst/>
+            </a:prstGeom>
+            <a:noFill/>
+          </p:spPr>
+          <p:txBody>
+            <a:bodyPr lIns="0" rIns="0" tIns="0" bIns="0" anchorCtr="1" anchor="ctr" wrap="none"/>
+            <a:lstStyle/>
+            <a:p>
+              <a:pPr algn="l" marL="0" marR="0" indent="0">
+                <a:lnSpc>
+                  <a:spcPts val="1320"/>
+                </a:lnSpc>
+                <a:spcBef>
+                  <a:spcPts val="0"/>
+                </a:spcBef>
+                <a:spcAft>
+                  <a:spcPts val="0"/>
+                </a:spcAft>
+              </a:pPr>
+              <a:r>
+                <a:rPr sz="1320">
+                  <a:solidFill>
+                    <a:srgbClr val="000000">
+                      <a:alpha val="100000"/>
+                    </a:srgbClr>
+                  </a:solidFill>
+                  <a:latin typeface="Helvetica"/>
+                  <a:cs typeface="Helvetica"/>
+                </a:rPr>
+                <a:t>Composite Grade 3 AEs (Sensitivity, Carboplatin)</a:t>
+              </a:r>
+            </a:p>
+          </p:txBody>
+        </p:sp>
+        <p:sp>
+          <p:nvSpPr>
+            <p:cNvPr id="44" name="pl44"/>
+            <p:cNvSpPr/>
+            <p:nvPr/>
+          </p:nvSpPr>
+          <p:spPr>
+            <a:xfrm>
+              <a:off x="887106" y="5444019"/>
+              <a:ext cx="7660515" cy="0"/>
+            </a:xfrm>
+            <a:custGeom>
+              <a:avLst/>
+              <a:pathLst>
+                <a:path w="7660515" h="0">
+                  <a:moveTo>
+                    <a:pt x="0" y="0"/>
+                  </a:moveTo>
+                  <a:lnTo>
+                    <a:pt x="7660515" y="0"/>
+                  </a:lnTo>
+                  <a:lnTo>
+                    <a:pt x="7660515" y="0"/>
+                  </a:lnTo>
+                </a:path>
+              </a:pathLst>
+            </a:custGeom>
+            <a:ln w="6775" cap="flat">
+              <a:solidFill>
+                <a:srgbClr val="EBEBEB">
+                  <a:alpha val="100000"/>
+                </a:srgbClr>
+              </a:solidFill>
+              <a:prstDash val="solid"/>
+              <a:round/>
+            </a:ln>
+          </p:spPr>
+          <p:txBody>
+            <a:bodyPr/>
+            <a:lstStyle/>
+            <a:p/>
+          </p:txBody>
+        </p:sp>
+        <p:sp>
+          <p:nvSpPr>
+            <p:cNvPr id="45" name="pl45"/>
+            <p:cNvSpPr/>
+            <p:nvPr/>
+          </p:nvSpPr>
+          <p:spPr>
+            <a:xfrm>
+              <a:off x="887106" y="5144686"/>
+              <a:ext cx="7660515" cy="0"/>
+            </a:xfrm>
+            <a:custGeom>
+              <a:avLst/>
+              <a:pathLst>
+                <a:path w="7660515" h="0">
+                  <a:moveTo>
+                    <a:pt x="0" y="0"/>
+                  </a:moveTo>
+                  <a:lnTo>
+                    <a:pt x="7660515" y="0"/>
+                  </a:lnTo>
+                  <a:lnTo>
+                    <a:pt x="7660515" y="0"/>
+                  </a:lnTo>
+                </a:path>
+              </a:pathLst>
+            </a:custGeom>
+            <a:ln w="6775" cap="flat">
+              <a:solidFill>
+                <a:srgbClr val="EBEBEB">
+                  <a:alpha val="100000"/>
+                </a:srgbClr>
+              </a:solidFill>
+              <a:prstDash val="solid"/>
+              <a:round/>
+            </a:ln>
+          </p:spPr>
+          <p:txBody>
+            <a:bodyPr/>
+            <a:lstStyle/>
+            <a:p/>
+          </p:txBody>
+        </p:sp>
+        <p:sp>
+          <p:nvSpPr>
+            <p:cNvPr id="46" name="pl46"/>
+            <p:cNvSpPr/>
+            <p:nvPr/>
+          </p:nvSpPr>
+          <p:spPr>
+            <a:xfrm>
+              <a:off x="887106" y="4845352"/>
+              <a:ext cx="7660515" cy="0"/>
+            </a:xfrm>
+            <a:custGeom>
+              <a:avLst/>
+              <a:pathLst>
+                <a:path w="7660515" h="0">
+                  <a:moveTo>
+                    <a:pt x="0" y="0"/>
+                  </a:moveTo>
+                  <a:lnTo>
+                    <a:pt x="7660515" y="0"/>
+                  </a:lnTo>
+                  <a:lnTo>
+                    <a:pt x="7660515" y="0"/>
+                  </a:lnTo>
+                </a:path>
+              </a:pathLst>
+            </a:custGeom>
+            <a:ln w="6775" cap="flat">
+              <a:solidFill>
+                <a:srgbClr val="EBEBEB">
+                  <a:alpha val="100000"/>
+                </a:srgbClr>
+              </a:solidFill>
+              <a:prstDash val="solid"/>
+              <a:round/>
+            </a:ln>
+          </p:spPr>
+          <p:txBody>
+            <a:bodyPr/>
+            <a:lstStyle/>
+            <a:p/>
+          </p:txBody>
+        </p:sp>
+        <p:sp>
+          <p:nvSpPr>
+            <p:cNvPr id="47" name="pl47"/>
+            <p:cNvSpPr/>
+            <p:nvPr/>
+          </p:nvSpPr>
+          <p:spPr>
+            <a:xfrm>
+              <a:off x="887106" y="4546018"/>
+              <a:ext cx="7660515" cy="0"/>
+            </a:xfrm>
+            <a:custGeom>
+              <a:avLst/>
+              <a:pathLst>
+                <a:path w="7660515" h="0">
+                  <a:moveTo>
+                    <a:pt x="0" y="0"/>
+                  </a:moveTo>
+                  <a:lnTo>
+                    <a:pt x="7660515" y="0"/>
+                  </a:lnTo>
+                  <a:lnTo>
+                    <a:pt x="7660515" y="0"/>
+                  </a:lnTo>
+                </a:path>
+              </a:pathLst>
+            </a:custGeom>
+            <a:ln w="6775" cap="flat">
+              <a:solidFill>
+                <a:srgbClr val="EBEBEB">
+                  <a:alpha val="100000"/>
+                </a:srgbClr>
+              </a:solidFill>
+              <a:prstDash val="solid"/>
+              <a:round/>
+            </a:ln>
+          </p:spPr>
+          <p:txBody>
+            <a:bodyPr/>
+            <a:lstStyle/>
+            <a:p/>
+          </p:txBody>
+        </p:sp>
+        <p:sp>
+          <p:nvSpPr>
+            <p:cNvPr id="48" name="pl48"/>
+            <p:cNvSpPr/>
+            <p:nvPr/>
+          </p:nvSpPr>
+          <p:spPr>
+            <a:xfrm>
+              <a:off x="1001535" y="4336484"/>
+              <a:ext cx="0" cy="1317069"/>
+            </a:xfrm>
+            <a:custGeom>
+              <a:avLst/>
+              <a:pathLst>
+                <a:path w="0" h="1317069">
+                  <a:moveTo>
+                    <a:pt x="0" y="1317069"/>
+                  </a:moveTo>
+                  <a:lnTo>
+                    <a:pt x="0" y="0"/>
+                  </a:lnTo>
+                  <a:lnTo>
+                    <a:pt x="0" y="0"/>
+                  </a:lnTo>
+                </a:path>
+              </a:pathLst>
+            </a:custGeom>
+            <a:ln w="6775" cap="flat">
+              <a:solidFill>
+                <a:srgbClr val="EBEBEB">
+                  <a:alpha val="100000"/>
+                </a:srgbClr>
+              </a:solidFill>
+              <a:prstDash val="solid"/>
+              <a:round/>
+            </a:ln>
+          </p:spPr>
+          <p:txBody>
+            <a:bodyPr/>
+            <a:lstStyle/>
+            <a:p/>
+          </p:txBody>
+        </p:sp>
+        <p:sp>
+          <p:nvSpPr>
+            <p:cNvPr id="49" name="pl49"/>
+            <p:cNvSpPr/>
+            <p:nvPr/>
+          </p:nvSpPr>
+          <p:spPr>
+            <a:xfrm>
+              <a:off x="1852045" y="4336484"/>
+              <a:ext cx="0" cy="1317069"/>
+            </a:xfrm>
+            <a:custGeom>
+              <a:avLst/>
+              <a:pathLst>
+                <a:path w="0" h="1317069">
+                  <a:moveTo>
+                    <a:pt x="0" y="1317069"/>
+                  </a:moveTo>
+                  <a:lnTo>
+                    <a:pt x="0" y="0"/>
+                  </a:lnTo>
+                  <a:lnTo>
+                    <a:pt x="0" y="0"/>
+                  </a:lnTo>
+                </a:path>
+              </a:pathLst>
+            </a:custGeom>
+            <a:ln w="6775" cap="flat">
+              <a:solidFill>
+                <a:srgbClr val="EBEBEB">
+                  <a:alpha val="100000"/>
+                </a:srgbClr>
+              </a:solidFill>
+              <a:prstDash val="solid"/>
+              <a:round/>
+            </a:ln>
+          </p:spPr>
+          <p:txBody>
+            <a:bodyPr/>
+            <a:lstStyle/>
+            <a:p/>
+          </p:txBody>
+        </p:sp>
+        <p:sp>
+          <p:nvSpPr>
+            <p:cNvPr id="50" name="pl50"/>
+            <p:cNvSpPr/>
+            <p:nvPr/>
+          </p:nvSpPr>
+          <p:spPr>
+            <a:xfrm>
+              <a:off x="2702554" y="4336484"/>
+              <a:ext cx="0" cy="1317069"/>
+            </a:xfrm>
+            <a:custGeom>
+              <a:avLst/>
+              <a:pathLst>
+                <a:path w="0" h="1317069">
+                  <a:moveTo>
+                    <a:pt x="0" y="1317069"/>
+                  </a:moveTo>
+                  <a:lnTo>
+                    <a:pt x="0" y="0"/>
+                  </a:lnTo>
+                  <a:lnTo>
+                    <a:pt x="0" y="0"/>
+                  </a:lnTo>
+                </a:path>
+              </a:pathLst>
+            </a:custGeom>
+            <a:ln w="6775" cap="flat">
+              <a:solidFill>
+                <a:srgbClr val="EBEBEB">
+                  <a:alpha val="100000"/>
+                </a:srgbClr>
+              </a:solidFill>
+              <a:prstDash val="solid"/>
+              <a:round/>
+            </a:ln>
+          </p:spPr>
+          <p:txBody>
+            <a:bodyPr/>
+            <a:lstStyle/>
+            <a:p/>
+          </p:txBody>
+        </p:sp>
+        <p:sp>
+          <p:nvSpPr>
+            <p:cNvPr id="51" name="pl51"/>
+            <p:cNvSpPr/>
+            <p:nvPr/>
+          </p:nvSpPr>
+          <p:spPr>
+            <a:xfrm>
+              <a:off x="3553064" y="4336484"/>
+              <a:ext cx="0" cy="1317069"/>
+            </a:xfrm>
+            <a:custGeom>
+              <a:avLst/>
+              <a:pathLst>
+                <a:path w="0" h="1317069">
+                  <a:moveTo>
+                    <a:pt x="0" y="1317069"/>
+                  </a:moveTo>
+                  <a:lnTo>
+                    <a:pt x="0" y="0"/>
+                  </a:lnTo>
+                  <a:lnTo>
+                    <a:pt x="0" y="0"/>
+                  </a:lnTo>
+                </a:path>
+              </a:pathLst>
+            </a:custGeom>
+            <a:ln w="6775" cap="flat">
+              <a:solidFill>
+                <a:srgbClr val="EBEBEB">
+                  <a:alpha val="100000"/>
+                </a:srgbClr>
+              </a:solidFill>
+              <a:prstDash val="solid"/>
+              <a:round/>
+            </a:ln>
+          </p:spPr>
+          <p:txBody>
+            <a:bodyPr/>
+            <a:lstStyle/>
+            <a:p/>
+          </p:txBody>
+        </p:sp>
+        <p:sp>
+          <p:nvSpPr>
+            <p:cNvPr id="52" name="pl52"/>
+            <p:cNvSpPr/>
+            <p:nvPr/>
+          </p:nvSpPr>
+          <p:spPr>
+            <a:xfrm>
+              <a:off x="4403573" y="4336484"/>
+              <a:ext cx="0" cy="1317069"/>
+            </a:xfrm>
+            <a:custGeom>
+              <a:avLst/>
+              <a:pathLst>
+                <a:path w="0" h="1317069">
+                  <a:moveTo>
+                    <a:pt x="0" y="1317069"/>
+                  </a:moveTo>
+                  <a:lnTo>
+                    <a:pt x="0" y="0"/>
+                  </a:lnTo>
+                  <a:lnTo>
+                    <a:pt x="0" y="0"/>
+                  </a:lnTo>
+                </a:path>
+              </a:pathLst>
+            </a:custGeom>
+            <a:ln w="6775" cap="flat">
+              <a:solidFill>
+                <a:srgbClr val="EBEBEB">
+                  <a:alpha val="100000"/>
+                </a:srgbClr>
+              </a:solidFill>
+              <a:prstDash val="solid"/>
+              <a:round/>
+            </a:ln>
+          </p:spPr>
+          <p:txBody>
+            <a:bodyPr/>
+            <a:lstStyle/>
+            <a:p/>
+          </p:txBody>
+        </p:sp>
+        <p:sp>
+          <p:nvSpPr>
+            <p:cNvPr id="53" name="pl53"/>
+            <p:cNvSpPr/>
+            <p:nvPr/>
+          </p:nvSpPr>
+          <p:spPr>
+            <a:xfrm>
+              <a:off x="5254082" y="4336484"/>
+              <a:ext cx="0" cy="1317069"/>
+            </a:xfrm>
+            <a:custGeom>
+              <a:avLst/>
+              <a:pathLst>
+                <a:path w="0" h="1317069">
+                  <a:moveTo>
+                    <a:pt x="0" y="1317069"/>
+                  </a:moveTo>
+                  <a:lnTo>
+                    <a:pt x="0" y="0"/>
+                  </a:lnTo>
+                  <a:lnTo>
+                    <a:pt x="0" y="0"/>
+                  </a:lnTo>
+                </a:path>
+              </a:pathLst>
+            </a:custGeom>
+            <a:ln w="6775" cap="flat">
+              <a:solidFill>
+                <a:srgbClr val="EBEBEB">
+                  <a:alpha val="100000"/>
+                </a:srgbClr>
+              </a:solidFill>
+              <a:prstDash val="solid"/>
+              <a:round/>
+            </a:ln>
+          </p:spPr>
+          <p:txBody>
+            <a:bodyPr/>
+            <a:lstStyle/>
+            <a:p/>
+          </p:txBody>
+        </p:sp>
+        <p:sp>
+          <p:nvSpPr>
+            <p:cNvPr id="54" name="pl54"/>
+            <p:cNvSpPr/>
+            <p:nvPr/>
+          </p:nvSpPr>
+          <p:spPr>
+            <a:xfrm>
+              <a:off x="6104592" y="4336484"/>
+              <a:ext cx="0" cy="1317069"/>
+            </a:xfrm>
+            <a:custGeom>
+              <a:avLst/>
+              <a:pathLst>
+                <a:path w="0" h="1317069">
+                  <a:moveTo>
+                    <a:pt x="0" y="1317069"/>
+                  </a:moveTo>
+                  <a:lnTo>
+                    <a:pt x="0" y="0"/>
+                  </a:lnTo>
+                  <a:lnTo>
+                    <a:pt x="0" y="0"/>
+                  </a:lnTo>
+                </a:path>
+              </a:pathLst>
+            </a:custGeom>
+            <a:ln w="6775" cap="flat">
+              <a:solidFill>
+                <a:srgbClr val="EBEBEB">
+                  <a:alpha val="100000"/>
+                </a:srgbClr>
+              </a:solidFill>
+              <a:prstDash val="solid"/>
+              <a:round/>
+            </a:ln>
+          </p:spPr>
+          <p:txBody>
+            <a:bodyPr/>
+            <a:lstStyle/>
+            <a:p/>
+          </p:txBody>
+        </p:sp>
+        <p:sp>
+          <p:nvSpPr>
+            <p:cNvPr id="55" name="pl55"/>
+            <p:cNvSpPr/>
+            <p:nvPr/>
+          </p:nvSpPr>
+          <p:spPr>
+            <a:xfrm>
+              <a:off x="6955101" y="4336484"/>
+              <a:ext cx="0" cy="1317069"/>
+            </a:xfrm>
+            <a:custGeom>
+              <a:avLst/>
+              <a:pathLst>
+                <a:path w="0" h="1317069">
+                  <a:moveTo>
+                    <a:pt x="0" y="1317069"/>
+                  </a:moveTo>
+                  <a:lnTo>
+                    <a:pt x="0" y="0"/>
+                  </a:lnTo>
+                  <a:lnTo>
+                    <a:pt x="0" y="0"/>
+                  </a:lnTo>
+                </a:path>
+              </a:pathLst>
+            </a:custGeom>
+            <a:ln w="6775" cap="flat">
+              <a:solidFill>
+                <a:srgbClr val="EBEBEB">
+                  <a:alpha val="100000"/>
+                </a:srgbClr>
+              </a:solidFill>
+              <a:prstDash val="solid"/>
+              <a:round/>
+            </a:ln>
+          </p:spPr>
+          <p:txBody>
+            <a:bodyPr/>
+            <a:lstStyle/>
+            <a:p/>
+          </p:txBody>
+        </p:sp>
+        <p:sp>
+          <p:nvSpPr>
+            <p:cNvPr id="56" name="pl56"/>
+            <p:cNvSpPr/>
+            <p:nvPr/>
+          </p:nvSpPr>
+          <p:spPr>
+            <a:xfrm>
+              <a:off x="7805611" y="4336484"/>
+              <a:ext cx="0" cy="1317069"/>
+            </a:xfrm>
+            <a:custGeom>
+              <a:avLst/>
+              <a:pathLst>
+                <a:path w="0" h="1317069">
+                  <a:moveTo>
+                    <a:pt x="0" y="1317069"/>
+                  </a:moveTo>
+                  <a:lnTo>
+                    <a:pt x="0" y="0"/>
+                  </a:lnTo>
+                  <a:lnTo>
+                    <a:pt x="0" y="0"/>
+                  </a:lnTo>
+                </a:path>
+              </a:pathLst>
+            </a:custGeom>
+            <a:ln w="6775" cap="flat">
+              <a:solidFill>
+                <a:srgbClr val="EBEBEB">
+                  <a:alpha val="100000"/>
+                </a:srgbClr>
+              </a:solidFill>
+              <a:prstDash val="solid"/>
+              <a:round/>
+            </a:ln>
+          </p:spPr>
+          <p:txBody>
+            <a:bodyPr/>
+            <a:lstStyle/>
+            <a:p/>
+          </p:txBody>
+        </p:sp>
+        <p:sp>
+          <p:nvSpPr>
+            <p:cNvPr id="57" name="pl57"/>
+            <p:cNvSpPr/>
+            <p:nvPr/>
+          </p:nvSpPr>
+          <p:spPr>
+            <a:xfrm>
+              <a:off x="887106" y="5593686"/>
+              <a:ext cx="7660515" cy="0"/>
+            </a:xfrm>
+            <a:custGeom>
+              <a:avLst/>
+              <a:pathLst>
+                <a:path w="7660515" h="0">
+                  <a:moveTo>
+                    <a:pt x="0" y="0"/>
+                  </a:moveTo>
+                  <a:lnTo>
+                    <a:pt x="7660515" y="0"/>
+                  </a:lnTo>
+                  <a:lnTo>
+                    <a:pt x="7660515" y="0"/>
+                  </a:lnTo>
+                </a:path>
+              </a:pathLst>
+            </a:custGeom>
+            <a:ln w="13550" cap="flat">
+              <a:solidFill>
+                <a:srgbClr val="EBEBEB">
+                  <a:alpha val="100000"/>
+                </a:srgbClr>
+              </a:solidFill>
+              <a:prstDash val="solid"/>
+              <a:round/>
+            </a:ln>
+          </p:spPr>
+          <p:txBody>
+            <a:bodyPr/>
+            <a:lstStyle/>
+            <a:p/>
+          </p:txBody>
+        </p:sp>
+        <p:sp>
+          <p:nvSpPr>
+            <p:cNvPr id="58" name="pl58"/>
+            <p:cNvSpPr/>
+            <p:nvPr/>
+          </p:nvSpPr>
+          <p:spPr>
+            <a:xfrm>
+              <a:off x="887106" y="5294352"/>
+              <a:ext cx="7660515" cy="0"/>
+            </a:xfrm>
+            <a:custGeom>
+              <a:avLst/>
+              <a:pathLst>
+                <a:path w="7660515" h="0">
+                  <a:moveTo>
+                    <a:pt x="0" y="0"/>
+                  </a:moveTo>
+                  <a:lnTo>
+                    <a:pt x="7660515" y="0"/>
+                  </a:lnTo>
+                  <a:lnTo>
+                    <a:pt x="7660515" y="0"/>
+                  </a:lnTo>
+                </a:path>
+              </a:pathLst>
+            </a:custGeom>
+            <a:ln w="13550" cap="flat">
+              <a:solidFill>
+                <a:srgbClr val="EBEBEB">
+                  <a:alpha val="100000"/>
+                </a:srgbClr>
+              </a:solidFill>
+              <a:prstDash val="solid"/>
+              <a:round/>
+            </a:ln>
+          </p:spPr>
+          <p:txBody>
+            <a:bodyPr/>
+            <a:lstStyle/>
+            <a:p/>
+          </p:txBody>
+        </p:sp>
+        <p:sp>
+          <p:nvSpPr>
+            <p:cNvPr id="59" name="pl59"/>
+            <p:cNvSpPr/>
+            <p:nvPr/>
+          </p:nvSpPr>
+          <p:spPr>
+            <a:xfrm>
+              <a:off x="887106" y="4995019"/>
+              <a:ext cx="7660515" cy="0"/>
+            </a:xfrm>
+            <a:custGeom>
+              <a:avLst/>
+              <a:pathLst>
+                <a:path w="7660515" h="0">
+                  <a:moveTo>
+                    <a:pt x="0" y="0"/>
+                  </a:moveTo>
+                  <a:lnTo>
+                    <a:pt x="7660515" y="0"/>
+                  </a:lnTo>
+                  <a:lnTo>
+                    <a:pt x="7660515" y="0"/>
+                  </a:lnTo>
+                </a:path>
+              </a:pathLst>
+            </a:custGeom>
+            <a:ln w="13550" cap="flat">
+              <a:solidFill>
+                <a:srgbClr val="EBEBEB">
+                  <a:alpha val="100000"/>
+                </a:srgbClr>
+              </a:solidFill>
+              <a:prstDash val="solid"/>
+              <a:round/>
+            </a:ln>
+          </p:spPr>
+          <p:txBody>
+            <a:bodyPr/>
+            <a:lstStyle/>
+            <a:p/>
+          </p:txBody>
+        </p:sp>
+        <p:sp>
+          <p:nvSpPr>
+            <p:cNvPr id="60" name="pl60"/>
+            <p:cNvSpPr/>
+            <p:nvPr/>
+          </p:nvSpPr>
+          <p:spPr>
+            <a:xfrm>
+              <a:off x="887106" y="4695685"/>
+              <a:ext cx="7660515" cy="0"/>
+            </a:xfrm>
+            <a:custGeom>
+              <a:avLst/>
+              <a:pathLst>
+                <a:path w="7660515" h="0">
+                  <a:moveTo>
+                    <a:pt x="0" y="0"/>
+                  </a:moveTo>
+                  <a:lnTo>
+                    <a:pt x="7660515" y="0"/>
+                  </a:lnTo>
+                  <a:lnTo>
+                    <a:pt x="7660515" y="0"/>
+                  </a:lnTo>
+                </a:path>
+              </a:pathLst>
+            </a:custGeom>
+            <a:ln w="13550" cap="flat">
+              <a:solidFill>
+                <a:srgbClr val="EBEBEB">
+                  <a:alpha val="100000"/>
+                </a:srgbClr>
+              </a:solidFill>
+              <a:prstDash val="solid"/>
+              <a:round/>
+            </a:ln>
+          </p:spPr>
+          <p:txBody>
+            <a:bodyPr/>
+            <a:lstStyle/>
+            <a:p/>
+          </p:txBody>
+        </p:sp>
+        <p:sp>
+          <p:nvSpPr>
+            <p:cNvPr id="61" name="pl61"/>
+            <p:cNvSpPr/>
+            <p:nvPr/>
+          </p:nvSpPr>
+          <p:spPr>
+            <a:xfrm>
+              <a:off x="887106" y="4396351"/>
+              <a:ext cx="7660515" cy="0"/>
+            </a:xfrm>
+            <a:custGeom>
+              <a:avLst/>
+              <a:pathLst>
+                <a:path w="7660515" h="0">
+                  <a:moveTo>
+                    <a:pt x="0" y="0"/>
+                  </a:moveTo>
+                  <a:lnTo>
+                    <a:pt x="7660515" y="0"/>
+                  </a:lnTo>
+                  <a:lnTo>
+                    <a:pt x="7660515" y="0"/>
+                  </a:lnTo>
+                </a:path>
+              </a:pathLst>
+            </a:custGeom>
+            <a:ln w="13550" cap="flat">
+              <a:solidFill>
+                <a:srgbClr val="EBEBEB">
+                  <a:alpha val="100000"/>
+                </a:srgbClr>
+              </a:solidFill>
+              <a:prstDash val="solid"/>
+              <a:round/>
+            </a:ln>
+          </p:spPr>
+          <p:txBody>
+            <a:bodyPr/>
+            <a:lstStyle/>
+            <a:p/>
+          </p:txBody>
+        </p:sp>
+        <p:sp>
+          <p:nvSpPr>
+            <p:cNvPr id="62" name="pl62"/>
+            <p:cNvSpPr/>
+            <p:nvPr/>
+          </p:nvSpPr>
+          <p:spPr>
+            <a:xfrm>
+              <a:off x="1426790" y="4336484"/>
+              <a:ext cx="0" cy="1317069"/>
+            </a:xfrm>
+            <a:custGeom>
+              <a:avLst/>
+              <a:pathLst>
+                <a:path w="0" h="1317069">
+                  <a:moveTo>
+                    <a:pt x="0" y="1317069"/>
+                  </a:moveTo>
+                  <a:lnTo>
+                    <a:pt x="0" y="0"/>
+                  </a:lnTo>
+                  <a:lnTo>
+                    <a:pt x="0" y="0"/>
+                  </a:lnTo>
+                </a:path>
+              </a:pathLst>
+            </a:custGeom>
+            <a:ln w="13550" cap="flat">
+              <a:solidFill>
+                <a:srgbClr val="EBEBEB">
+                  <a:alpha val="100000"/>
+                </a:srgbClr>
+              </a:solidFill>
+              <a:prstDash val="solid"/>
+              <a:round/>
+            </a:ln>
+          </p:spPr>
+          <p:txBody>
+            <a:bodyPr/>
+            <a:lstStyle/>
+            <a:p/>
+          </p:txBody>
+        </p:sp>
+        <p:sp>
+          <p:nvSpPr>
+            <p:cNvPr id="63" name="pl63"/>
+            <p:cNvSpPr/>
+            <p:nvPr/>
+          </p:nvSpPr>
+          <p:spPr>
+            <a:xfrm>
+              <a:off x="2277299" y="4336484"/>
+              <a:ext cx="0" cy="1317069"/>
+            </a:xfrm>
+            <a:custGeom>
+              <a:avLst/>
+              <a:pathLst>
+                <a:path w="0" h="1317069">
+                  <a:moveTo>
+                    <a:pt x="0" y="1317069"/>
+                  </a:moveTo>
+                  <a:lnTo>
+                    <a:pt x="0" y="0"/>
+                  </a:lnTo>
+                  <a:lnTo>
+                    <a:pt x="0" y="0"/>
+                  </a:lnTo>
+                </a:path>
+              </a:pathLst>
+            </a:custGeom>
+            <a:ln w="13550" cap="flat">
+              <a:solidFill>
+                <a:srgbClr val="EBEBEB">
+                  <a:alpha val="100000"/>
+                </a:srgbClr>
+              </a:solidFill>
+              <a:prstDash val="solid"/>
+              <a:round/>
+            </a:ln>
+          </p:spPr>
+          <p:txBody>
+            <a:bodyPr/>
+            <a:lstStyle/>
+            <a:p/>
+          </p:txBody>
+        </p:sp>
+        <p:sp>
+          <p:nvSpPr>
+            <p:cNvPr id="64" name="pl64"/>
+            <p:cNvSpPr/>
+            <p:nvPr/>
+          </p:nvSpPr>
+          <p:spPr>
+            <a:xfrm>
+              <a:off x="3127809" y="4336484"/>
+              <a:ext cx="0" cy="1317069"/>
+            </a:xfrm>
+            <a:custGeom>
+              <a:avLst/>
+              <a:pathLst>
+                <a:path w="0" h="1317069">
+                  <a:moveTo>
+                    <a:pt x="0" y="1317069"/>
+                  </a:moveTo>
+                  <a:lnTo>
+                    <a:pt x="0" y="0"/>
+                  </a:lnTo>
+                  <a:lnTo>
+                    <a:pt x="0" y="0"/>
+                  </a:lnTo>
+                </a:path>
+              </a:pathLst>
+            </a:custGeom>
+            <a:ln w="13550" cap="flat">
+              <a:solidFill>
+                <a:srgbClr val="EBEBEB">
+                  <a:alpha val="100000"/>
+                </a:srgbClr>
+              </a:solidFill>
+              <a:prstDash val="solid"/>
+              <a:round/>
+            </a:ln>
+          </p:spPr>
+          <p:txBody>
+            <a:bodyPr/>
+            <a:lstStyle/>
+            <a:p/>
+          </p:txBody>
+        </p:sp>
+        <p:sp>
+          <p:nvSpPr>
+            <p:cNvPr id="65" name="pl65"/>
+            <p:cNvSpPr/>
+            <p:nvPr/>
+          </p:nvSpPr>
+          <p:spPr>
+            <a:xfrm>
+              <a:off x="3978318" y="4336484"/>
+              <a:ext cx="0" cy="1317069"/>
+            </a:xfrm>
+            <a:custGeom>
+              <a:avLst/>
+              <a:pathLst>
+                <a:path w="0" h="1317069">
+                  <a:moveTo>
+                    <a:pt x="0" y="1317069"/>
+                  </a:moveTo>
+                  <a:lnTo>
+                    <a:pt x="0" y="0"/>
+                  </a:lnTo>
+                  <a:lnTo>
+                    <a:pt x="0" y="0"/>
+                  </a:lnTo>
+                </a:path>
+              </a:pathLst>
+            </a:custGeom>
+            <a:ln w="13550" cap="flat">
+              <a:solidFill>
+                <a:srgbClr val="EBEBEB">
+                  <a:alpha val="100000"/>
+                </a:srgbClr>
+              </a:solidFill>
+              <a:prstDash val="solid"/>
+              <a:round/>
+            </a:ln>
+          </p:spPr>
+          <p:txBody>
+            <a:bodyPr/>
+            <a:lstStyle/>
+            <a:p/>
+          </p:txBody>
+        </p:sp>
+        <p:sp>
+          <p:nvSpPr>
+            <p:cNvPr id="66" name="pl66"/>
+            <p:cNvSpPr/>
+            <p:nvPr/>
+          </p:nvSpPr>
+          <p:spPr>
+            <a:xfrm>
+              <a:off x="4828828" y="4336484"/>
+              <a:ext cx="0" cy="1317069"/>
+            </a:xfrm>
+            <a:custGeom>
+              <a:avLst/>
+              <a:pathLst>
+                <a:path w="0" h="1317069">
+                  <a:moveTo>
+                    <a:pt x="0" y="1317069"/>
+                  </a:moveTo>
+                  <a:lnTo>
+                    <a:pt x="0" y="0"/>
+                  </a:lnTo>
+                  <a:lnTo>
+                    <a:pt x="0" y="0"/>
+                  </a:lnTo>
+                </a:path>
+              </a:pathLst>
+            </a:custGeom>
+            <a:ln w="13550" cap="flat">
+              <a:solidFill>
+                <a:srgbClr val="EBEBEB">
+                  <a:alpha val="100000"/>
+                </a:srgbClr>
+              </a:solidFill>
+              <a:prstDash val="solid"/>
+              <a:round/>
+            </a:ln>
+          </p:spPr>
+          <p:txBody>
+            <a:bodyPr/>
+            <a:lstStyle/>
+            <a:p/>
+          </p:txBody>
+        </p:sp>
+        <p:sp>
+          <p:nvSpPr>
+            <p:cNvPr id="67" name="pl67"/>
+            <p:cNvSpPr/>
+            <p:nvPr/>
+          </p:nvSpPr>
+          <p:spPr>
+            <a:xfrm>
+              <a:off x="5679337" y="4336484"/>
+              <a:ext cx="0" cy="1317069"/>
+            </a:xfrm>
+            <a:custGeom>
+              <a:avLst/>
+              <a:pathLst>
+                <a:path w="0" h="1317069">
+                  <a:moveTo>
+                    <a:pt x="0" y="1317069"/>
+                  </a:moveTo>
+                  <a:lnTo>
+                    <a:pt x="0" y="0"/>
+                  </a:lnTo>
+                  <a:lnTo>
+                    <a:pt x="0" y="0"/>
+                  </a:lnTo>
+                </a:path>
+              </a:pathLst>
+            </a:custGeom>
+            <a:ln w="13550" cap="flat">
+              <a:solidFill>
+                <a:srgbClr val="EBEBEB">
+                  <a:alpha val="100000"/>
+                </a:srgbClr>
+              </a:solidFill>
+              <a:prstDash val="solid"/>
+              <a:round/>
+            </a:ln>
+          </p:spPr>
+          <p:txBody>
+            <a:bodyPr/>
+            <a:lstStyle/>
+            <a:p/>
+          </p:txBody>
+        </p:sp>
+        <p:sp>
+          <p:nvSpPr>
+            <p:cNvPr id="68" name="pl68"/>
+            <p:cNvSpPr/>
+            <p:nvPr/>
+          </p:nvSpPr>
+          <p:spPr>
+            <a:xfrm>
+              <a:off x="6529847" y="4336484"/>
+              <a:ext cx="0" cy="1317069"/>
+            </a:xfrm>
+            <a:custGeom>
+              <a:avLst/>
+              <a:pathLst>
+                <a:path w="0" h="1317069">
+                  <a:moveTo>
+                    <a:pt x="0" y="1317069"/>
+                  </a:moveTo>
+                  <a:lnTo>
+                    <a:pt x="0" y="0"/>
+                  </a:lnTo>
+                  <a:lnTo>
+                    <a:pt x="0" y="0"/>
+                  </a:lnTo>
+                </a:path>
+              </a:pathLst>
+            </a:custGeom>
+            <a:ln w="13550" cap="flat">
+              <a:solidFill>
+                <a:srgbClr val="EBEBEB">
+                  <a:alpha val="100000"/>
+                </a:srgbClr>
+              </a:solidFill>
+              <a:prstDash val="solid"/>
+              <a:round/>
+            </a:ln>
+          </p:spPr>
+          <p:txBody>
+            <a:bodyPr/>
+            <a:lstStyle/>
+            <a:p/>
+          </p:txBody>
+        </p:sp>
+        <p:sp>
+          <p:nvSpPr>
+            <p:cNvPr id="69" name="pl69"/>
+            <p:cNvSpPr/>
+            <p:nvPr/>
+          </p:nvSpPr>
+          <p:spPr>
+            <a:xfrm>
+              <a:off x="7380356" y="4336484"/>
+              <a:ext cx="0" cy="1317069"/>
+            </a:xfrm>
+            <a:custGeom>
+              <a:avLst/>
+              <a:pathLst>
+                <a:path w="0" h="1317069">
+                  <a:moveTo>
+                    <a:pt x="0" y="1317069"/>
+                  </a:moveTo>
+                  <a:lnTo>
+                    <a:pt x="0" y="0"/>
+                  </a:lnTo>
+                  <a:lnTo>
+                    <a:pt x="0" y="0"/>
+                  </a:lnTo>
+                </a:path>
+              </a:pathLst>
+            </a:custGeom>
+            <a:ln w="13550" cap="flat">
+              <a:solidFill>
+                <a:srgbClr val="EBEBEB">
+                  <a:alpha val="100000"/>
+                </a:srgbClr>
+              </a:solidFill>
+              <a:prstDash val="solid"/>
+              <a:round/>
+            </a:ln>
+          </p:spPr>
+          <p:txBody>
+            <a:bodyPr/>
+            <a:lstStyle/>
+            <a:p/>
+          </p:txBody>
+        </p:sp>
+        <p:sp>
+          <p:nvSpPr>
+            <p:cNvPr id="70" name="pl70"/>
+            <p:cNvSpPr/>
+            <p:nvPr/>
+          </p:nvSpPr>
+          <p:spPr>
+            <a:xfrm>
+              <a:off x="8230866" y="4336484"/>
+              <a:ext cx="0" cy="1317069"/>
+            </a:xfrm>
+            <a:custGeom>
+              <a:avLst/>
+              <a:pathLst>
+                <a:path w="0" h="1317069">
+                  <a:moveTo>
+                    <a:pt x="0" y="1317069"/>
+                  </a:moveTo>
+                  <a:lnTo>
+                    <a:pt x="0" y="0"/>
+                  </a:lnTo>
+                  <a:lnTo>
+                    <a:pt x="0" y="0"/>
+                  </a:lnTo>
+                </a:path>
+              </a:pathLst>
+            </a:custGeom>
+            <a:ln w="13550" cap="flat">
+              <a:solidFill>
+                <a:srgbClr val="EBEBEB">
+                  <a:alpha val="100000"/>
+                </a:srgbClr>
+              </a:solidFill>
+              <a:prstDash val="solid"/>
+              <a:round/>
+            </a:ln>
+          </p:spPr>
+          <p:txBody>
+            <a:bodyPr/>
+            <a:lstStyle/>
+            <a:p/>
+          </p:txBody>
+        </p:sp>
+        <p:sp>
+          <p:nvSpPr>
+            <p:cNvPr id="71" name="pg71"/>
+            <p:cNvSpPr/>
+            <p:nvPr/>
+          </p:nvSpPr>
+          <p:spPr>
+            <a:xfrm>
+              <a:off x="1235312" y="4336484"/>
+              <a:ext cx="6964104" cy="1222188"/>
+            </a:xfrm>
+            <a:custGeom>
+              <a:avLst/>
+              <a:pathLst>
+                <a:path w="6964104" h="1222188">
+                  <a:moveTo>
+                    <a:pt x="444599" y="0"/>
+                  </a:moveTo>
+                  <a:lnTo>
+                    <a:pt x="492411" y="32782"/>
+                  </a:lnTo>
+                  <a:lnTo>
+                    <a:pt x="562755" y="79186"/>
+                  </a:lnTo>
+                  <a:lnTo>
+                    <a:pt x="633100" y="123831"/>
+                  </a:lnTo>
+                  <a:lnTo>
+                    <a:pt x="703444" y="166785"/>
+                  </a:lnTo>
+                  <a:lnTo>
+                    <a:pt x="773789" y="208110"/>
+                  </a:lnTo>
+                  <a:lnTo>
+                    <a:pt x="844133" y="247869"/>
+                  </a:lnTo>
+                  <a:lnTo>
+                    <a:pt x="914478" y="286122"/>
+                  </a:lnTo>
+                  <a:lnTo>
+                    <a:pt x="984822" y="322925"/>
+                  </a:lnTo>
+                  <a:lnTo>
+                    <a:pt x="1055167" y="358333"/>
+                  </a:lnTo>
+                  <a:lnTo>
+                    <a:pt x="1125511" y="392399"/>
+                  </a:lnTo>
+                  <a:lnTo>
+                    <a:pt x="1195856" y="425174"/>
+                  </a:lnTo>
+                  <a:lnTo>
+                    <a:pt x="1266200" y="456706"/>
+                  </a:lnTo>
+                  <a:lnTo>
+                    <a:pt x="1336545" y="487044"/>
+                  </a:lnTo>
+                  <a:lnTo>
+                    <a:pt x="1406889" y="516232"/>
+                  </a:lnTo>
+                  <a:lnTo>
+                    <a:pt x="1477234" y="544314"/>
+                  </a:lnTo>
+                  <a:lnTo>
+                    <a:pt x="1547578" y="571331"/>
+                  </a:lnTo>
+                  <a:lnTo>
+                    <a:pt x="1617923" y="597325"/>
+                  </a:lnTo>
+                  <a:lnTo>
+                    <a:pt x="1688267" y="622334"/>
+                  </a:lnTo>
+                  <a:lnTo>
+                    <a:pt x="1758612" y="646394"/>
+                  </a:lnTo>
+                  <a:lnTo>
+                    <a:pt x="1828956" y="669543"/>
+                  </a:lnTo>
+                  <a:lnTo>
+                    <a:pt x="1899301" y="691815"/>
+                  </a:lnTo>
+                  <a:lnTo>
+                    <a:pt x="1969645" y="713242"/>
+                  </a:lnTo>
+                  <a:lnTo>
+                    <a:pt x="2039990" y="733858"/>
+                  </a:lnTo>
+                  <a:lnTo>
+                    <a:pt x="2110334" y="753692"/>
+                  </a:lnTo>
+                  <a:lnTo>
+                    <a:pt x="2180679" y="772774"/>
+                  </a:lnTo>
+                  <a:lnTo>
+                    <a:pt x="2251023" y="791133"/>
+                  </a:lnTo>
+                  <a:lnTo>
+                    <a:pt x="2321368" y="808797"/>
+                  </a:lnTo>
+                  <a:lnTo>
+                    <a:pt x="2391712" y="825791"/>
+                  </a:lnTo>
+                  <a:lnTo>
+                    <a:pt x="2462057" y="842141"/>
+                  </a:lnTo>
+                  <a:lnTo>
+                    <a:pt x="2532401" y="857871"/>
+                  </a:lnTo>
+                  <a:lnTo>
+                    <a:pt x="2602746" y="873005"/>
+                  </a:lnTo>
+                  <a:lnTo>
+                    <a:pt x="2673090" y="887566"/>
+                  </a:lnTo>
+                  <a:lnTo>
+                    <a:pt x="2743435" y="901574"/>
+                  </a:lnTo>
+                  <a:lnTo>
+                    <a:pt x="2813779" y="915052"/>
+                  </a:lnTo>
+                  <a:lnTo>
+                    <a:pt x="2884124" y="928019"/>
+                  </a:lnTo>
+                  <a:lnTo>
+                    <a:pt x="2954468" y="940495"/>
+                  </a:lnTo>
+                  <a:lnTo>
+                    <a:pt x="3024813" y="952498"/>
+                  </a:lnTo>
+                  <a:lnTo>
+                    <a:pt x="3095157" y="960634"/>
+                  </a:lnTo>
+                  <a:lnTo>
+                    <a:pt x="3165502" y="965690"/>
+                  </a:lnTo>
+                  <a:lnTo>
+                    <a:pt x="3235846" y="970661"/>
+                  </a:lnTo>
+                  <a:lnTo>
+                    <a:pt x="3306191" y="975546"/>
+                  </a:lnTo>
+                  <a:lnTo>
+                    <a:pt x="3376535" y="980348"/>
+                  </a:lnTo>
+                  <a:lnTo>
+                    <a:pt x="3446880" y="985069"/>
+                  </a:lnTo>
+                  <a:lnTo>
+                    <a:pt x="3517224" y="989709"/>
+                  </a:lnTo>
+                  <a:lnTo>
+                    <a:pt x="3587569" y="994270"/>
+                  </a:lnTo>
+                  <a:lnTo>
+                    <a:pt x="3657913" y="998753"/>
+                  </a:lnTo>
+                  <a:lnTo>
+                    <a:pt x="3728257" y="1003159"/>
+                  </a:lnTo>
+                  <a:lnTo>
+                    <a:pt x="3798602" y="1007491"/>
+                  </a:lnTo>
+                  <a:lnTo>
+                    <a:pt x="3868946" y="1011749"/>
+                  </a:lnTo>
+                  <a:lnTo>
+                    <a:pt x="3939291" y="1015934"/>
+                  </a:lnTo>
+                  <a:lnTo>
+                    <a:pt x="4009635" y="1020047"/>
+                  </a:lnTo>
+                  <a:lnTo>
+                    <a:pt x="4079980" y="1024091"/>
+                  </a:lnTo>
+                  <a:lnTo>
+                    <a:pt x="4150324" y="1028066"/>
+                  </a:lnTo>
+                  <a:lnTo>
+                    <a:pt x="4220669" y="1031972"/>
+                  </a:lnTo>
+                  <a:lnTo>
+                    <a:pt x="4291013" y="1035813"/>
+                  </a:lnTo>
+                  <a:lnTo>
+                    <a:pt x="4361358" y="1039587"/>
+                  </a:lnTo>
+                  <a:lnTo>
+                    <a:pt x="4431702" y="1043298"/>
+                  </a:lnTo>
+                  <a:lnTo>
+                    <a:pt x="4502047" y="1046945"/>
+                  </a:lnTo>
+                  <a:lnTo>
+                    <a:pt x="4572391" y="1050530"/>
+                  </a:lnTo>
+                  <a:lnTo>
+                    <a:pt x="4642736" y="1054054"/>
+                  </a:lnTo>
+                  <a:lnTo>
+                    <a:pt x="4713080" y="1057517"/>
+                  </a:lnTo>
+                  <a:lnTo>
+                    <a:pt x="4783425" y="1060922"/>
+                  </a:lnTo>
+                  <a:lnTo>
+                    <a:pt x="4853769" y="1064269"/>
+                  </a:lnTo>
+                  <a:lnTo>
+                    <a:pt x="4924114" y="1067558"/>
+                  </a:lnTo>
+                  <a:lnTo>
+                    <a:pt x="4994458" y="1070792"/>
+                  </a:lnTo>
+                  <a:lnTo>
+                    <a:pt x="5064803" y="1073970"/>
+                  </a:lnTo>
+                  <a:lnTo>
+                    <a:pt x="5135147" y="1077094"/>
+                  </a:lnTo>
+                  <a:lnTo>
+                    <a:pt x="5205492" y="1080165"/>
+                  </a:lnTo>
+                  <a:lnTo>
+                    <a:pt x="5275836" y="1083184"/>
+                  </a:lnTo>
+                  <a:lnTo>
+                    <a:pt x="5346181" y="1086151"/>
+                  </a:lnTo>
+                  <a:lnTo>
+                    <a:pt x="5416525" y="1089067"/>
+                  </a:lnTo>
+                  <a:lnTo>
+                    <a:pt x="5486870" y="1091934"/>
+                  </a:lnTo>
+                  <a:lnTo>
+                    <a:pt x="5557214" y="1094752"/>
+                  </a:lnTo>
+                  <a:lnTo>
+                    <a:pt x="5627559" y="1097522"/>
+                  </a:lnTo>
+                  <a:lnTo>
+                    <a:pt x="5697903" y="1100244"/>
+                  </a:lnTo>
+                  <a:lnTo>
+                    <a:pt x="5768248" y="1102921"/>
+                  </a:lnTo>
+                  <a:lnTo>
+                    <a:pt x="5838592" y="1105551"/>
+                  </a:lnTo>
+                  <a:lnTo>
+                    <a:pt x="5908937" y="1108137"/>
+                  </a:lnTo>
+                  <a:lnTo>
+                    <a:pt x="5979281" y="1110678"/>
+                  </a:lnTo>
+                  <a:lnTo>
+                    <a:pt x="6049626" y="1113177"/>
+                  </a:lnTo>
+                  <a:lnTo>
+                    <a:pt x="6119970" y="1115632"/>
+                  </a:lnTo>
+                  <a:lnTo>
+                    <a:pt x="6190315" y="1118046"/>
+                  </a:lnTo>
+                  <a:lnTo>
+                    <a:pt x="6260659" y="1120419"/>
+                  </a:lnTo>
+                  <a:lnTo>
+                    <a:pt x="6331004" y="1122751"/>
+                  </a:lnTo>
+                  <a:lnTo>
+                    <a:pt x="6401348" y="1125043"/>
+                  </a:lnTo>
+                  <a:lnTo>
+                    <a:pt x="6471693" y="1127297"/>
+                  </a:lnTo>
+                  <a:lnTo>
+                    <a:pt x="6542037" y="1129512"/>
+                  </a:lnTo>
+                  <a:lnTo>
+                    <a:pt x="6612382" y="1131689"/>
+                  </a:lnTo>
+                  <a:lnTo>
+                    <a:pt x="6682726" y="1133829"/>
+                  </a:lnTo>
+                  <a:lnTo>
+                    <a:pt x="6753071" y="1135932"/>
+                  </a:lnTo>
+                  <a:lnTo>
+                    <a:pt x="6823415" y="1138000"/>
+                  </a:lnTo>
+                  <a:lnTo>
+                    <a:pt x="6893760" y="1140033"/>
+                  </a:lnTo>
+                  <a:lnTo>
+                    <a:pt x="6964104" y="1142030"/>
+                  </a:lnTo>
+                  <a:lnTo>
+                    <a:pt x="6964104" y="1222188"/>
+                  </a:lnTo>
+                  <a:lnTo>
+                    <a:pt x="6893760" y="1220809"/>
+                  </a:lnTo>
+                  <a:lnTo>
+                    <a:pt x="6823415" y="1219375"/>
+                  </a:lnTo>
+                  <a:lnTo>
+                    <a:pt x="6753071" y="1217885"/>
+                  </a:lnTo>
+                  <a:lnTo>
+                    <a:pt x="6682726" y="1216336"/>
+                  </a:lnTo>
+                  <a:lnTo>
+                    <a:pt x="6612382" y="1214726"/>
+                  </a:lnTo>
+                  <a:lnTo>
+                    <a:pt x="6542037" y="1213053"/>
+                  </a:lnTo>
+                  <a:lnTo>
+                    <a:pt x="6471693" y="1211314"/>
+                  </a:lnTo>
+                  <a:lnTo>
+                    <a:pt x="6401348" y="1209506"/>
+                  </a:lnTo>
+                  <a:lnTo>
+                    <a:pt x="6331004" y="1207628"/>
+                  </a:lnTo>
+                  <a:lnTo>
+                    <a:pt x="6260659" y="1205675"/>
+                  </a:lnTo>
+                  <a:lnTo>
+                    <a:pt x="6190315" y="1203645"/>
+                  </a:lnTo>
+                  <a:lnTo>
+                    <a:pt x="6119970" y="1201535"/>
+                  </a:lnTo>
+                  <a:lnTo>
+                    <a:pt x="6049626" y="1199343"/>
+                  </a:lnTo>
+                  <a:lnTo>
+                    <a:pt x="5979281" y="1197063"/>
+                  </a:lnTo>
+                  <a:lnTo>
+                    <a:pt x="5908937" y="1194695"/>
+                  </a:lnTo>
+                  <a:lnTo>
+                    <a:pt x="5838592" y="1192232"/>
+                  </a:lnTo>
+                  <a:lnTo>
+                    <a:pt x="5768248" y="1189673"/>
+                  </a:lnTo>
+                  <a:lnTo>
+                    <a:pt x="5697903" y="1187013"/>
+                  </a:lnTo>
+                  <a:lnTo>
+                    <a:pt x="5627559" y="1184248"/>
+                  </a:lnTo>
+                  <a:lnTo>
+                    <a:pt x="5557214" y="1181374"/>
+                  </a:lnTo>
+                  <a:lnTo>
+                    <a:pt x="5486870" y="1178387"/>
+                  </a:lnTo>
+                  <a:lnTo>
+                    <a:pt x="5416525" y="1175283"/>
+                  </a:lnTo>
+                  <a:lnTo>
+                    <a:pt x="5346181" y="1172056"/>
+                  </a:lnTo>
+                  <a:lnTo>
+                    <a:pt x="5275836" y="1168702"/>
+                  </a:lnTo>
+                  <a:lnTo>
+                    <a:pt x="5205492" y="1165216"/>
+                  </a:lnTo>
+                  <a:lnTo>
+                    <a:pt x="5135147" y="1161592"/>
+                  </a:lnTo>
+                  <a:lnTo>
+                    <a:pt x="5064803" y="1157826"/>
+                  </a:lnTo>
+                  <a:lnTo>
+                    <a:pt x="4994458" y="1153911"/>
+                  </a:lnTo>
+                  <a:lnTo>
+                    <a:pt x="4924114" y="1149843"/>
+                  </a:lnTo>
+                  <a:lnTo>
+                    <a:pt x="4853769" y="1145613"/>
+                  </a:lnTo>
+                  <a:lnTo>
+                    <a:pt x="4783425" y="1141218"/>
+                  </a:lnTo>
+                  <a:lnTo>
+                    <a:pt x="4713080" y="1136649"/>
+                  </a:lnTo>
+                  <a:lnTo>
+                    <a:pt x="4642736" y="1131900"/>
+                  </a:lnTo>
+                  <a:lnTo>
+                    <a:pt x="4572391" y="1126964"/>
+                  </a:lnTo>
+                  <a:lnTo>
+                    <a:pt x="4502047" y="1121834"/>
+                  </a:lnTo>
+                  <a:lnTo>
+                    <a:pt x="4431702" y="1116502"/>
+                  </a:lnTo>
+                  <a:lnTo>
+                    <a:pt x="4361358" y="1110959"/>
+                  </a:lnTo>
+                  <a:lnTo>
+                    <a:pt x="4291013" y="1105199"/>
+                  </a:lnTo>
+                  <a:lnTo>
+                    <a:pt x="4220669" y="1099211"/>
+                  </a:lnTo>
+                  <a:lnTo>
+                    <a:pt x="4150324" y="1092988"/>
+                  </a:lnTo>
+                  <a:lnTo>
+                    <a:pt x="4079980" y="1086519"/>
+                  </a:lnTo>
+                  <a:lnTo>
+                    <a:pt x="4009635" y="1079795"/>
+                  </a:lnTo>
+                  <a:lnTo>
+                    <a:pt x="3939291" y="1072807"/>
+                  </a:lnTo>
+                  <a:lnTo>
+                    <a:pt x="3868946" y="1065543"/>
+                  </a:lnTo>
+                  <a:lnTo>
+                    <a:pt x="3798602" y="1057994"/>
+                  </a:lnTo>
+                  <a:lnTo>
+                    <a:pt x="3728257" y="1050147"/>
+                  </a:lnTo>
+                  <a:lnTo>
+                    <a:pt x="3657913" y="1041990"/>
+                  </a:lnTo>
+                  <a:lnTo>
+                    <a:pt x="3587569" y="1033513"/>
+                  </a:lnTo>
+                  <a:lnTo>
+                    <a:pt x="3517224" y="1024701"/>
+                  </a:lnTo>
+                  <a:lnTo>
+                    <a:pt x="3446880" y="1015543"/>
+                  </a:lnTo>
+                  <a:lnTo>
+                    <a:pt x="3376535" y="1006023"/>
+                  </a:lnTo>
+                  <a:lnTo>
+                    <a:pt x="3306191" y="996129"/>
+                  </a:lnTo>
+                  <a:lnTo>
+                    <a:pt x="3235846" y="985845"/>
+                  </a:lnTo>
+                  <a:lnTo>
+                    <a:pt x="3165502" y="975156"/>
+                  </a:lnTo>
+                  <a:lnTo>
+                    <a:pt x="3095157" y="964046"/>
+                  </a:lnTo>
+                  <a:lnTo>
+                    <a:pt x="3024813" y="955489"/>
+                  </a:lnTo>
+                  <a:lnTo>
+                    <a:pt x="2954468" y="950256"/>
+                  </a:lnTo>
+                  <a:lnTo>
+                    <a:pt x="2884124" y="944931"/>
+                  </a:lnTo>
+                  <a:lnTo>
+                    <a:pt x="2813779" y="939515"/>
+                  </a:lnTo>
+                  <a:lnTo>
+                    <a:pt x="2743435" y="934004"/>
+                  </a:lnTo>
+                  <a:lnTo>
+                    <a:pt x="2673090" y="928398"/>
+                  </a:lnTo>
+                  <a:lnTo>
+                    <a:pt x="2602746" y="922694"/>
+                  </a:lnTo>
+                  <a:lnTo>
+                    <a:pt x="2532401" y="916892"/>
+                  </a:lnTo>
+                  <a:lnTo>
+                    <a:pt x="2462057" y="910989"/>
+                  </a:lnTo>
+                  <a:lnTo>
+                    <a:pt x="2391712" y="904984"/>
+                  </a:lnTo>
+                  <a:lnTo>
+                    <a:pt x="2321368" y="898874"/>
+                  </a:lnTo>
+                  <a:lnTo>
+                    <a:pt x="2251023" y="892658"/>
+                  </a:lnTo>
+                  <a:lnTo>
+                    <a:pt x="2180679" y="886335"/>
+                  </a:lnTo>
+                  <a:lnTo>
+                    <a:pt x="2110334" y="879902"/>
+                  </a:lnTo>
+                  <a:lnTo>
+                    <a:pt x="2039990" y="873357"/>
+                  </a:lnTo>
+                  <a:lnTo>
+                    <a:pt x="1969645" y="866699"/>
+                  </a:lnTo>
+                  <a:lnTo>
+                    <a:pt x="1899301" y="859925"/>
+                  </a:lnTo>
+                  <a:lnTo>
+                    <a:pt x="1828956" y="853034"/>
+                  </a:lnTo>
+                  <a:lnTo>
+                    <a:pt x="1758612" y="846023"/>
+                  </a:lnTo>
+                  <a:lnTo>
+                    <a:pt x="1688267" y="838891"/>
+                  </a:lnTo>
+                  <a:lnTo>
+                    <a:pt x="1617923" y="831635"/>
+                  </a:lnTo>
+                  <a:lnTo>
+                    <a:pt x="1547578" y="824253"/>
+                  </a:lnTo>
+                  <a:lnTo>
+                    <a:pt x="1477234" y="816743"/>
+                  </a:lnTo>
+                  <a:lnTo>
+                    <a:pt x="1406889" y="809103"/>
+                  </a:lnTo>
+                  <a:lnTo>
+                    <a:pt x="1336545" y="801330"/>
+                  </a:lnTo>
+                  <a:lnTo>
+                    <a:pt x="1266200" y="793423"/>
+                  </a:lnTo>
+                  <a:lnTo>
+                    <a:pt x="1195856" y="785378"/>
+                  </a:lnTo>
+                  <a:lnTo>
+                    <a:pt x="1125511" y="777194"/>
+                  </a:lnTo>
+                  <a:lnTo>
+                    <a:pt x="1055167" y="768867"/>
+                  </a:lnTo>
+                  <a:lnTo>
+                    <a:pt x="984822" y="760397"/>
+                  </a:lnTo>
+                  <a:lnTo>
+                    <a:pt x="914478" y="751779"/>
+                  </a:lnTo>
+                  <a:lnTo>
+                    <a:pt x="844133" y="743012"/>
+                  </a:lnTo>
+                  <a:lnTo>
+                    <a:pt x="773789" y="734093"/>
+                  </a:lnTo>
+                  <a:lnTo>
+                    <a:pt x="703444" y="725019"/>
+                  </a:lnTo>
+                  <a:lnTo>
+                    <a:pt x="633100" y="715787"/>
+                  </a:lnTo>
+                  <a:lnTo>
+                    <a:pt x="562755" y="706396"/>
+                  </a:lnTo>
+                  <a:lnTo>
+                    <a:pt x="492411" y="696842"/>
+                  </a:lnTo>
+                  <a:lnTo>
+                    <a:pt x="422066" y="687122"/>
+                  </a:lnTo>
+                  <a:lnTo>
+                    <a:pt x="351722" y="677233"/>
+                  </a:lnTo>
+                  <a:lnTo>
+                    <a:pt x="281377" y="667173"/>
+                  </a:lnTo>
+                  <a:lnTo>
+                    <a:pt x="211033" y="656938"/>
+                  </a:lnTo>
+                  <a:lnTo>
+                    <a:pt x="140688" y="646526"/>
+                  </a:lnTo>
+                  <a:lnTo>
+                    <a:pt x="70344" y="635933"/>
+                  </a:lnTo>
+                  <a:lnTo>
+                    <a:pt x="0" y="625157"/>
+                  </a:lnTo>
+                  <a:close/>
+                </a:path>
+              </a:pathLst>
+            </a:custGeom>
+            <a:solidFill>
+              <a:srgbClr val="FF8C00">
+                <a:alpha val="20000"/>
+              </a:srgbClr>
+            </a:solidFill>
+          </p:spPr>
+          <p:txBody>
+            <a:bodyPr/>
+            <a:lstStyle/>
+            <a:p/>
+          </p:txBody>
+        </p:sp>
+        <p:sp>
+          <p:nvSpPr>
+            <p:cNvPr id="72" name="pl72"/>
+            <p:cNvSpPr/>
+            <p:nvPr/>
+          </p:nvSpPr>
+          <p:spPr>
+            <a:xfrm>
+              <a:off x="1679911" y="4336484"/>
+              <a:ext cx="6519505" cy="1142030"/>
+            </a:xfrm>
+            <a:custGeom>
+              <a:avLst/>
+              <a:pathLst>
+                <a:path w="6519505" h="1142030">
+                  <a:moveTo>
+                    <a:pt x="0" y="0"/>
+                  </a:moveTo>
+                  <a:lnTo>
+                    <a:pt x="47812" y="32782"/>
+                  </a:lnTo>
+                  <a:lnTo>
+                    <a:pt x="118156" y="79186"/>
+                  </a:lnTo>
+                  <a:lnTo>
+                    <a:pt x="188501" y="123831"/>
+                  </a:lnTo>
+                  <a:lnTo>
+                    <a:pt x="258845" y="166785"/>
+                  </a:lnTo>
+                  <a:lnTo>
+                    <a:pt x="329190" y="208110"/>
+                  </a:lnTo>
+                  <a:lnTo>
+                    <a:pt x="399534" y="247869"/>
+                  </a:lnTo>
+                  <a:lnTo>
+                    <a:pt x="469879" y="286122"/>
+                  </a:lnTo>
+                  <a:lnTo>
+                    <a:pt x="540223" y="322925"/>
+                  </a:lnTo>
+                  <a:lnTo>
+                    <a:pt x="610568" y="358333"/>
+                  </a:lnTo>
+                  <a:lnTo>
+                    <a:pt x="680912" y="392399"/>
+                  </a:lnTo>
+                  <a:lnTo>
+                    <a:pt x="751257" y="425174"/>
+                  </a:lnTo>
+                  <a:lnTo>
+                    <a:pt x="821601" y="456706"/>
+                  </a:lnTo>
+                  <a:lnTo>
+                    <a:pt x="891946" y="487044"/>
+                  </a:lnTo>
+                  <a:lnTo>
+                    <a:pt x="962290" y="516232"/>
+                  </a:lnTo>
+                  <a:lnTo>
+                    <a:pt x="1032635" y="544314"/>
+                  </a:lnTo>
+                  <a:lnTo>
+                    <a:pt x="1102979" y="571331"/>
+                  </a:lnTo>
+                  <a:lnTo>
+                    <a:pt x="1173324" y="597325"/>
+                  </a:lnTo>
+                  <a:lnTo>
+                    <a:pt x="1243668" y="622334"/>
+                  </a:lnTo>
+                  <a:lnTo>
+                    <a:pt x="1314013" y="646394"/>
+                  </a:lnTo>
+                  <a:lnTo>
+                    <a:pt x="1384357" y="669543"/>
+                  </a:lnTo>
+                  <a:lnTo>
+                    <a:pt x="1454702" y="691815"/>
+                  </a:lnTo>
+                  <a:lnTo>
+                    <a:pt x="1525046" y="713242"/>
+                  </a:lnTo>
+                  <a:lnTo>
+                    <a:pt x="1595391" y="733858"/>
+                  </a:lnTo>
+                  <a:lnTo>
+                    <a:pt x="1665735" y="753692"/>
+                  </a:lnTo>
+                  <a:lnTo>
+                    <a:pt x="1736080" y="772774"/>
+                  </a:lnTo>
+                  <a:lnTo>
+                    <a:pt x="1806424" y="791133"/>
+                  </a:lnTo>
+                  <a:lnTo>
+                    <a:pt x="1876769" y="808797"/>
+                  </a:lnTo>
+                  <a:lnTo>
+                    <a:pt x="1947113" y="825791"/>
+                  </a:lnTo>
+                  <a:lnTo>
+                    <a:pt x="2017458" y="842141"/>
+                  </a:lnTo>
+                  <a:lnTo>
+                    <a:pt x="2087802" y="857871"/>
+                  </a:lnTo>
+                  <a:lnTo>
+                    <a:pt x="2158147" y="873005"/>
+                  </a:lnTo>
+                  <a:lnTo>
+                    <a:pt x="2228491" y="887566"/>
+                  </a:lnTo>
+                  <a:lnTo>
+                    <a:pt x="2298836" y="901574"/>
+                  </a:lnTo>
+                  <a:lnTo>
+                    <a:pt x="2369180" y="915052"/>
+                  </a:lnTo>
+                  <a:lnTo>
+                    <a:pt x="2439525" y="928019"/>
+                  </a:lnTo>
+                  <a:lnTo>
+                    <a:pt x="2509869" y="940495"/>
+                  </a:lnTo>
+                  <a:lnTo>
+                    <a:pt x="2580214" y="952498"/>
+                  </a:lnTo>
+                  <a:lnTo>
+                    <a:pt x="2650558" y="960634"/>
+                  </a:lnTo>
+                  <a:lnTo>
+                    <a:pt x="2720903" y="965690"/>
+                  </a:lnTo>
+                  <a:lnTo>
+                    <a:pt x="2791247" y="970661"/>
+                  </a:lnTo>
+                  <a:lnTo>
+                    <a:pt x="2861591" y="975546"/>
+                  </a:lnTo>
+                  <a:lnTo>
+                    <a:pt x="2931936" y="980348"/>
+                  </a:lnTo>
+                  <a:lnTo>
+                    <a:pt x="3002280" y="985069"/>
+                  </a:lnTo>
+                  <a:lnTo>
+                    <a:pt x="3072625" y="989709"/>
+                  </a:lnTo>
+                  <a:lnTo>
+                    <a:pt x="3142969" y="994270"/>
+                  </a:lnTo>
+                  <a:lnTo>
+                    <a:pt x="3213314" y="998753"/>
+                  </a:lnTo>
+                  <a:lnTo>
+                    <a:pt x="3283658" y="1003159"/>
+                  </a:lnTo>
+                  <a:lnTo>
+                    <a:pt x="3354003" y="1007491"/>
+                  </a:lnTo>
+                  <a:lnTo>
+                    <a:pt x="3424347" y="1011749"/>
+                  </a:lnTo>
+                  <a:lnTo>
+                    <a:pt x="3494692" y="1015934"/>
+                  </a:lnTo>
+                  <a:lnTo>
+                    <a:pt x="3565036" y="1020047"/>
+                  </a:lnTo>
+                  <a:lnTo>
+                    <a:pt x="3635381" y="1024091"/>
+                  </a:lnTo>
+                  <a:lnTo>
+                    <a:pt x="3705725" y="1028066"/>
+                  </a:lnTo>
+                  <a:lnTo>
+                    <a:pt x="3776070" y="1031972"/>
+                  </a:lnTo>
+                  <a:lnTo>
+                    <a:pt x="3846414" y="1035813"/>
+                  </a:lnTo>
+                  <a:lnTo>
+                    <a:pt x="3916759" y="1039587"/>
+                  </a:lnTo>
+                  <a:lnTo>
+                    <a:pt x="3987103" y="1043298"/>
+                  </a:lnTo>
+                  <a:lnTo>
+                    <a:pt x="4057448" y="1046945"/>
+                  </a:lnTo>
+                  <a:lnTo>
+                    <a:pt x="4127792" y="1050530"/>
+                  </a:lnTo>
+                  <a:lnTo>
+                    <a:pt x="4198137" y="1054054"/>
+                  </a:lnTo>
+                  <a:lnTo>
+                    <a:pt x="4268481" y="1057517"/>
+                  </a:lnTo>
+                  <a:lnTo>
+                    <a:pt x="4338826" y="1060922"/>
+                  </a:lnTo>
+                  <a:lnTo>
+                    <a:pt x="4409170" y="1064269"/>
+                  </a:lnTo>
+                  <a:lnTo>
+                    <a:pt x="4479515" y="1067558"/>
+                  </a:lnTo>
+                  <a:lnTo>
+                    <a:pt x="4549859" y="1070792"/>
+                  </a:lnTo>
+                  <a:lnTo>
+                    <a:pt x="4620204" y="1073970"/>
+                  </a:lnTo>
+                  <a:lnTo>
+                    <a:pt x="4690548" y="1077094"/>
+                  </a:lnTo>
+                  <a:lnTo>
+                    <a:pt x="4760893" y="1080165"/>
+                  </a:lnTo>
+                  <a:lnTo>
+                    <a:pt x="4831237" y="1083184"/>
+                  </a:lnTo>
+                  <a:lnTo>
+                    <a:pt x="4901582" y="1086151"/>
+                  </a:lnTo>
+                  <a:lnTo>
+                    <a:pt x="4971926" y="1089067"/>
+                  </a:lnTo>
+                  <a:lnTo>
+                    <a:pt x="5042271" y="1091934"/>
+                  </a:lnTo>
+                  <a:lnTo>
+                    <a:pt x="5112615" y="1094752"/>
+                  </a:lnTo>
+                  <a:lnTo>
+                    <a:pt x="5182960" y="1097522"/>
+                  </a:lnTo>
+                  <a:lnTo>
+                    <a:pt x="5253304" y="1100244"/>
+                  </a:lnTo>
+                  <a:lnTo>
+                    <a:pt x="5323649" y="1102921"/>
+                  </a:lnTo>
+                  <a:lnTo>
+                    <a:pt x="5393993" y="1105551"/>
+                  </a:lnTo>
+                  <a:lnTo>
+                    <a:pt x="5464338" y="1108137"/>
+                  </a:lnTo>
+                  <a:lnTo>
+                    <a:pt x="5534682" y="1110678"/>
+                  </a:lnTo>
+                  <a:lnTo>
+                    <a:pt x="5605027" y="1113177"/>
+                  </a:lnTo>
+                  <a:lnTo>
+                    <a:pt x="5675371" y="1115632"/>
+                  </a:lnTo>
+                  <a:lnTo>
+                    <a:pt x="5745716" y="1118046"/>
+                  </a:lnTo>
+                  <a:lnTo>
+                    <a:pt x="5816060" y="1120419"/>
+                  </a:lnTo>
+                  <a:lnTo>
+                    <a:pt x="5886405" y="1122751"/>
+                  </a:lnTo>
+                  <a:lnTo>
+                    <a:pt x="5956749" y="1125043"/>
+                  </a:lnTo>
+                  <a:lnTo>
+                    <a:pt x="6027094" y="1127297"/>
+                  </a:lnTo>
+                  <a:lnTo>
+                    <a:pt x="6097438" y="1129512"/>
+                  </a:lnTo>
+                  <a:lnTo>
+                    <a:pt x="6167783" y="1131689"/>
+                  </a:lnTo>
+                  <a:lnTo>
+                    <a:pt x="6238127" y="1133829"/>
+                  </a:lnTo>
+                  <a:lnTo>
+                    <a:pt x="6308472" y="1135932"/>
+                  </a:lnTo>
+                  <a:lnTo>
+                    <a:pt x="6378816" y="1138000"/>
+                  </a:lnTo>
+                  <a:lnTo>
+                    <a:pt x="6449161" y="1140033"/>
+                  </a:lnTo>
+                  <a:lnTo>
+                    <a:pt x="6519505" y="1142030"/>
+                  </a:lnTo>
+                </a:path>
+              </a:pathLst>
+            </a:custGeom>
+          </p:spPr>
+          <p:txBody>
+            <a:bodyPr/>
+            <a:lstStyle/>
+            <a:p/>
+          </p:txBody>
+        </p:sp>
+        <p:sp>
+          <p:nvSpPr>
+            <p:cNvPr id="73" name="pl73"/>
+            <p:cNvSpPr/>
+            <p:nvPr/>
+          </p:nvSpPr>
+          <p:spPr>
+            <a:xfrm>
+              <a:off x="1235312" y="4961641"/>
+              <a:ext cx="6964104" cy="597031"/>
+            </a:xfrm>
+            <a:custGeom>
+              <a:avLst/>
+              <a:pathLst>
+                <a:path w="6964104" h="597031">
+                  <a:moveTo>
+                    <a:pt x="6964104" y="597031"/>
+                  </a:moveTo>
+                  <a:lnTo>
+                    <a:pt x="6893760" y="595651"/>
+                  </a:lnTo>
+                  <a:lnTo>
+                    <a:pt x="6823415" y="594218"/>
+                  </a:lnTo>
+                  <a:lnTo>
+                    <a:pt x="6753071" y="592728"/>
+                  </a:lnTo>
+                  <a:lnTo>
+                    <a:pt x="6682726" y="591179"/>
+                  </a:lnTo>
+                  <a:lnTo>
+                    <a:pt x="6612382" y="589569"/>
+                  </a:lnTo>
+                  <a:lnTo>
+                    <a:pt x="6542037" y="587896"/>
+                  </a:lnTo>
+                  <a:lnTo>
+                    <a:pt x="6471693" y="586157"/>
+                  </a:lnTo>
+                  <a:lnTo>
+                    <a:pt x="6401348" y="584349"/>
+                  </a:lnTo>
+                  <a:lnTo>
+                    <a:pt x="6331004" y="582471"/>
+                  </a:lnTo>
+                  <a:lnTo>
+                    <a:pt x="6260659" y="580518"/>
+                  </a:lnTo>
+                  <a:lnTo>
+                    <a:pt x="6190315" y="578488"/>
+                  </a:lnTo>
+                  <a:lnTo>
+                    <a:pt x="6119970" y="576378"/>
+                  </a:lnTo>
+                  <a:lnTo>
+                    <a:pt x="6049626" y="574186"/>
+                  </a:lnTo>
+                  <a:lnTo>
+                    <a:pt x="5979281" y="571906"/>
+                  </a:lnTo>
+                  <a:lnTo>
+                    <a:pt x="5908937" y="569538"/>
+                  </a:lnTo>
+                  <a:lnTo>
+                    <a:pt x="5838592" y="567075"/>
+                  </a:lnTo>
+                  <a:lnTo>
+                    <a:pt x="5768248" y="564516"/>
+                  </a:lnTo>
+                  <a:lnTo>
+                    <a:pt x="5697903" y="561856"/>
+                  </a:lnTo>
+                  <a:lnTo>
+                    <a:pt x="5627559" y="559091"/>
+                  </a:lnTo>
+                  <a:lnTo>
+                    <a:pt x="5557214" y="556217"/>
+                  </a:lnTo>
+                  <a:lnTo>
+                    <a:pt x="5486870" y="553230"/>
+                  </a:lnTo>
+                  <a:lnTo>
+                    <a:pt x="5416525" y="550126"/>
+                  </a:lnTo>
+                  <a:lnTo>
+                    <a:pt x="5346181" y="546899"/>
+                  </a:lnTo>
+                  <a:lnTo>
+                    <a:pt x="5275836" y="543545"/>
+                  </a:lnTo>
+                  <a:lnTo>
+                    <a:pt x="5205492" y="540059"/>
+                  </a:lnTo>
+                  <a:lnTo>
+                    <a:pt x="5135147" y="536435"/>
+                  </a:lnTo>
+                  <a:lnTo>
+                    <a:pt x="5064803" y="532669"/>
+                  </a:lnTo>
+                  <a:lnTo>
+                    <a:pt x="4994458" y="528754"/>
+                  </a:lnTo>
+                  <a:lnTo>
+                    <a:pt x="4924114" y="524686"/>
+                  </a:lnTo>
+                  <a:lnTo>
+                    <a:pt x="4853769" y="520456"/>
+                  </a:lnTo>
+                  <a:lnTo>
+                    <a:pt x="4783425" y="516061"/>
+                  </a:lnTo>
+                  <a:lnTo>
+                    <a:pt x="4713080" y="511492"/>
+                  </a:lnTo>
+                  <a:lnTo>
+                    <a:pt x="4642736" y="506743"/>
+                  </a:lnTo>
+                  <a:lnTo>
+                    <a:pt x="4572391" y="501807"/>
+                  </a:lnTo>
+                  <a:lnTo>
+                    <a:pt x="4502047" y="496677"/>
+                  </a:lnTo>
+                  <a:lnTo>
+                    <a:pt x="4431702" y="491345"/>
+                  </a:lnTo>
+                  <a:lnTo>
+                    <a:pt x="4361358" y="485802"/>
+                  </a:lnTo>
+                  <a:lnTo>
+                    <a:pt x="4291013" y="480042"/>
+                  </a:lnTo>
+                  <a:lnTo>
+                    <a:pt x="4220669" y="474054"/>
+                  </a:lnTo>
+                  <a:lnTo>
+                    <a:pt x="4150324" y="467831"/>
+                  </a:lnTo>
+                  <a:lnTo>
+                    <a:pt x="4079980" y="461362"/>
+                  </a:lnTo>
+                  <a:lnTo>
+                    <a:pt x="4009635" y="454638"/>
+                  </a:lnTo>
+                  <a:lnTo>
+                    <a:pt x="3939291" y="447650"/>
+                  </a:lnTo>
+                  <a:lnTo>
+                    <a:pt x="3868946" y="440386"/>
+                  </a:lnTo>
+                  <a:lnTo>
+                    <a:pt x="3798602" y="432837"/>
+                  </a:lnTo>
+                  <a:lnTo>
+                    <a:pt x="3728257" y="424990"/>
+                  </a:lnTo>
+                  <a:lnTo>
+                    <a:pt x="3657913" y="416833"/>
+                  </a:lnTo>
+                  <a:lnTo>
+                    <a:pt x="3587569" y="408356"/>
+                  </a:lnTo>
+                  <a:lnTo>
+                    <a:pt x="3517224" y="399544"/>
+                  </a:lnTo>
+                  <a:lnTo>
+                    <a:pt x="3446880" y="390386"/>
+                  </a:lnTo>
+                  <a:lnTo>
+                    <a:pt x="3376535" y="380866"/>
+                  </a:lnTo>
+                  <a:lnTo>
+                    <a:pt x="3306191" y="370972"/>
+                  </a:lnTo>
+                  <a:lnTo>
+                    <a:pt x="3235846" y="360688"/>
+                  </a:lnTo>
+                  <a:lnTo>
+                    <a:pt x="3165502" y="349999"/>
+                  </a:lnTo>
+                  <a:lnTo>
+                    <a:pt x="3095157" y="338889"/>
+                  </a:lnTo>
+                  <a:lnTo>
+                    <a:pt x="3024813" y="330332"/>
+                  </a:lnTo>
+                  <a:lnTo>
+                    <a:pt x="2954468" y="325099"/>
+                  </a:lnTo>
+                  <a:lnTo>
+                    <a:pt x="2884124" y="319774"/>
+                  </a:lnTo>
+                  <a:lnTo>
+                    <a:pt x="2813779" y="314358"/>
+                  </a:lnTo>
+                  <a:lnTo>
+                    <a:pt x="2743435" y="308847"/>
+                  </a:lnTo>
+                  <a:lnTo>
+                    <a:pt x="2673090" y="303241"/>
+                  </a:lnTo>
+                  <a:lnTo>
+                    <a:pt x="2602746" y="297537"/>
+                  </a:lnTo>
+                  <a:lnTo>
+                    <a:pt x="2532401" y="291735"/>
+                  </a:lnTo>
+                  <a:lnTo>
+                    <a:pt x="2462057" y="285832"/>
+                  </a:lnTo>
+                  <a:lnTo>
+                    <a:pt x="2391712" y="279827"/>
+                  </a:lnTo>
+                  <a:lnTo>
+                    <a:pt x="2321368" y="273717"/>
+                  </a:lnTo>
+                  <a:lnTo>
+                    <a:pt x="2251023" y="267501"/>
+                  </a:lnTo>
+                  <a:lnTo>
+                    <a:pt x="2180679" y="261178"/>
+                  </a:lnTo>
+                  <a:lnTo>
+                    <a:pt x="2110334" y="254745"/>
+                  </a:lnTo>
+                  <a:lnTo>
+                    <a:pt x="2039990" y="248200"/>
+                  </a:lnTo>
+                  <a:lnTo>
+                    <a:pt x="1969645" y="241542"/>
+                  </a:lnTo>
+                  <a:lnTo>
+                    <a:pt x="1899301" y="234768"/>
+                  </a:lnTo>
+                  <a:lnTo>
+                    <a:pt x="1828956" y="227877"/>
+                  </a:lnTo>
+                  <a:lnTo>
+                    <a:pt x="1758612" y="220866"/>
+                  </a:lnTo>
+                  <a:lnTo>
+                    <a:pt x="1688267" y="213734"/>
+                  </a:lnTo>
+                  <a:lnTo>
+                    <a:pt x="1617923" y="206478"/>
+                  </a:lnTo>
+                  <a:lnTo>
+                    <a:pt x="1547578" y="199096"/>
+                  </a:lnTo>
+                  <a:lnTo>
+                    <a:pt x="1477234" y="191586"/>
+                  </a:lnTo>
+                  <a:lnTo>
+                    <a:pt x="1406889" y="183946"/>
+                  </a:lnTo>
+                  <a:lnTo>
+                    <a:pt x="1336545" y="176173"/>
+                  </a:lnTo>
+                  <a:lnTo>
+                    <a:pt x="1266200" y="168266"/>
+                  </a:lnTo>
+                  <a:lnTo>
+                    <a:pt x="1195856" y="160221"/>
+                  </a:lnTo>
+                  <a:lnTo>
+                    <a:pt x="1125511" y="152037"/>
+                  </a:lnTo>
+                  <a:lnTo>
+                    <a:pt x="1055167" y="143710"/>
+                  </a:lnTo>
+                  <a:lnTo>
+                    <a:pt x="984822" y="135240"/>
+                  </a:lnTo>
+                  <a:lnTo>
+                    <a:pt x="914478" y="126622"/>
+                  </a:lnTo>
+                  <a:lnTo>
+                    <a:pt x="844133" y="117855"/>
+                  </a:lnTo>
+                  <a:lnTo>
+                    <a:pt x="773789" y="108936"/>
+                  </a:lnTo>
+                  <a:lnTo>
+                    <a:pt x="703444" y="99862"/>
+                  </a:lnTo>
+                  <a:lnTo>
+                    <a:pt x="633100" y="90630"/>
+                  </a:lnTo>
+                  <a:lnTo>
+                    <a:pt x="562755" y="81239"/>
+                  </a:lnTo>
+                  <a:lnTo>
+                    <a:pt x="492411" y="71685"/>
+                  </a:lnTo>
+                  <a:lnTo>
+                    <a:pt x="422066" y="61965"/>
+                  </a:lnTo>
+                  <a:lnTo>
+                    <a:pt x="351722" y="52076"/>
+                  </a:lnTo>
+                  <a:lnTo>
+                    <a:pt x="281377" y="42016"/>
+                  </a:lnTo>
+                  <a:lnTo>
+                    <a:pt x="211033" y="31781"/>
+                  </a:lnTo>
+                  <a:lnTo>
+                    <a:pt x="140688" y="21369"/>
+                  </a:lnTo>
+                  <a:lnTo>
+                    <a:pt x="70344" y="10776"/>
+                  </a:lnTo>
+                  <a:lnTo>
+                    <a:pt x="0" y="0"/>
+                  </a:lnTo>
+                </a:path>
+              </a:pathLst>
+            </a:custGeom>
+          </p:spPr>
+          <p:txBody>
+            <a:bodyPr/>
+            <a:lstStyle/>
+            <a:p/>
+          </p:txBody>
+        </p:sp>
+        <p:sp>
+          <p:nvSpPr>
+            <p:cNvPr id="74" name="pl74"/>
+            <p:cNvSpPr/>
+            <p:nvPr/>
+          </p:nvSpPr>
+          <p:spPr>
+            <a:xfrm>
+              <a:off x="1235312" y="4586600"/>
+              <a:ext cx="6964104" cy="943582"/>
+            </a:xfrm>
+            <a:custGeom>
+              <a:avLst/>
+              <a:pathLst>
+                <a:path w="6964104" h="943582">
+                  <a:moveTo>
+                    <a:pt x="0" y="0"/>
+                  </a:moveTo>
+                  <a:lnTo>
+                    <a:pt x="70344" y="27725"/>
+                  </a:lnTo>
+                  <a:lnTo>
+                    <a:pt x="140688" y="54687"/>
+                  </a:lnTo>
+                  <a:lnTo>
+                    <a:pt x="211033" y="80907"/>
+                  </a:lnTo>
+                  <a:lnTo>
+                    <a:pt x="281377" y="106405"/>
+                  </a:lnTo>
+                  <a:lnTo>
+                    <a:pt x="351722" y="131201"/>
+                  </a:lnTo>
+                  <a:lnTo>
+                    <a:pt x="422066" y="155315"/>
+                  </a:lnTo>
+                  <a:lnTo>
+                    <a:pt x="492411" y="178764"/>
+                  </a:lnTo>
+                  <a:lnTo>
+                    <a:pt x="562755" y="201568"/>
+                  </a:lnTo>
+                  <a:lnTo>
+                    <a:pt x="633100" y="223745"/>
+                  </a:lnTo>
+                  <a:lnTo>
+                    <a:pt x="703444" y="245310"/>
+                  </a:lnTo>
+                  <a:lnTo>
+                    <a:pt x="773789" y="266282"/>
+                  </a:lnTo>
+                  <a:lnTo>
+                    <a:pt x="844133" y="286677"/>
+                  </a:lnTo>
+                  <a:lnTo>
+                    <a:pt x="914478" y="306510"/>
+                  </a:lnTo>
+                  <a:lnTo>
+                    <a:pt x="984822" y="325797"/>
+                  </a:lnTo>
+                  <a:lnTo>
+                    <a:pt x="1055167" y="344553"/>
+                  </a:lnTo>
+                  <a:lnTo>
+                    <a:pt x="1125511" y="362793"/>
+                  </a:lnTo>
+                  <a:lnTo>
+                    <a:pt x="1195856" y="380531"/>
+                  </a:lnTo>
+                  <a:lnTo>
+                    <a:pt x="1266200" y="397780"/>
+                  </a:lnTo>
+                  <a:lnTo>
+                    <a:pt x="1336545" y="414554"/>
+                  </a:lnTo>
+                  <a:lnTo>
+                    <a:pt x="1406889" y="430867"/>
+                  </a:lnTo>
+                  <a:lnTo>
+                    <a:pt x="1477234" y="446730"/>
+                  </a:lnTo>
+                  <a:lnTo>
+                    <a:pt x="1547578" y="462157"/>
+                  </a:lnTo>
+                  <a:lnTo>
+                    <a:pt x="1617923" y="477159"/>
+                  </a:lnTo>
+                  <a:lnTo>
+                    <a:pt x="1688267" y="491748"/>
+                  </a:lnTo>
+                  <a:lnTo>
+                    <a:pt x="1758612" y="505936"/>
+                  </a:lnTo>
+                  <a:lnTo>
+                    <a:pt x="1828956" y="519733"/>
+                  </a:lnTo>
+                  <a:lnTo>
+                    <a:pt x="1899301" y="533150"/>
+                  </a:lnTo>
+                  <a:lnTo>
+                    <a:pt x="1969645" y="546197"/>
+                  </a:lnTo>
+                  <a:lnTo>
+                    <a:pt x="2039990" y="558886"/>
+                  </a:lnTo>
+                  <a:lnTo>
+                    <a:pt x="2110334" y="571225"/>
+                  </a:lnTo>
+                  <a:lnTo>
+                    <a:pt x="2180679" y="583224"/>
+                  </a:lnTo>
+                  <a:lnTo>
+                    <a:pt x="2251023" y="594893"/>
+                  </a:lnTo>
+                  <a:lnTo>
+                    <a:pt x="2321368" y="606241"/>
+                  </a:lnTo>
+                  <a:lnTo>
+                    <a:pt x="2391712" y="617277"/>
+                  </a:lnTo>
+                  <a:lnTo>
+                    <a:pt x="2462057" y="628008"/>
+                  </a:lnTo>
+                  <a:lnTo>
+                    <a:pt x="2532401" y="638444"/>
+                  </a:lnTo>
+                  <a:lnTo>
+                    <a:pt x="2602746" y="648593"/>
+                  </a:lnTo>
+                  <a:lnTo>
+                    <a:pt x="2673090" y="658463"/>
+                  </a:lnTo>
+                  <a:lnTo>
+                    <a:pt x="2743435" y="668060"/>
+                  </a:lnTo>
+                  <a:lnTo>
+                    <a:pt x="2813779" y="677394"/>
+                  </a:lnTo>
+                  <a:lnTo>
+                    <a:pt x="2884124" y="686470"/>
+                  </a:lnTo>
+                  <a:lnTo>
+                    <a:pt x="2954468" y="695297"/>
+                  </a:lnTo>
+                  <a:lnTo>
+                    <a:pt x="3024813" y="703881"/>
+                  </a:lnTo>
+                  <a:lnTo>
+                    <a:pt x="3095157" y="712228"/>
+                  </a:lnTo>
+                  <a:lnTo>
+                    <a:pt x="3165502" y="720346"/>
+                  </a:lnTo>
+                  <a:lnTo>
+                    <a:pt x="3235846" y="728240"/>
+                  </a:lnTo>
+                  <a:lnTo>
+                    <a:pt x="3306191" y="735916"/>
+                  </a:lnTo>
+                  <a:lnTo>
+                    <a:pt x="3376535" y="743382"/>
+                  </a:lnTo>
+                  <a:lnTo>
+                    <a:pt x="3446880" y="750642"/>
+                  </a:lnTo>
+                  <a:lnTo>
+                    <a:pt x="3517224" y="757702"/>
+                  </a:lnTo>
+                  <a:lnTo>
+                    <a:pt x="3587569" y="764567"/>
+                  </a:lnTo>
+                  <a:lnTo>
+                    <a:pt x="3657913" y="771244"/>
+                  </a:lnTo>
+                  <a:lnTo>
+                    <a:pt x="3728257" y="777737"/>
+                  </a:lnTo>
+                  <a:lnTo>
+                    <a:pt x="3798602" y="784051"/>
+                  </a:lnTo>
+                  <a:lnTo>
+                    <a:pt x="3868946" y="790191"/>
+                  </a:lnTo>
+                  <a:lnTo>
+                    <a:pt x="3939291" y="796162"/>
+                  </a:lnTo>
+                  <a:lnTo>
+                    <a:pt x="4009635" y="801969"/>
+                  </a:lnTo>
+                  <a:lnTo>
+                    <a:pt x="4079980" y="807616"/>
+                  </a:lnTo>
+                  <a:lnTo>
+                    <a:pt x="4150324" y="813107"/>
+                  </a:lnTo>
+                  <a:lnTo>
+                    <a:pt x="4220669" y="818448"/>
+                  </a:lnTo>
+                  <a:lnTo>
+                    <a:pt x="4291013" y="823641"/>
+                  </a:lnTo>
+                  <a:lnTo>
+                    <a:pt x="4361358" y="828691"/>
+                  </a:lnTo>
+                  <a:lnTo>
+                    <a:pt x="4431702" y="833603"/>
+                  </a:lnTo>
+                  <a:lnTo>
+                    <a:pt x="4502047" y="838379"/>
+                  </a:lnTo>
+                  <a:lnTo>
+                    <a:pt x="4572391" y="843023"/>
+                  </a:lnTo>
+                  <a:lnTo>
+                    <a:pt x="4642736" y="847540"/>
+                  </a:lnTo>
+                  <a:lnTo>
+                    <a:pt x="4713080" y="851932"/>
+                  </a:lnTo>
+                  <a:lnTo>
+                    <a:pt x="4783425" y="856204"/>
+                  </a:lnTo>
+                  <a:lnTo>
+                    <a:pt x="4853769" y="860357"/>
+                  </a:lnTo>
+                  <a:lnTo>
+                    <a:pt x="4924114" y="864397"/>
+                  </a:lnTo>
+                  <a:lnTo>
+                    <a:pt x="4994458" y="868325"/>
+                  </a:lnTo>
+                  <a:lnTo>
+                    <a:pt x="5064803" y="872145"/>
+                  </a:lnTo>
+                  <a:lnTo>
+                    <a:pt x="5135147" y="875860"/>
+                  </a:lnTo>
+                  <a:lnTo>
+                    <a:pt x="5205492" y="879473"/>
+                  </a:lnTo>
+                  <a:lnTo>
+                    <a:pt x="5275836" y="882986"/>
+                  </a:lnTo>
+                  <a:lnTo>
+                    <a:pt x="5346181" y="886403"/>
+                  </a:lnTo>
+                  <a:lnTo>
+                    <a:pt x="5416525" y="889725"/>
+                  </a:lnTo>
+                  <a:lnTo>
+                    <a:pt x="5486870" y="892956"/>
+                  </a:lnTo>
+                  <a:lnTo>
+                    <a:pt x="5557214" y="896098"/>
+                  </a:lnTo>
+                  <a:lnTo>
+                    <a:pt x="5627559" y="899154"/>
+                  </a:lnTo>
+                  <a:lnTo>
+                    <a:pt x="5697903" y="902125"/>
+                  </a:lnTo>
+                  <a:lnTo>
+                    <a:pt x="5768248" y="905015"/>
+                  </a:lnTo>
+                  <a:lnTo>
+                    <a:pt x="5838592" y="907825"/>
+                  </a:lnTo>
+                  <a:lnTo>
+                    <a:pt x="5908937" y="910557"/>
+                  </a:lnTo>
+                  <a:lnTo>
+                    <a:pt x="5979281" y="913215"/>
+                  </a:lnTo>
+                  <a:lnTo>
+                    <a:pt x="6049626" y="915799"/>
+                  </a:lnTo>
+                  <a:lnTo>
+                    <a:pt x="6119970" y="918312"/>
+                  </a:lnTo>
+                  <a:lnTo>
+                    <a:pt x="6190315" y="920756"/>
+                  </a:lnTo>
+                  <a:lnTo>
+                    <a:pt x="6260659" y="923133"/>
+                  </a:lnTo>
+                  <a:lnTo>
+                    <a:pt x="6331004" y="925444"/>
+                  </a:lnTo>
+                  <a:lnTo>
+                    <a:pt x="6401348" y="927692"/>
+                  </a:lnTo>
+                  <a:lnTo>
+                    <a:pt x="6471693" y="929878"/>
+                  </a:lnTo>
+                  <a:lnTo>
+                    <a:pt x="6542037" y="932003"/>
+                  </a:lnTo>
+                  <a:lnTo>
+                    <a:pt x="6612382" y="934070"/>
+                  </a:lnTo>
+                  <a:lnTo>
+                    <a:pt x="6682726" y="936080"/>
+                  </a:lnTo>
+                  <a:lnTo>
+                    <a:pt x="6753071" y="938035"/>
+                  </a:lnTo>
+                  <a:lnTo>
+                    <a:pt x="6823415" y="939936"/>
+                  </a:lnTo>
+                  <a:lnTo>
+                    <a:pt x="6893760" y="941785"/>
+                  </a:lnTo>
+                  <a:lnTo>
+                    <a:pt x="6964104" y="943582"/>
+                  </a:lnTo>
+                </a:path>
+              </a:pathLst>
+            </a:custGeom>
+            <a:ln w="27101" cap="flat">
+              <a:solidFill>
+                <a:srgbClr val="FF8C00">
+                  <a:alpha val="100000"/>
+                </a:srgbClr>
+              </a:solidFill>
+              <a:prstDash val="solid"/>
+              <a:round/>
+            </a:ln>
+          </p:spPr>
+          <p:txBody>
+            <a:bodyPr/>
+            <a:lstStyle/>
+            <a:p/>
+          </p:txBody>
+        </p:sp>
+        <p:sp>
+          <p:nvSpPr>
+            <p:cNvPr id="75" name="pl75"/>
+            <p:cNvSpPr/>
+            <p:nvPr/>
+          </p:nvSpPr>
+          <p:spPr>
+            <a:xfrm>
+              <a:off x="887106" y="5294352"/>
+              <a:ext cx="7660515" cy="0"/>
+            </a:xfrm>
+            <a:custGeom>
+              <a:avLst/>
+              <a:pathLst>
+                <a:path w="7660515" h="0">
+                  <a:moveTo>
+                    <a:pt x="0" y="0"/>
+                  </a:moveTo>
+                  <a:lnTo>
+                    <a:pt x="7660515" y="0"/>
+                  </a:lnTo>
+                  <a:lnTo>
+                    <a:pt x="7660515" y="0"/>
+                  </a:lnTo>
+                </a:path>
+              </a:pathLst>
+            </a:custGeom>
+            <a:ln w="13550" cap="flat">
+              <a:solidFill>
+                <a:srgbClr val="7F7F7F">
+                  <a:alpha val="100000"/>
+                </a:srgbClr>
+              </a:solidFill>
+              <a:prstDash val="dash"/>
+              <a:round/>
+            </a:ln>
+          </p:spPr>
+          <p:txBody>
+            <a:bodyPr/>
+            <a:lstStyle/>
+            <a:p/>
+          </p:txBody>
+        </p:sp>
+        <p:sp>
+          <p:nvSpPr>
+            <p:cNvPr id="76" name="pl76"/>
+            <p:cNvSpPr/>
+            <p:nvPr/>
+          </p:nvSpPr>
+          <p:spPr>
+            <a:xfrm>
+              <a:off x="4292500" y="4336484"/>
+              <a:ext cx="0" cy="1317069"/>
+            </a:xfrm>
+            <a:custGeom>
+              <a:avLst/>
+              <a:pathLst>
+                <a:path w="0" h="1317069">
+                  <a:moveTo>
+                    <a:pt x="0" y="1317069"/>
+                  </a:moveTo>
+                  <a:lnTo>
+                    <a:pt x="0" y="0"/>
+                  </a:lnTo>
+                  <a:lnTo>
+                    <a:pt x="0" y="0"/>
+                  </a:lnTo>
+                </a:path>
+              </a:pathLst>
+            </a:custGeom>
+            <a:ln w="13550" cap="flat">
+              <a:solidFill>
+                <a:srgbClr val="666666">
+                  <a:alpha val="100000"/>
+                </a:srgbClr>
+              </a:solidFill>
+              <a:prstDash val="dot"/>
+              <a:round/>
+            </a:ln>
+          </p:spPr>
+          <p:txBody>
+            <a:bodyPr/>
+            <a:lstStyle/>
+            <a:p/>
+          </p:txBody>
+        </p:sp>
+        <p:sp>
+          <p:nvSpPr>
+            <p:cNvPr id="77" name="pl77"/>
+            <p:cNvSpPr/>
+            <p:nvPr/>
+          </p:nvSpPr>
+          <p:spPr>
+            <a:xfrm>
+              <a:off x="3124839" y="4336484"/>
+              <a:ext cx="0" cy="1317069"/>
+            </a:xfrm>
+            <a:custGeom>
+              <a:avLst/>
+              <a:pathLst>
+                <a:path w="0" h="1317069">
+                  <a:moveTo>
+                    <a:pt x="0" y="1317069"/>
+                  </a:moveTo>
+                  <a:lnTo>
+                    <a:pt x="0" y="0"/>
+                  </a:lnTo>
+                  <a:lnTo>
+                    <a:pt x="0" y="0"/>
+                  </a:lnTo>
+                </a:path>
+              </a:pathLst>
+            </a:custGeom>
+            <a:ln w="13550" cap="flat">
+              <a:solidFill>
+                <a:srgbClr val="4682B4">
+                  <a:alpha val="69803"/>
+                </a:srgbClr>
+              </a:solidFill>
+              <a:prstDash val="dash"/>
+              <a:round/>
+            </a:ln>
+          </p:spPr>
+          <p:txBody>
+            <a:bodyPr/>
+            <a:lstStyle/>
+            <a:p/>
+          </p:txBody>
+        </p:sp>
+        <p:sp>
+          <p:nvSpPr>
+            <p:cNvPr id="78" name="pl78"/>
+            <p:cNvSpPr/>
+            <p:nvPr/>
+          </p:nvSpPr>
+          <p:spPr>
+            <a:xfrm>
+              <a:off x="5508592" y="4336484"/>
+              <a:ext cx="0" cy="1317069"/>
+            </a:xfrm>
+            <a:custGeom>
+              <a:avLst/>
+              <a:pathLst>
+                <a:path w="0" h="1317069">
+                  <a:moveTo>
+                    <a:pt x="0" y="1317069"/>
+                  </a:moveTo>
+                  <a:lnTo>
+                    <a:pt x="0" y="0"/>
+                  </a:lnTo>
+                  <a:lnTo>
+                    <a:pt x="0" y="0"/>
+                  </a:lnTo>
+                </a:path>
+              </a:pathLst>
+            </a:custGeom>
+            <a:ln w="13550" cap="flat">
+              <a:solidFill>
+                <a:srgbClr val="4682B4">
+                  <a:alpha val="69803"/>
+                </a:srgbClr>
+              </a:solidFill>
+              <a:prstDash val="dash"/>
+              <a:round/>
+            </a:ln>
+          </p:spPr>
+          <p:txBody>
+            <a:bodyPr/>
+            <a:lstStyle/>
+            <a:p/>
+          </p:txBody>
+        </p:sp>
+        <p:sp>
+          <p:nvSpPr>
+            <p:cNvPr id="79" name="tx79"/>
+            <p:cNvSpPr/>
+            <p:nvPr/>
+          </p:nvSpPr>
+          <p:spPr>
+            <a:xfrm>
+              <a:off x="762297" y="5553636"/>
+              <a:ext cx="62179" cy="80101"/>
+            </a:xfrm>
+            <a:prstGeom prst="rect">
+              <a:avLst/>
+            </a:prstGeom>
+            <a:noFill/>
+          </p:spPr>
+          <p:txBody>
+            <a:bodyPr lIns="0" rIns="0" tIns="0" bIns="0" anchorCtr="1" anchor="ctr" wrap="none"/>
+            <a:lstStyle/>
+            <a:p>
+              <a:pPr algn="l" marL="0" marR="0" indent="0">
+                <a:lnSpc>
+                  <a:spcPts val="880"/>
+                </a:lnSpc>
+                <a:spcBef>
+                  <a:spcPts val="0"/>
+                </a:spcBef>
+                <a:spcAft>
+                  <a:spcPts val="0"/>
+                </a:spcAft>
+              </a:pPr>
+              <a:r>
+                <a:rPr sz="880">
+                  <a:solidFill>
+                    <a:srgbClr val="4D4D4D">
+                      <a:alpha val="100000"/>
+                    </a:srgbClr>
+                  </a:solidFill>
+                  <a:latin typeface="Helvetica"/>
+                  <a:cs typeface="Helvetica"/>
+                </a:rPr>
+                <a:t>0</a:t>
+              </a:r>
+            </a:p>
+          </p:txBody>
+        </p:sp>
+        <p:sp>
+          <p:nvSpPr>
+            <p:cNvPr id="80" name="tx80"/>
+            <p:cNvSpPr/>
+            <p:nvPr/>
+          </p:nvSpPr>
+          <p:spPr>
+            <a:xfrm>
+              <a:off x="762297" y="5254302"/>
+              <a:ext cx="62179" cy="80101"/>
+            </a:xfrm>
+            <a:prstGeom prst="rect">
+              <a:avLst/>
+            </a:prstGeom>
+            <a:noFill/>
+          </p:spPr>
+          <p:txBody>
+            <a:bodyPr lIns="0" rIns="0" tIns="0" bIns="0" anchorCtr="1" anchor="ctr" wrap="none"/>
+            <a:lstStyle/>
+            <a:p>
+              <a:pPr algn="l" marL="0" marR="0" indent="0">
+                <a:lnSpc>
+                  <a:spcPts val="880"/>
+                </a:lnSpc>
+                <a:spcBef>
+                  <a:spcPts val="0"/>
+                </a:spcBef>
+                <a:spcAft>
+                  <a:spcPts val="0"/>
+                </a:spcAft>
+              </a:pPr>
+              <a:r>
+                <a:rPr sz="880">
+                  <a:solidFill>
+                    <a:srgbClr val="4D4D4D">
+                      <a:alpha val="100000"/>
+                    </a:srgbClr>
+                  </a:solidFill>
+                  <a:latin typeface="Helvetica"/>
+                  <a:cs typeface="Helvetica"/>
+                </a:rPr>
+                <a:t>1</a:t>
+              </a:r>
+            </a:p>
+          </p:txBody>
+        </p:sp>
+        <p:sp>
+          <p:nvSpPr>
+            <p:cNvPr id="81" name="tx81"/>
+            <p:cNvSpPr/>
+            <p:nvPr/>
+          </p:nvSpPr>
+          <p:spPr>
+            <a:xfrm>
+              <a:off x="762297" y="4954968"/>
+              <a:ext cx="62179" cy="80101"/>
+            </a:xfrm>
+            <a:prstGeom prst="rect">
+              <a:avLst/>
+            </a:prstGeom>
+            <a:noFill/>
+          </p:spPr>
+          <p:txBody>
+            <a:bodyPr lIns="0" rIns="0" tIns="0" bIns="0" anchorCtr="1" anchor="ctr" wrap="none"/>
+            <a:lstStyle/>
+            <a:p>
+              <a:pPr algn="l" marL="0" marR="0" indent="0">
+                <a:lnSpc>
+                  <a:spcPts val="880"/>
+                </a:lnSpc>
+                <a:spcBef>
+                  <a:spcPts val="0"/>
+                </a:spcBef>
+                <a:spcAft>
+                  <a:spcPts val="0"/>
+                </a:spcAft>
+              </a:pPr>
+              <a:r>
+                <a:rPr sz="880">
+                  <a:solidFill>
+                    <a:srgbClr val="4D4D4D">
+                      <a:alpha val="100000"/>
+                    </a:srgbClr>
+                  </a:solidFill>
+                  <a:latin typeface="Helvetica"/>
+                  <a:cs typeface="Helvetica"/>
+                </a:rPr>
+                <a:t>2</a:t>
+              </a:r>
+            </a:p>
+          </p:txBody>
+        </p:sp>
+        <p:sp>
+          <p:nvSpPr>
+            <p:cNvPr id="82" name="tx82"/>
+            <p:cNvSpPr/>
+            <p:nvPr/>
+          </p:nvSpPr>
+          <p:spPr>
+            <a:xfrm>
+              <a:off x="762297" y="4655634"/>
+              <a:ext cx="62179" cy="80101"/>
+            </a:xfrm>
+            <a:prstGeom prst="rect">
+              <a:avLst/>
+            </a:prstGeom>
+            <a:noFill/>
+          </p:spPr>
+          <p:txBody>
+            <a:bodyPr lIns="0" rIns="0" tIns="0" bIns="0" anchorCtr="1" anchor="ctr" wrap="none"/>
+            <a:lstStyle/>
+            <a:p>
+              <a:pPr algn="l" marL="0" marR="0" indent="0">
+                <a:lnSpc>
+                  <a:spcPts val="880"/>
+                </a:lnSpc>
+                <a:spcBef>
+                  <a:spcPts val="0"/>
+                </a:spcBef>
+                <a:spcAft>
+                  <a:spcPts val="0"/>
+                </a:spcAft>
+              </a:pPr>
+              <a:r>
+                <a:rPr sz="880">
+                  <a:solidFill>
+                    <a:srgbClr val="4D4D4D">
+                      <a:alpha val="100000"/>
+                    </a:srgbClr>
+                  </a:solidFill>
+                  <a:latin typeface="Helvetica"/>
+                  <a:cs typeface="Helvetica"/>
+                </a:rPr>
+                <a:t>3</a:t>
+              </a:r>
+            </a:p>
+          </p:txBody>
+        </p:sp>
+        <p:sp>
+          <p:nvSpPr>
+            <p:cNvPr id="83" name="tx83"/>
+            <p:cNvSpPr/>
+            <p:nvPr/>
+          </p:nvSpPr>
+          <p:spPr>
+            <a:xfrm>
+              <a:off x="762297" y="4356300"/>
+              <a:ext cx="62179" cy="80101"/>
+            </a:xfrm>
+            <a:prstGeom prst="rect">
+              <a:avLst/>
+            </a:prstGeom>
+            <a:noFill/>
+          </p:spPr>
+          <p:txBody>
+            <a:bodyPr lIns="0" rIns="0" tIns="0" bIns="0" anchorCtr="1" anchor="ctr" wrap="none"/>
+            <a:lstStyle/>
+            <a:p>
+              <a:pPr algn="l" marL="0" marR="0" indent="0">
+                <a:lnSpc>
+                  <a:spcPts val="880"/>
+                </a:lnSpc>
+                <a:spcBef>
+                  <a:spcPts val="0"/>
+                </a:spcBef>
+                <a:spcAft>
+                  <a:spcPts val="0"/>
+                </a:spcAft>
+              </a:pPr>
+              <a:r>
+                <a:rPr sz="880">
+                  <a:solidFill>
+                    <a:srgbClr val="4D4D4D">
+                      <a:alpha val="100000"/>
+                    </a:srgbClr>
+                  </a:solidFill>
+                  <a:latin typeface="Helvetica"/>
+                  <a:cs typeface="Helvetica"/>
+                </a:rPr>
+                <a:t>4</a:t>
+              </a:r>
+            </a:p>
+          </p:txBody>
+        </p:sp>
+        <p:sp>
+          <p:nvSpPr>
+            <p:cNvPr id="84" name="tx84"/>
+            <p:cNvSpPr/>
+            <p:nvPr/>
+          </p:nvSpPr>
+          <p:spPr>
+            <a:xfrm>
+              <a:off x="1346003" y="5716183"/>
+              <a:ext cx="161574" cy="80101"/>
+            </a:xfrm>
+            <a:prstGeom prst="rect">
+              <a:avLst/>
+            </a:prstGeom>
+            <a:noFill/>
+          </p:spPr>
+          <p:txBody>
+            <a:bodyPr lIns="0" rIns="0" tIns="0" bIns="0" anchorCtr="1" anchor="ctr" wrap="none"/>
+            <a:lstStyle/>
+            <a:p>
+              <a:pPr algn="l" marL="0" marR="0" indent="0">
+                <a:lnSpc>
+                  <a:spcPts val="880"/>
+                </a:lnSpc>
+                <a:spcBef>
+                  <a:spcPts val="0"/>
+                </a:spcBef>
+                <a:spcAft>
+                  <a:spcPts val="0"/>
+                </a:spcAft>
+              </a:pPr>
+              <a:r>
+                <a:rPr sz="880">
+                  <a:solidFill>
+                    <a:srgbClr val="4D4D4D">
+                      <a:alpha val="100000"/>
+                    </a:srgbClr>
+                  </a:solidFill>
+                  <a:latin typeface="Helvetica"/>
+                  <a:cs typeface="Helvetica"/>
+                </a:rPr>
+                <a:t>-50</a:t>
+              </a:r>
+            </a:p>
+          </p:txBody>
+        </p:sp>
+        <p:sp>
+          <p:nvSpPr>
+            <p:cNvPr id="85" name="tx85"/>
+            <p:cNvSpPr/>
+            <p:nvPr/>
+          </p:nvSpPr>
+          <p:spPr>
+            <a:xfrm>
+              <a:off x="2196512" y="5716183"/>
+              <a:ext cx="161574" cy="80101"/>
+            </a:xfrm>
+            <a:prstGeom prst="rect">
+              <a:avLst/>
+            </a:prstGeom>
+            <a:noFill/>
+          </p:spPr>
+          <p:txBody>
+            <a:bodyPr lIns="0" rIns="0" tIns="0" bIns="0" anchorCtr="1" anchor="ctr" wrap="none"/>
+            <a:lstStyle/>
+            <a:p>
+              <a:pPr algn="l" marL="0" marR="0" indent="0">
+                <a:lnSpc>
+                  <a:spcPts val="880"/>
+                </a:lnSpc>
+                <a:spcBef>
+                  <a:spcPts val="0"/>
+                </a:spcBef>
+                <a:spcAft>
+                  <a:spcPts val="0"/>
+                </a:spcAft>
+              </a:pPr>
+              <a:r>
+                <a:rPr sz="880">
+                  <a:solidFill>
+                    <a:srgbClr val="4D4D4D">
+                      <a:alpha val="100000"/>
+                    </a:srgbClr>
+                  </a:solidFill>
+                  <a:latin typeface="Helvetica"/>
+                  <a:cs typeface="Helvetica"/>
+                </a:rPr>
+                <a:t>-40</a:t>
+              </a:r>
+            </a:p>
+          </p:txBody>
+        </p:sp>
+        <p:sp>
+          <p:nvSpPr>
+            <p:cNvPr id="86" name="tx86"/>
+            <p:cNvSpPr/>
+            <p:nvPr/>
+          </p:nvSpPr>
+          <p:spPr>
+            <a:xfrm>
+              <a:off x="3047022" y="5716183"/>
+              <a:ext cx="161574" cy="80101"/>
+            </a:xfrm>
+            <a:prstGeom prst="rect">
+              <a:avLst/>
+            </a:prstGeom>
+            <a:noFill/>
+          </p:spPr>
+          <p:txBody>
+            <a:bodyPr lIns="0" rIns="0" tIns="0" bIns="0" anchorCtr="1" anchor="ctr" wrap="none"/>
+            <a:lstStyle/>
+            <a:p>
+              <a:pPr algn="l" marL="0" marR="0" indent="0">
+                <a:lnSpc>
+                  <a:spcPts val="880"/>
+                </a:lnSpc>
+                <a:spcBef>
+                  <a:spcPts val="0"/>
+                </a:spcBef>
+                <a:spcAft>
+                  <a:spcPts val="0"/>
+                </a:spcAft>
+              </a:pPr>
+              <a:r>
+                <a:rPr sz="880">
+                  <a:solidFill>
+                    <a:srgbClr val="4D4D4D">
+                      <a:alpha val="100000"/>
+                    </a:srgbClr>
+                  </a:solidFill>
+                  <a:latin typeface="Helvetica"/>
+                  <a:cs typeface="Helvetica"/>
+                </a:rPr>
+                <a:t>-30</a:t>
+              </a:r>
+            </a:p>
+          </p:txBody>
+        </p:sp>
+        <p:sp>
+          <p:nvSpPr>
+            <p:cNvPr id="87" name="tx87"/>
+            <p:cNvSpPr/>
+            <p:nvPr/>
+          </p:nvSpPr>
+          <p:spPr>
+            <a:xfrm>
+              <a:off x="3897531" y="5716183"/>
+              <a:ext cx="161574" cy="80101"/>
+            </a:xfrm>
+            <a:prstGeom prst="rect">
+              <a:avLst/>
+            </a:prstGeom>
+            <a:noFill/>
+          </p:spPr>
+          <p:txBody>
+            <a:bodyPr lIns="0" rIns="0" tIns="0" bIns="0" anchorCtr="1" anchor="ctr" wrap="none"/>
+            <a:lstStyle/>
+            <a:p>
+              <a:pPr algn="l" marL="0" marR="0" indent="0">
+                <a:lnSpc>
+                  <a:spcPts val="880"/>
+                </a:lnSpc>
+                <a:spcBef>
+                  <a:spcPts val="0"/>
+                </a:spcBef>
+                <a:spcAft>
+                  <a:spcPts val="0"/>
+                </a:spcAft>
+              </a:pPr>
+              <a:r>
+                <a:rPr sz="880">
+                  <a:solidFill>
+                    <a:srgbClr val="4D4D4D">
+                      <a:alpha val="100000"/>
+                    </a:srgbClr>
+                  </a:solidFill>
+                  <a:latin typeface="Helvetica"/>
+                  <a:cs typeface="Helvetica"/>
+                </a:rPr>
+                <a:t>-20</a:t>
+              </a:r>
+            </a:p>
+          </p:txBody>
+        </p:sp>
+        <p:sp>
+          <p:nvSpPr>
+            <p:cNvPr id="88" name="tx88"/>
+            <p:cNvSpPr/>
+            <p:nvPr/>
+          </p:nvSpPr>
+          <p:spPr>
+            <a:xfrm>
+              <a:off x="4748041" y="5716183"/>
+              <a:ext cx="161574" cy="80101"/>
+            </a:xfrm>
+            <a:prstGeom prst="rect">
+              <a:avLst/>
+            </a:prstGeom>
+            <a:noFill/>
+          </p:spPr>
+          <p:txBody>
+            <a:bodyPr lIns="0" rIns="0" tIns="0" bIns="0" anchorCtr="1" anchor="ctr" wrap="none"/>
+            <a:lstStyle/>
+            <a:p>
+              <a:pPr algn="l" marL="0" marR="0" indent="0">
+                <a:lnSpc>
+                  <a:spcPts val="880"/>
+                </a:lnSpc>
+                <a:spcBef>
+                  <a:spcPts val="0"/>
+                </a:spcBef>
+                <a:spcAft>
+                  <a:spcPts val="0"/>
+                </a:spcAft>
+              </a:pPr>
+              <a:r>
+                <a:rPr sz="880">
+                  <a:solidFill>
+                    <a:srgbClr val="4D4D4D">
+                      <a:alpha val="100000"/>
+                    </a:srgbClr>
+                  </a:solidFill>
+                  <a:latin typeface="Helvetica"/>
+                  <a:cs typeface="Helvetica"/>
+                </a:rPr>
+                <a:t>-10</a:t>
+              </a:r>
+            </a:p>
+          </p:txBody>
+        </p:sp>
+        <p:sp>
+          <p:nvSpPr>
+            <p:cNvPr id="89" name="tx89"/>
+            <p:cNvSpPr/>
+            <p:nvPr/>
+          </p:nvSpPr>
+          <p:spPr>
+            <a:xfrm>
+              <a:off x="5648248" y="5716183"/>
+              <a:ext cx="62179" cy="80101"/>
+            </a:xfrm>
+            <a:prstGeom prst="rect">
+              <a:avLst/>
+            </a:prstGeom>
+            <a:noFill/>
+          </p:spPr>
+          <p:txBody>
+            <a:bodyPr lIns="0" rIns="0" tIns="0" bIns="0" anchorCtr="1" anchor="ctr" wrap="none"/>
+            <a:lstStyle/>
+            <a:p>
+              <a:pPr algn="l" marL="0" marR="0" indent="0">
+                <a:lnSpc>
+                  <a:spcPts val="880"/>
+                </a:lnSpc>
+                <a:spcBef>
+                  <a:spcPts val="0"/>
+                </a:spcBef>
+                <a:spcAft>
+                  <a:spcPts val="0"/>
+                </a:spcAft>
+              </a:pPr>
+              <a:r>
+                <a:rPr sz="880">
+                  <a:solidFill>
+                    <a:srgbClr val="4D4D4D">
+                      <a:alpha val="100000"/>
+                    </a:srgbClr>
+                  </a:solidFill>
+                  <a:latin typeface="Helvetica"/>
+                  <a:cs typeface="Helvetica"/>
+                </a:rPr>
+                <a:t>0</a:t>
+              </a:r>
+            </a:p>
+          </p:txBody>
+        </p:sp>
+        <p:sp>
+          <p:nvSpPr>
+            <p:cNvPr id="90" name="tx90"/>
+            <p:cNvSpPr/>
+            <p:nvPr/>
+          </p:nvSpPr>
+          <p:spPr>
+            <a:xfrm>
+              <a:off x="6467667" y="5716183"/>
+              <a:ext cx="124358" cy="80101"/>
+            </a:xfrm>
+            <a:prstGeom prst="rect">
+              <a:avLst/>
+            </a:prstGeom>
+            <a:noFill/>
+          </p:spPr>
+          <p:txBody>
+            <a:bodyPr lIns="0" rIns="0" tIns="0" bIns="0" anchorCtr="1" anchor="ctr" wrap="none"/>
+            <a:lstStyle/>
+            <a:p>
+              <a:pPr algn="l" marL="0" marR="0" indent="0">
+                <a:lnSpc>
+                  <a:spcPts val="880"/>
+                </a:lnSpc>
+                <a:spcBef>
+                  <a:spcPts val="0"/>
+                </a:spcBef>
+                <a:spcAft>
+                  <a:spcPts val="0"/>
+                </a:spcAft>
+              </a:pPr>
+              <a:r>
+                <a:rPr sz="880">
+                  <a:solidFill>
+                    <a:srgbClr val="4D4D4D">
+                      <a:alpha val="100000"/>
+                    </a:srgbClr>
+                  </a:solidFill>
+                  <a:latin typeface="Helvetica"/>
+                  <a:cs typeface="Helvetica"/>
+                </a:rPr>
+                <a:t>10</a:t>
+              </a:r>
+            </a:p>
+          </p:txBody>
+        </p:sp>
+        <p:sp>
+          <p:nvSpPr>
+            <p:cNvPr id="91" name="tx91"/>
+            <p:cNvSpPr/>
+            <p:nvPr/>
+          </p:nvSpPr>
+          <p:spPr>
+            <a:xfrm>
+              <a:off x="7318177" y="5716183"/>
+              <a:ext cx="124358" cy="80101"/>
+            </a:xfrm>
+            <a:prstGeom prst="rect">
+              <a:avLst/>
+            </a:prstGeom>
+            <a:noFill/>
+          </p:spPr>
+          <p:txBody>
+            <a:bodyPr lIns="0" rIns="0" tIns="0" bIns="0" anchorCtr="1" anchor="ctr" wrap="none"/>
+            <a:lstStyle/>
+            <a:p>
+              <a:pPr algn="l" marL="0" marR="0" indent="0">
+                <a:lnSpc>
+                  <a:spcPts val="880"/>
+                </a:lnSpc>
+                <a:spcBef>
+                  <a:spcPts val="0"/>
+                </a:spcBef>
+                <a:spcAft>
+                  <a:spcPts val="0"/>
+                </a:spcAft>
+              </a:pPr>
+              <a:r>
+                <a:rPr sz="880">
+                  <a:solidFill>
+                    <a:srgbClr val="4D4D4D">
+                      <a:alpha val="100000"/>
+                    </a:srgbClr>
+                  </a:solidFill>
+                  <a:latin typeface="Helvetica"/>
+                  <a:cs typeface="Helvetica"/>
+                </a:rPr>
+                <a:t>20</a:t>
+              </a:r>
+            </a:p>
+          </p:txBody>
+        </p:sp>
+        <p:sp>
+          <p:nvSpPr>
+            <p:cNvPr id="92" name="tx92"/>
+            <p:cNvSpPr/>
+            <p:nvPr/>
+          </p:nvSpPr>
+          <p:spPr>
+            <a:xfrm>
+              <a:off x="8168686" y="5716183"/>
+              <a:ext cx="124358" cy="80101"/>
+            </a:xfrm>
+            <a:prstGeom prst="rect">
+              <a:avLst/>
+            </a:prstGeom>
+            <a:noFill/>
+          </p:spPr>
+          <p:txBody>
+            <a:bodyPr lIns="0" rIns="0" tIns="0" bIns="0" anchorCtr="1" anchor="ctr" wrap="none"/>
+            <a:lstStyle/>
+            <a:p>
+              <a:pPr algn="l" marL="0" marR="0" indent="0">
+                <a:lnSpc>
+                  <a:spcPts val="880"/>
+                </a:lnSpc>
+                <a:spcBef>
+                  <a:spcPts val="0"/>
+                </a:spcBef>
+                <a:spcAft>
+                  <a:spcPts val="0"/>
+                </a:spcAft>
+              </a:pPr>
+              <a:r>
+                <a:rPr sz="880">
+                  <a:solidFill>
+                    <a:srgbClr val="4D4D4D">
+                      <a:alpha val="100000"/>
+                    </a:srgbClr>
+                  </a:solidFill>
+                  <a:latin typeface="Helvetica"/>
+                  <a:cs typeface="Helvetica"/>
+                </a:rPr>
+                <a:t>30</a:t>
+              </a:r>
+            </a:p>
+          </p:txBody>
+        </p:sp>
+        <p:sp>
+          <p:nvSpPr>
+            <p:cNvPr id="93" name="tx93"/>
+            <p:cNvSpPr/>
+            <p:nvPr/>
+          </p:nvSpPr>
+          <p:spPr>
+            <a:xfrm>
+              <a:off x="1561815" y="5855859"/>
+              <a:ext cx="6311097" cy="100218"/>
+            </a:xfrm>
+            <a:prstGeom prst="rect">
+              <a:avLst/>
+            </a:prstGeom>
+            <a:noFill/>
+          </p:spPr>
+          <p:txBody>
+            <a:bodyPr lIns="0" rIns="0" tIns="0" bIns="0" anchorCtr="1" anchor="ctr" wrap="none"/>
+            <a:lstStyle/>
+            <a:p>
+              <a:pPr algn="l" marL="0" marR="0" indent="0">
+                <a:lnSpc>
+                  <a:spcPts val="1100"/>
+                </a:lnSpc>
+                <a:spcBef>
+                  <a:spcPts val="0"/>
+                </a:spcBef>
+                <a:spcAft>
+                  <a:spcPts val="0"/>
+                </a:spcAft>
+              </a:pPr>
+              <a:r>
+                <a:rPr sz="1100">
+                  <a:solidFill>
+                    <a:srgbClr val="000000">
+                      <a:alpha val="100000"/>
+                    </a:srgbClr>
+                  </a:solidFill>
+                  <a:latin typeface="Helvetica"/>
+                  <a:cs typeface="Helvetica"/>
+                </a:rPr>
+                <a:t>Sensitivity eGFR Difference (%): 100 × (CKD-EPI 2012 CysC − CKD-EPI 2021 Cr) / CKD-EPI 2021 Cr</a:t>
+              </a:r>
+            </a:p>
+          </p:txBody>
+        </p:sp>
+        <p:sp>
+          <p:nvSpPr>
+            <p:cNvPr id="94" name="tx94"/>
+            <p:cNvSpPr/>
+            <p:nvPr/>
+          </p:nvSpPr>
+          <p:spPr>
+            <a:xfrm rot="-5400000">
+              <a:off x="138035" y="4944909"/>
+              <a:ext cx="1016904" cy="100218"/>
+            </a:xfrm>
+            <a:prstGeom prst="rect">
+              <a:avLst/>
+            </a:prstGeom>
+            <a:noFill/>
+          </p:spPr>
+          <p:txBody>
+            <a:bodyPr lIns="0" rIns="0" tIns="0" bIns="0" anchorCtr="1" anchor="ctr" wrap="none"/>
+            <a:lstStyle/>
+            <a:p>
+              <a:pPr algn="l" marL="0" marR="0" indent="0">
+                <a:lnSpc>
+                  <a:spcPts val="1100"/>
+                </a:lnSpc>
+                <a:spcBef>
+                  <a:spcPts val="0"/>
+                </a:spcBef>
+                <a:spcAft>
+                  <a:spcPts val="0"/>
+                </a:spcAft>
+              </a:pPr>
+              <a:r>
+                <a:rPr sz="1100">
+                  <a:solidFill>
+                    <a:srgbClr val="000000">
+                      <a:alpha val="100000"/>
+                    </a:srgbClr>
+                  </a:solidFill>
+                  <a:latin typeface="Helvetica"/>
+                  <a:cs typeface="Helvetica"/>
+                </a:rPr>
+                <a:t>subHR (95% CI)</a:t>
+              </a:r>
+            </a:p>
+          </p:txBody>
+        </p:sp>
+        <p:sp>
+          <p:nvSpPr>
+            <p:cNvPr id="95" name="tx95"/>
+            <p:cNvSpPr/>
+            <p:nvPr/>
+          </p:nvSpPr>
+          <p:spPr>
+            <a:xfrm>
+              <a:off x="887106" y="4159544"/>
+              <a:ext cx="7026615" cy="82021"/>
+            </a:xfrm>
+            <a:prstGeom prst="rect">
+              <a:avLst/>
+            </a:prstGeom>
+            <a:noFill/>
+          </p:spPr>
+          <p:txBody>
+            <a:bodyPr lIns="0" rIns="0" tIns="0" bIns="0" anchorCtr="1" anchor="ctr" wrap="none"/>
+            <a:lstStyle/>
+            <a:p>
+              <a:pPr algn="l" marL="0" marR="0" indent="0">
+                <a:lnSpc>
+                  <a:spcPts val="900"/>
+                </a:lnSpc>
+                <a:spcBef>
+                  <a:spcPts val="0"/>
+                </a:spcBef>
+                <a:spcAft>
+                  <a:spcPts val="0"/>
+                </a:spcAft>
+              </a:pPr>
+              <a:r>
+                <a:rPr sz="900">
+                  <a:solidFill>
+                    <a:srgbClr val="404040">
+                      <a:alpha val="100000"/>
+                    </a:srgbClr>
+                  </a:solidFill>
+                  <a:latin typeface="Helvetica"/>
+                  <a:cs typeface="Helvetica"/>
+                </a:rPr>
+                <a:t>subHR per 10 % decline: 1.40 (1.23-1.60), p_Bonf = &lt;0.001 (n = 6)  |  per IQR decline (Δ = 28.0 %): 2.58 (1.79-3.70)  |  IQR: [-30.0, -2.0] %</a:t>
+              </a:r>
+            </a:p>
+          </p:txBody>
+        </p:sp>
+        <p:sp>
+          <p:nvSpPr>
+            <p:cNvPr id="96" name="tx96"/>
+            <p:cNvSpPr/>
+            <p:nvPr/>
+          </p:nvSpPr>
+          <p:spPr>
+            <a:xfrm>
+              <a:off x="887106" y="3932770"/>
               <a:ext cx="3668481" cy="120152"/>
             </a:xfrm>
             <a:prstGeom prst="rect">
